--- a/entregaveis/TCC_Ricardo_Calheiros_Defesa.pptx
+++ b/entregaveis/TCC_Ricardo_Calheiros_Defesa.pptx
@@ -29,6 +29,7 @@
     <p:sldId id="277" r:id="rId28"/>
     <p:sldId id="278" r:id="rId29"/>
     <p:sldId id="279" r:id="rId30"/>
+    <p:sldId id="280" r:id="rId31"/>
   </p:sldIdLst>
   <p:sldSz cx="12188952" cy="6858000" type="screen4x3"/>
   <p:notesSz cx="6858000" cy="9144000"/>
@@ -4213,7 +4214,7 @@
                 </a:solidFill>
                 <a:latin typeface="Calibri"/>
               </a:rPr>
-              <a:t>10/24</a:t>
+              <a:t>10/25</a:t>
             </a:r>
           </a:p>
         </p:txBody>
@@ -4727,7 +4728,7 @@
                 </a:solidFill>
                 <a:latin typeface="Calibri"/>
               </a:rPr>
-              <a:t>11/24</a:t>
+              <a:t>11/25</a:t>
             </a:r>
           </a:p>
         </p:txBody>
@@ -5570,7 +5571,7 @@
                 </a:solidFill>
                 <a:latin typeface="Calibri"/>
               </a:rPr>
-              <a:t>12/24</a:t>
+              <a:t>12/25</a:t>
             </a:r>
           </a:p>
         </p:txBody>
@@ -6319,7 +6320,7 @@
                 </a:solidFill>
                 <a:latin typeface="Calibri"/>
               </a:rPr>
-              <a:t>13/24</a:t>
+              <a:t>13/25</a:t>
             </a:r>
           </a:p>
         </p:txBody>
@@ -6663,7 +6664,7 @@
                 </a:solidFill>
                 <a:latin typeface="Calibri"/>
               </a:rPr>
-              <a:t>14/24</a:t>
+              <a:t>14/25</a:t>
             </a:r>
           </a:p>
         </p:txBody>
@@ -7769,7 +7770,7 @@
                 </a:solidFill>
                 <a:latin typeface="Calibri"/>
               </a:rPr>
-              <a:t>15/24</a:t>
+              <a:t>15/25</a:t>
             </a:r>
           </a:p>
         </p:txBody>
@@ -8622,7 +8623,7 @@
                 </a:solidFill>
                 <a:latin typeface="Calibri"/>
               </a:rPr>
-              <a:t>16/24</a:t>
+              <a:t>16/25</a:t>
             </a:r>
           </a:p>
         </p:txBody>
@@ -8716,7 +8717,1091 @@
                 </a:solidFill>
                 <a:latin typeface="Calibri"/>
               </a:rPr>
-              <a:t>15. Quão forte teria de ser o que não medimos para derrubar o resultado</a:t>
+              <a:t>15. O agregado esconde: os pretos, o setor privado e os mais velhos</a:t>
+            </a:r>
+          </a:p>
+        </p:txBody>
+      </p:sp>
+      <p:sp>
+        <p:nvSpPr>
+          <p:cNvPr id="4" name="TextBox 3"/>
+          <p:cNvSpPr txBox="1"/>
+          <p:nvPr/>
+        </p:nvSpPr>
+        <p:spPr>
+          <a:xfrm>
+            <a:off x="274320" y="594360"/>
+            <a:ext cx="10972800" cy="347472"/>
+          </a:xfrm>
+          <a:prstGeom prst="rect">
+            <a:avLst/>
+          </a:prstGeom>
+          <a:noFill/>
+        </p:spPr>
+        <p:txBody>
+          <a:bodyPr wrap="square">
+            <a:spAutoFit/>
+          </a:bodyPr>
+          <a:lstStyle/>
+          <a:p>
+            <a:pPr algn="l"/>
+            <a:r>
+              <a:rPr sz="1400" b="0" i="0">
+                <a:solidFill>
+                  <a:srgbClr val="BBDEFB"/>
+                </a:solidFill>
+                <a:latin typeface="Calibri"/>
+              </a:rPr>
+              <a:t>Mesmos modelos por recorte — mesmo perfil e mesmo bairro, contra brancos</a:t>
+            </a:r>
+          </a:p>
+        </p:txBody>
+      </p:sp>
+      <p:graphicFrame>
+        <p:nvGraphicFramePr>
+          <p:cNvPr id="5" name="Table 4"/>
+          <p:cNvGraphicFramePr>
+            <a:graphicFrameLocks noGrp="1"/>
+          </p:cNvGraphicFramePr>
+          <p:nvPr/>
+        </p:nvGraphicFramePr>
+        <p:xfrm>
+          <a:off x="274320" y="1188720"/>
+          <a:ext cx="7680960" cy="3840480"/>
+        </p:xfrm>
+        <a:graphic>
+          <a:graphicData uri="http://schemas.openxmlformats.org/drawingml/2006/table">
+            <a:tbl>
+              <a:tblPr firstRow="1" bandRow="1">
+                <a:tableStyleId>{5C22544A-7EE6-4342-B048-85BDC9FD1C3A}</a:tableStyleId>
+              </a:tblPr>
+              <a:tblGrid>
+                <a:gridCol w="2926080"/>
+                <a:gridCol w="1645920"/>
+                <a:gridCol w="1554480"/>
+                <a:gridCol w="1554480"/>
+              </a:tblGrid>
+              <a:tr h="548640">
+                <a:tc>
+                  <a:txBody>
+                    <a:bodyPr/>
+                    <a:lstStyle/>
+                    <a:p>
+                      <a:pPr algn="l"/>
+                      <a:r>
+                        <a:rPr b="1" sz="1300">
+                          <a:solidFill>
+                            <a:srgbClr val="FFFFFF"/>
+                          </a:solidFill>
+                          <a:latin typeface="Calibri"/>
+                        </a:rPr>
+                        <a:t>Recorte</a:t>
+                      </a:r>
+                    </a:p>
+                  </a:txBody>
+                  <a:tcPr anchor="ctr">
+                    <a:solidFill>
+                      <a:srgbClr val="1F3864"/>
+                    </a:solidFill>
+                  </a:tcPr>
+                </a:tc>
+                <a:tc>
+                  <a:txBody>
+                    <a:bodyPr/>
+                    <a:lstStyle/>
+                    <a:p>
+                      <a:pPr algn="l"/>
+                      <a:r>
+                        <a:rPr b="1" sz="1300">
+                          <a:solidFill>
+                            <a:srgbClr val="FFFFFF"/>
+                          </a:solidFill>
+                          <a:latin typeface="Calibri"/>
+                        </a:rPr>
+                        <a:t>Penalidade salarial</a:t>
+                      </a:r>
+                    </a:p>
+                  </a:txBody>
+                  <a:tcPr anchor="ctr">
+                    <a:solidFill>
+                      <a:srgbClr val="1F3864"/>
+                    </a:solidFill>
+                  </a:tcPr>
+                </a:tc>
+                <a:tc>
+                  <a:txBody>
+                    <a:bodyPr/>
+                    <a:lstStyle/>
+                    <a:p>
+                      <a:pPr algn="l"/>
+                      <a:r>
+                        <a:rPr b="1" sz="1300">
+                          <a:solidFill>
+                            <a:srgbClr val="FFFFFF"/>
+                          </a:solidFill>
+                          <a:latin typeface="Calibri"/>
+                        </a:rPr>
+                        <a:t>OR cargo qualificado</a:t>
+                      </a:r>
+                    </a:p>
+                  </a:txBody>
+                  <a:tcPr anchor="ctr">
+                    <a:solidFill>
+                      <a:srgbClr val="1F3864"/>
+                    </a:solidFill>
+                  </a:tcPr>
+                </a:tc>
+                <a:tc>
+                  <a:txBody>
+                    <a:bodyPr/>
+                    <a:lstStyle/>
+                    <a:p>
+                      <a:pPr algn="l"/>
+                      <a:r>
+                        <a:rPr b="1" sz="1300">
+                          <a:solidFill>
+                            <a:srgbClr val="FFFFFF"/>
+                          </a:solidFill>
+                          <a:latin typeface="Calibri"/>
+                        </a:rPr>
+                        <a:t>OR top 10%</a:t>
+                      </a:r>
+                    </a:p>
+                  </a:txBody>
+                  <a:tcPr anchor="ctr">
+                    <a:solidFill>
+                      <a:srgbClr val="1F3864"/>
+                    </a:solidFill>
+                  </a:tcPr>
+                </a:tc>
+              </a:tr>
+              <a:tr h="548640">
+                <a:tc>
+                  <a:txBody>
+                    <a:bodyPr/>
+                    <a:lstStyle/>
+                    <a:p>
+                      <a:pPr algn="l"/>
+                      <a:r>
+                        <a:rPr sz="1300" b="1">
+                          <a:solidFill>
+                            <a:srgbClr val="1F3864"/>
+                          </a:solidFill>
+                          <a:latin typeface="Calibri"/>
+                        </a:rPr>
+                        <a:t>Negro (categoria do trabalho)</a:t>
+                      </a:r>
+                    </a:p>
+                  </a:txBody>
+                  <a:tcPr anchor="ctr">
+                    <a:solidFill>
+                      <a:srgbClr val="FFFFFF"/>
+                    </a:solidFill>
+                  </a:tcPr>
+                </a:tc>
+                <a:tc>
+                  <a:txBody>
+                    <a:bodyPr/>
+                    <a:lstStyle/>
+                    <a:p>
+                      <a:pPr algn="l"/>
+                      <a:r>
+                        <a:rPr sz="1300">
+                          <a:solidFill>
+                            <a:srgbClr val="212121"/>
+                          </a:solidFill>
+                          <a:latin typeface="Calibri"/>
+                        </a:rPr>
+                        <a:t>6,1%</a:t>
+                      </a:r>
+                    </a:p>
+                  </a:txBody>
+                  <a:tcPr anchor="ctr">
+                    <a:solidFill>
+                      <a:srgbClr val="FFFFFF"/>
+                    </a:solidFill>
+                  </a:tcPr>
+                </a:tc>
+                <a:tc>
+                  <a:txBody>
+                    <a:bodyPr/>
+                    <a:lstStyle/>
+                    <a:p>
+                      <a:pPr algn="l"/>
+                      <a:r>
+                        <a:rPr sz="1300">
+                          <a:solidFill>
+                            <a:srgbClr val="212121"/>
+                          </a:solidFill>
+                          <a:latin typeface="Calibri"/>
+                        </a:rPr>
+                        <a:t>0,814</a:t>
+                      </a:r>
+                    </a:p>
+                  </a:txBody>
+                  <a:tcPr anchor="ctr">
+                    <a:solidFill>
+                      <a:srgbClr val="FFFFFF"/>
+                    </a:solidFill>
+                  </a:tcPr>
+                </a:tc>
+                <a:tc>
+                  <a:txBody>
+                    <a:bodyPr/>
+                    <a:lstStyle/>
+                    <a:p>
+                      <a:pPr algn="l"/>
+                      <a:r>
+                        <a:rPr sz="1300">
+                          <a:solidFill>
+                            <a:srgbClr val="212121"/>
+                          </a:solidFill>
+                          <a:latin typeface="Calibri"/>
+                        </a:rPr>
+                        <a:t>0,761</a:t>
+                      </a:r>
+                    </a:p>
+                  </a:txBody>
+                  <a:tcPr anchor="ctr">
+                    <a:solidFill>
+                      <a:srgbClr val="FFFFFF"/>
+                    </a:solidFill>
+                  </a:tcPr>
+                </a:tc>
+              </a:tr>
+              <a:tr h="548640">
+                <a:tc>
+                  <a:txBody>
+                    <a:bodyPr/>
+                    <a:lstStyle/>
+                    <a:p>
+                      <a:pPr algn="l"/>
+                      <a:r>
+                        <a:rPr sz="1300" b="1">
+                          <a:solidFill>
+                            <a:srgbClr val="1F3864"/>
+                          </a:solidFill>
+                          <a:latin typeface="Calibri"/>
+                        </a:rPr>
+                        <a:t>   Pardo</a:t>
+                      </a:r>
+                    </a:p>
+                  </a:txBody>
+                  <a:tcPr anchor="ctr">
+                    <a:solidFill>
+                      <a:srgbClr val="F5F5F5"/>
+                    </a:solidFill>
+                  </a:tcPr>
+                </a:tc>
+                <a:tc>
+                  <a:txBody>
+                    <a:bodyPr/>
+                    <a:lstStyle/>
+                    <a:p>
+                      <a:pPr algn="l"/>
+                      <a:r>
+                        <a:rPr sz="1300">
+                          <a:solidFill>
+                            <a:srgbClr val="212121"/>
+                          </a:solidFill>
+                          <a:latin typeface="Calibri"/>
+                        </a:rPr>
+                        <a:t>5,8%</a:t>
+                      </a:r>
+                    </a:p>
+                  </a:txBody>
+                  <a:tcPr anchor="ctr">
+                    <a:solidFill>
+                      <a:srgbClr val="F5F5F5"/>
+                    </a:solidFill>
+                  </a:tcPr>
+                </a:tc>
+                <a:tc>
+                  <a:txBody>
+                    <a:bodyPr/>
+                    <a:lstStyle/>
+                    <a:p>
+                      <a:pPr algn="l"/>
+                      <a:r>
+                        <a:rPr sz="1300">
+                          <a:solidFill>
+                            <a:srgbClr val="212121"/>
+                          </a:solidFill>
+                          <a:latin typeface="Calibri"/>
+                        </a:rPr>
+                        <a:t>0,820</a:t>
+                      </a:r>
+                    </a:p>
+                  </a:txBody>
+                  <a:tcPr anchor="ctr">
+                    <a:solidFill>
+                      <a:srgbClr val="F5F5F5"/>
+                    </a:solidFill>
+                  </a:tcPr>
+                </a:tc>
+                <a:tc>
+                  <a:txBody>
+                    <a:bodyPr/>
+                    <a:lstStyle/>
+                    <a:p>
+                      <a:pPr algn="l"/>
+                      <a:r>
+                        <a:rPr sz="1300">
+                          <a:solidFill>
+                            <a:srgbClr val="212121"/>
+                          </a:solidFill>
+                          <a:latin typeface="Calibri"/>
+                        </a:rPr>
+                        <a:t>0,768</a:t>
+                      </a:r>
+                    </a:p>
+                  </a:txBody>
+                  <a:tcPr anchor="ctr">
+                    <a:solidFill>
+                      <a:srgbClr val="F5F5F5"/>
+                    </a:solidFill>
+                  </a:tcPr>
+                </a:tc>
+              </a:tr>
+              <a:tr h="548640">
+                <a:tc>
+                  <a:txBody>
+                    <a:bodyPr/>
+                    <a:lstStyle/>
+                    <a:p>
+                      <a:pPr algn="l"/>
+                      <a:r>
+                        <a:rPr sz="1300" b="1">
+                          <a:solidFill>
+                            <a:srgbClr val="1F3864"/>
+                          </a:solidFill>
+                          <a:latin typeface="Calibri"/>
+                        </a:rPr>
+                        <a:t>   Preto</a:t>
+                      </a:r>
+                    </a:p>
+                  </a:txBody>
+                  <a:tcPr anchor="ctr">
+                    <a:solidFill>
+                      <a:srgbClr val="FFFFFF"/>
+                    </a:solidFill>
+                  </a:tcPr>
+                </a:tc>
+                <a:tc>
+                  <a:txBody>
+                    <a:bodyPr/>
+                    <a:lstStyle/>
+                    <a:p>
+                      <a:pPr algn="l"/>
+                      <a:r>
+                        <a:rPr sz="1300">
+                          <a:solidFill>
+                            <a:srgbClr val="212121"/>
+                          </a:solidFill>
+                          <a:latin typeface="Calibri"/>
+                        </a:rPr>
+                        <a:t>7,4%</a:t>
+                      </a:r>
+                    </a:p>
+                  </a:txBody>
+                  <a:tcPr anchor="ctr">
+                    <a:solidFill>
+                      <a:srgbClr val="FFFFFF"/>
+                    </a:solidFill>
+                  </a:tcPr>
+                </a:tc>
+                <a:tc>
+                  <a:txBody>
+                    <a:bodyPr/>
+                    <a:lstStyle/>
+                    <a:p>
+                      <a:pPr algn="l"/>
+                      <a:r>
+                        <a:rPr sz="1300">
+                          <a:solidFill>
+                            <a:srgbClr val="212121"/>
+                          </a:solidFill>
+                          <a:latin typeface="Calibri"/>
+                        </a:rPr>
+                        <a:t>0,785</a:t>
+                      </a:r>
+                    </a:p>
+                  </a:txBody>
+                  <a:tcPr anchor="ctr">
+                    <a:solidFill>
+                      <a:srgbClr val="FFFFFF"/>
+                    </a:solidFill>
+                  </a:tcPr>
+                </a:tc>
+                <a:tc>
+                  <a:txBody>
+                    <a:bodyPr/>
+                    <a:lstStyle/>
+                    <a:p>
+                      <a:pPr algn="l"/>
+                      <a:r>
+                        <a:rPr sz="1300">
+                          <a:solidFill>
+                            <a:srgbClr val="212121"/>
+                          </a:solidFill>
+                          <a:latin typeface="Calibri"/>
+                        </a:rPr>
+                        <a:t>0,725</a:t>
+                      </a:r>
+                    </a:p>
+                  </a:txBody>
+                  <a:tcPr anchor="ctr">
+                    <a:solidFill>
+                      <a:srgbClr val="FFFFFF"/>
+                    </a:solidFill>
+                  </a:tcPr>
+                </a:tc>
+              </a:tr>
+              <a:tr h="548640">
+                <a:tc>
+                  <a:txBody>
+                    <a:bodyPr/>
+                    <a:lstStyle/>
+                    <a:p>
+                      <a:pPr algn="l"/>
+                      <a:r>
+                        <a:rPr sz="1300" b="1">
+                          <a:solidFill>
+                            <a:srgbClr val="1F3864"/>
+                          </a:solidFill>
+                          <a:latin typeface="Calibri"/>
+                        </a:rPr>
+                        <a:t>Setor privado</a:t>
+                      </a:r>
+                    </a:p>
+                  </a:txBody>
+                  <a:tcPr anchor="ctr">
+                    <a:solidFill>
+                      <a:srgbClr val="F5F5F5"/>
+                    </a:solidFill>
+                  </a:tcPr>
+                </a:tc>
+                <a:tc>
+                  <a:txBody>
+                    <a:bodyPr/>
+                    <a:lstStyle/>
+                    <a:p>
+                      <a:pPr algn="l"/>
+                      <a:r>
+                        <a:rPr sz="1300">
+                          <a:solidFill>
+                            <a:srgbClr val="212121"/>
+                          </a:solidFill>
+                          <a:latin typeface="Calibri"/>
+                        </a:rPr>
+                        <a:t>7,2%</a:t>
+                      </a:r>
+                    </a:p>
+                  </a:txBody>
+                  <a:tcPr anchor="ctr">
+                    <a:solidFill>
+                      <a:srgbClr val="F5F5F5"/>
+                    </a:solidFill>
+                  </a:tcPr>
+                </a:tc>
+                <a:tc>
+                  <a:txBody>
+                    <a:bodyPr/>
+                    <a:lstStyle/>
+                    <a:p>
+                      <a:pPr algn="l"/>
+                      <a:r>
+                        <a:rPr sz="1300">
+                          <a:solidFill>
+                            <a:srgbClr val="212121"/>
+                          </a:solidFill>
+                          <a:latin typeface="Calibri"/>
+                        </a:rPr>
+                        <a:t>0,783</a:t>
+                      </a:r>
+                    </a:p>
+                  </a:txBody>
+                  <a:tcPr anchor="ctr">
+                    <a:solidFill>
+                      <a:srgbClr val="F5F5F5"/>
+                    </a:solidFill>
+                  </a:tcPr>
+                </a:tc>
+                <a:tc>
+                  <a:txBody>
+                    <a:bodyPr/>
+                    <a:lstStyle/>
+                    <a:p>
+                      <a:pPr algn="l"/>
+                      <a:r>
+                        <a:rPr sz="1300">
+                          <a:solidFill>
+                            <a:srgbClr val="212121"/>
+                          </a:solidFill>
+                          <a:latin typeface="Calibri"/>
+                        </a:rPr>
+                        <a:t>0,685</a:t>
+                      </a:r>
+                    </a:p>
+                  </a:txBody>
+                  <a:tcPr anchor="ctr">
+                    <a:solidFill>
+                      <a:srgbClr val="F5F5F5"/>
+                    </a:solidFill>
+                  </a:tcPr>
+                </a:tc>
+              </a:tr>
+              <a:tr h="548640">
+                <a:tc>
+                  <a:txBody>
+                    <a:bodyPr/>
+                    <a:lstStyle/>
+                    <a:p>
+                      <a:pPr algn="l"/>
+                      <a:r>
+                        <a:rPr sz="1300" b="1">
+                          <a:solidFill>
+                            <a:srgbClr val="1F3864"/>
+                          </a:solidFill>
+                          <a:latin typeface="Calibri"/>
+                        </a:rPr>
+                        <a:t>Setor público</a:t>
+                      </a:r>
+                    </a:p>
+                  </a:txBody>
+                  <a:tcPr anchor="ctr">
+                    <a:solidFill>
+                      <a:srgbClr val="FFFFFF"/>
+                    </a:solidFill>
+                  </a:tcPr>
+                </a:tc>
+                <a:tc>
+                  <a:txBody>
+                    <a:bodyPr/>
+                    <a:lstStyle/>
+                    <a:p>
+                      <a:pPr algn="l"/>
+                      <a:r>
+                        <a:rPr sz="1300">
+                          <a:solidFill>
+                            <a:srgbClr val="212121"/>
+                          </a:solidFill>
+                          <a:latin typeface="Calibri"/>
+                        </a:rPr>
+                        <a:t>4,6%</a:t>
+                      </a:r>
+                    </a:p>
+                  </a:txBody>
+                  <a:tcPr anchor="ctr">
+                    <a:solidFill>
+                      <a:srgbClr val="FFFFFF"/>
+                    </a:solidFill>
+                  </a:tcPr>
+                </a:tc>
+                <a:tc>
+                  <a:txBody>
+                    <a:bodyPr/>
+                    <a:lstStyle/>
+                    <a:p>
+                      <a:pPr algn="l"/>
+                      <a:r>
+                        <a:rPr sz="1300">
+                          <a:solidFill>
+                            <a:srgbClr val="212121"/>
+                          </a:solidFill>
+                          <a:latin typeface="Calibri"/>
+                        </a:rPr>
+                        <a:t>0,786</a:t>
+                      </a:r>
+                    </a:p>
+                  </a:txBody>
+                  <a:tcPr anchor="ctr">
+                    <a:solidFill>
+                      <a:srgbClr val="FFFFFF"/>
+                    </a:solidFill>
+                  </a:tcPr>
+                </a:tc>
+                <a:tc>
+                  <a:txBody>
+                    <a:bodyPr/>
+                    <a:lstStyle/>
+                    <a:p>
+                      <a:pPr algn="l"/>
+                      <a:r>
+                        <a:rPr sz="1300">
+                          <a:solidFill>
+                            <a:srgbClr val="212121"/>
+                          </a:solidFill>
+                          <a:latin typeface="Calibri"/>
+                        </a:rPr>
+                        <a:t>0,843</a:t>
+                      </a:r>
+                    </a:p>
+                  </a:txBody>
+                  <a:tcPr anchor="ctr">
+                    <a:solidFill>
+                      <a:srgbClr val="FFFFFF"/>
+                    </a:solidFill>
+                  </a:tcPr>
+                </a:tc>
+              </a:tr>
+              <a:tr h="548640">
+                <a:tc>
+                  <a:txBody>
+                    <a:bodyPr/>
+                    <a:lstStyle/>
+                    <a:p>
+                      <a:pPr algn="l"/>
+                      <a:r>
+                        <a:rPr sz="1300" b="1">
+                          <a:solidFill>
+                            <a:srgbClr val="1F3864"/>
+                          </a:solidFill>
+                          <a:latin typeface="Calibri"/>
+                        </a:rPr>
+                        <a:t>14–29 anos  →  65+</a:t>
+                      </a:r>
+                    </a:p>
+                  </a:txBody>
+                  <a:tcPr anchor="ctr">
+                    <a:solidFill>
+                      <a:srgbClr val="F5F5F5"/>
+                    </a:solidFill>
+                  </a:tcPr>
+                </a:tc>
+                <a:tc>
+                  <a:txBody>
+                    <a:bodyPr/>
+                    <a:lstStyle/>
+                    <a:p>
+                      <a:pPr algn="l"/>
+                      <a:r>
+                        <a:rPr sz="1300">
+                          <a:solidFill>
+                            <a:srgbClr val="212121"/>
+                          </a:solidFill>
+                          <a:latin typeface="Calibri"/>
+                        </a:rPr>
+                        <a:t>1,7% → 14,7%</a:t>
+                      </a:r>
+                    </a:p>
+                  </a:txBody>
+                  <a:tcPr anchor="ctr">
+                    <a:solidFill>
+                      <a:srgbClr val="F5F5F5"/>
+                    </a:solidFill>
+                  </a:tcPr>
+                </a:tc>
+                <a:tc>
+                  <a:txBody>
+                    <a:bodyPr/>
+                    <a:lstStyle/>
+                    <a:p>
+                      <a:pPr algn="l"/>
+                      <a:r>
+                        <a:rPr sz="1300">
+                          <a:solidFill>
+                            <a:srgbClr val="212121"/>
+                          </a:solidFill>
+                          <a:latin typeface="Calibri"/>
+                        </a:rPr>
+                        <a:t>—</a:t>
+                      </a:r>
+                    </a:p>
+                  </a:txBody>
+                  <a:tcPr anchor="ctr">
+                    <a:solidFill>
+                      <a:srgbClr val="F5F5F5"/>
+                    </a:solidFill>
+                  </a:tcPr>
+                </a:tc>
+                <a:tc>
+                  <a:txBody>
+                    <a:bodyPr/>
+                    <a:lstStyle/>
+                    <a:p>
+                      <a:pPr algn="l"/>
+                      <a:r>
+                        <a:rPr sz="1300">
+                          <a:solidFill>
+                            <a:srgbClr val="212121"/>
+                          </a:solidFill>
+                          <a:latin typeface="Calibri"/>
+                        </a:rPr>
+                        <a:t>—</a:t>
+                      </a:r>
+                    </a:p>
+                  </a:txBody>
+                  <a:tcPr anchor="ctr">
+                    <a:solidFill>
+                      <a:srgbClr val="F5F5F5"/>
+                    </a:solidFill>
+                  </a:tcPr>
+                </a:tc>
+              </a:tr>
+            </a:tbl>
+          </a:graphicData>
+        </a:graphic>
+      </p:graphicFrame>
+      <p:sp>
+        <p:nvSpPr>
+          <p:cNvPr id="6" name="TextBox 5"/>
+          <p:cNvSpPr txBox="1"/>
+          <p:nvPr/>
+        </p:nvSpPr>
+        <p:spPr>
+          <a:xfrm>
+            <a:off x="8138160" y="1188720"/>
+            <a:ext cx="3840480" cy="4206240"/>
+          </a:xfrm>
+          <a:prstGeom prst="rect">
+            <a:avLst/>
+          </a:prstGeom>
+          <a:noFill/>
+        </p:spPr>
+        <p:txBody>
+          <a:bodyPr wrap="square">
+            <a:spAutoFit/>
+          </a:bodyPr>
+          <a:lstStyle/>
+          <a:p>
+            <a:pPr>
+              <a:spcAft>
+                <a:spcPts val="400"/>
+              </a:spcAft>
+            </a:pPr>
+            <a:r>
+              <a:rPr sz="1300" b="1">
+                <a:solidFill>
+                  <a:srgbClr val="1565C0"/>
+                </a:solidFill>
+                <a:latin typeface="Calibri"/>
+              </a:rPr>
+              <a:t>▸  </a:t>
+            </a:r>
+            <a:r>
+              <a:rPr sz="1300">
+                <a:solidFill>
+                  <a:srgbClr val="212121"/>
+                </a:solidFill>
+                <a:latin typeface="Calibri"/>
+              </a:rPr>
+              <a:t>Pretos: penalidade maior em tudo — salário 7,4% contra 5,8% dos pardos; no topo, a distância cresce (q95: 11,6% × 9,5%)</a:t>
+            </a:r>
+          </a:p>
+          <a:p>
+            <a:pPr>
+              <a:spcAft>
+                <a:spcPts val="400"/>
+              </a:spcAft>
+            </a:pPr>
+            <a:r>
+              <a:rPr sz="1300" b="1">
+                <a:solidFill>
+                  <a:srgbClr val="1565C0"/>
+                </a:solidFill>
+                <a:latin typeface="Calibri"/>
+              </a:rPr>
+              <a:t>▸  </a:t>
+            </a:r>
+            <a:r>
+              <a:rPr sz="1300">
+                <a:solidFill>
+                  <a:srgbClr val="212121"/>
+                </a:solidFill>
+                <a:latin typeface="Calibri"/>
+              </a:rPr>
+              <a:t>Setor público: a porta é tão desigual quanto no privado; o que muda é o teto</a:t>
+            </a:r>
+          </a:p>
+          <a:p>
+            <a:pPr>
+              <a:spcAft>
+                <a:spcPts val="400"/>
+              </a:spcAft>
+            </a:pPr>
+            <a:r>
+              <a:rPr sz="1300" b="1">
+                <a:solidFill>
+                  <a:srgbClr val="1565C0"/>
+                </a:solidFill>
+                <a:latin typeface="Calibri"/>
+              </a:rPr>
+              <a:t>▸  </a:t>
+            </a:r>
+            <a:r>
+              <a:rPr sz="1300">
+                <a:solidFill>
+                  <a:srgbClr val="212121"/>
+                </a:solidFill>
+                <a:latin typeface="Calibri"/>
+              </a:rPr>
+              <a:t>Idade: de 1,7% a 14,7% — coorte ou carreira</a:t>
+            </a:r>
+          </a:p>
+          <a:p>
+            <a:pPr>
+              <a:spcAft>
+                <a:spcPts val="400"/>
+              </a:spcAft>
+            </a:pPr>
+            <a:r>
+              <a:rPr sz="1300" b="1">
+                <a:solidFill>
+                  <a:srgbClr val="1565C0"/>
+                </a:solidFill>
+                <a:latin typeface="Calibri"/>
+              </a:rPr>
+              <a:t>▸  </a:t>
+            </a:r>
+            <a:r>
+              <a:rPr sz="1300">
+                <a:solidFill>
+                  <a:srgbClr val="212121"/>
+                </a:solidFill>
+                <a:latin typeface="Calibri"/>
+              </a:rPr>
+              <a:t>Teto de vidro dentro de cada UF: OR 0,762 (não é efeito da geografia)</a:t>
+            </a:r>
+          </a:p>
+        </p:txBody>
+      </p:sp>
+      <p:sp>
+        <p:nvSpPr>
+          <p:cNvPr id="7" name="TextBox 6"/>
+          <p:cNvSpPr txBox="1"/>
+          <p:nvPr/>
+        </p:nvSpPr>
+        <p:spPr>
+          <a:xfrm>
+            <a:off x="274320" y="5943600"/>
+            <a:ext cx="11612880" cy="411480"/>
+          </a:xfrm>
+          <a:prstGeom prst="rect">
+            <a:avLst/>
+          </a:prstGeom>
+          <a:noFill/>
+        </p:spPr>
+        <p:txBody>
+          <a:bodyPr wrap="square">
+            <a:spAutoFit/>
+          </a:bodyPr>
+          <a:lstStyle/>
+          <a:p>
+            <a:pPr algn="ctr"/>
+            <a:r>
+              <a:rPr sz="1300" b="1" i="0">
+                <a:solidFill>
+                  <a:srgbClr val="1F3864"/>
+                </a:solidFill>
+                <a:latin typeface="Calibri"/>
+              </a:rPr>
+              <a:t>"Negro" segue como a categoria da política: pretos e pardos estão abaixo dos brancos em tudo.</a:t>
+            </a:r>
+          </a:p>
+        </p:txBody>
+      </p:sp>
+      <p:sp>
+        <p:nvSpPr>
+          <p:cNvPr id="8" name="Rectangle 7"/>
+          <p:cNvSpPr/>
+          <p:nvPr/>
+        </p:nvSpPr>
+        <p:spPr>
+          <a:xfrm>
+            <a:off x="0" y="6601968"/>
+            <a:ext cx="12188952" cy="256032"/>
+          </a:xfrm>
+          <a:prstGeom prst="rect">
+            <a:avLst/>
+          </a:prstGeom>
+          <a:solidFill>
+            <a:srgbClr val="1F3864"/>
+          </a:solidFill>
+          <a:ln/>
+        </p:spPr>
+        <p:style>
+          <a:lnRef idx="1">
+            <a:schemeClr val="accent1"/>
+          </a:lnRef>
+          <a:fillRef idx="3">
+            <a:schemeClr val="accent1"/>
+          </a:fillRef>
+          <a:effectRef idx="2">
+            <a:schemeClr val="accent1"/>
+          </a:effectRef>
+          <a:fontRef idx="minor">
+            <a:schemeClr val="lt1"/>
+          </a:fontRef>
+        </p:style>
+        <p:txBody>
+          <a:bodyPr rtlCol="0" anchor="ctr"/>
+          <a:lstStyle/>
+          <a:p>
+            <a:pPr algn="ctr"/>
+          </a:p>
+        </p:txBody>
+      </p:sp>
+      <p:sp>
+        <p:nvSpPr>
+          <p:cNvPr id="9" name="TextBox 8"/>
+          <p:cNvSpPr txBox="1"/>
+          <p:nvPr/>
+        </p:nvSpPr>
+        <p:spPr>
+          <a:xfrm>
+            <a:off x="137160" y="6629400"/>
+            <a:ext cx="10058400" cy="228600"/>
+          </a:xfrm>
+          <a:prstGeom prst="rect">
+            <a:avLst/>
+          </a:prstGeom>
+          <a:noFill/>
+        </p:spPr>
+        <p:txBody>
+          <a:bodyPr wrap="square">
+            <a:spAutoFit/>
+          </a:bodyPr>
+          <a:lstStyle/>
+          <a:p>
+            <a:pPr algn="l"/>
+            <a:r>
+              <a:rPr sz="850" b="0" i="0">
+                <a:solidFill>
+                  <a:srgbClr val="BBDEFB"/>
+                </a:solidFill>
+                <a:latin typeface="Calibri"/>
+              </a:rPr>
+              <a:t>Ricardo Calheiros  |  MBA USP/ESALQ  |  Racismo Estrutural e Mercado de Trabalho</a:t>
+            </a:r>
+          </a:p>
+        </p:txBody>
+      </p:sp>
+      <p:sp>
+        <p:nvSpPr>
+          <p:cNvPr id="10" name="TextBox 9"/>
+          <p:cNvSpPr txBox="1"/>
+          <p:nvPr/>
+        </p:nvSpPr>
+        <p:spPr>
+          <a:xfrm>
+            <a:off x="11521440" y="6629400"/>
+            <a:ext cx="640080" cy="228600"/>
+          </a:xfrm>
+          <a:prstGeom prst="rect">
+            <a:avLst/>
+          </a:prstGeom>
+          <a:noFill/>
+        </p:spPr>
+        <p:txBody>
+          <a:bodyPr wrap="square">
+            <a:spAutoFit/>
+          </a:bodyPr>
+          <a:lstStyle/>
+          <a:p>
+            <a:pPr algn="r"/>
+            <a:r>
+              <a:rPr sz="850" b="0" i="0">
+                <a:solidFill>
+                  <a:srgbClr val="FFFFFF"/>
+                </a:solidFill>
+                <a:latin typeface="Calibri"/>
+              </a:rPr>
+              <a:t>17/25</a:t>
+            </a:r>
+          </a:p>
+        </p:txBody>
+      </p:sp>
+    </p:spTree>
+  </p:cSld>
+  <p:clrMapOvr>
+    <a:masterClrMapping/>
+  </p:clrMapOvr>
+</p:sld>
+</file>
+
+<file path=ppt/slides/slide18.xml><?xml version="1.0" encoding="utf-8"?>
+<p:sld xmlns:a="http://schemas.openxmlformats.org/drawingml/2006/main" xmlns:p="http://schemas.openxmlformats.org/presentationml/2006/main" xmlns:r="http://schemas.openxmlformats.org/officeDocument/2006/relationships">
+  <p:cSld>
+    <p:spTree>
+      <p:nvGrpSpPr>
+        <p:cNvPr id="1" name=""/>
+        <p:cNvGrpSpPr/>
+        <p:nvPr/>
+      </p:nvGrpSpPr>
+      <p:grpSpPr/>
+      <p:sp>
+        <p:nvSpPr>
+          <p:cNvPr id="2" name="Rectangle 1"/>
+          <p:cNvSpPr/>
+          <p:nvPr/>
+        </p:nvSpPr>
+        <p:spPr>
+          <a:xfrm>
+            <a:off x="0" y="0"/>
+            <a:ext cx="12188952" cy="1005840"/>
+          </a:xfrm>
+          <a:prstGeom prst="rect">
+            <a:avLst/>
+          </a:prstGeom>
+          <a:solidFill>
+            <a:srgbClr val="1F3864"/>
+          </a:solidFill>
+          <a:ln/>
+        </p:spPr>
+        <p:style>
+          <a:lnRef idx="1">
+            <a:schemeClr val="accent1"/>
+          </a:lnRef>
+          <a:fillRef idx="3">
+            <a:schemeClr val="accent1"/>
+          </a:fillRef>
+          <a:effectRef idx="2">
+            <a:schemeClr val="accent1"/>
+          </a:effectRef>
+          <a:fontRef idx="minor">
+            <a:schemeClr val="lt1"/>
+          </a:fontRef>
+        </p:style>
+        <p:txBody>
+          <a:bodyPr rtlCol="0" anchor="ctr"/>
+          <a:lstStyle/>
+          <a:p>
+            <a:pPr algn="ctr"/>
+          </a:p>
+        </p:txBody>
+      </p:sp>
+      <p:sp>
+        <p:nvSpPr>
+          <p:cNvPr id="3" name="TextBox 2"/>
+          <p:cNvSpPr txBox="1"/>
+          <p:nvPr/>
+        </p:nvSpPr>
+        <p:spPr>
+          <a:xfrm>
+            <a:off x="274320" y="73152"/>
+            <a:ext cx="11612880" cy="502920"/>
+          </a:xfrm>
+          <a:prstGeom prst="rect">
+            <a:avLst/>
+          </a:prstGeom>
+          <a:noFill/>
+        </p:spPr>
+        <p:txBody>
+          <a:bodyPr wrap="square">
+            <a:spAutoFit/>
+          </a:bodyPr>
+          <a:lstStyle/>
+          <a:p>
+            <a:pPr algn="l"/>
+            <a:r>
+              <a:rPr sz="2200" b="1" i="0">
+                <a:solidFill>
+                  <a:srgbClr val="FFFFFF"/>
+                </a:solidFill>
+                <a:latin typeface="Calibri"/>
+              </a:rPr>
+              <a:t>16. Quão forte teria de ser o que não medimos para derrubar o resultado</a:t>
             </a:r>
           </a:p>
         </p:txBody>
@@ -9764,1231 +10849,7 @@
                 </a:solidFill>
                 <a:latin typeface="Calibri"/>
               </a:rPr>
-              <a:t>17/24</a:t>
-            </a:r>
-          </a:p>
-        </p:txBody>
-      </p:sp>
-    </p:spTree>
-  </p:cSld>
-  <p:clrMapOvr>
-    <a:masterClrMapping/>
-  </p:clrMapOvr>
-</p:sld>
-</file>
-
-<file path=ppt/slides/slide18.xml><?xml version="1.0" encoding="utf-8"?>
-<p:sld xmlns:a="http://schemas.openxmlformats.org/drawingml/2006/main" xmlns:p="http://schemas.openxmlformats.org/presentationml/2006/main" xmlns:r="http://schemas.openxmlformats.org/officeDocument/2006/relationships">
-  <p:cSld>
-    <p:spTree>
-      <p:nvGrpSpPr>
-        <p:cNvPr id="1" name=""/>
-        <p:cNvGrpSpPr/>
-        <p:nvPr/>
-      </p:nvGrpSpPr>
-      <p:grpSpPr/>
-      <p:sp>
-        <p:nvSpPr>
-          <p:cNvPr id="2" name="Rectangle 1"/>
-          <p:cNvSpPr/>
-          <p:nvPr/>
-        </p:nvSpPr>
-        <p:spPr>
-          <a:xfrm>
-            <a:off x="0" y="0"/>
-            <a:ext cx="12188952" cy="1005840"/>
-          </a:xfrm>
-          <a:prstGeom prst="rect">
-            <a:avLst/>
-          </a:prstGeom>
-          <a:solidFill>
-            <a:srgbClr val="1F3864"/>
-          </a:solidFill>
-          <a:ln/>
-        </p:spPr>
-        <p:style>
-          <a:lnRef idx="1">
-            <a:schemeClr val="accent1"/>
-          </a:lnRef>
-          <a:fillRef idx="3">
-            <a:schemeClr val="accent1"/>
-          </a:fillRef>
-          <a:effectRef idx="2">
-            <a:schemeClr val="accent1"/>
-          </a:effectRef>
-          <a:fontRef idx="minor">
-            <a:schemeClr val="lt1"/>
-          </a:fontRef>
-        </p:style>
-        <p:txBody>
-          <a:bodyPr rtlCol="0" anchor="ctr"/>
-          <a:lstStyle/>
-          <a:p>
-            <a:pPr algn="ctr"/>
-          </a:p>
-        </p:txBody>
-      </p:sp>
-      <p:sp>
-        <p:nvSpPr>
-          <p:cNvPr id="3" name="TextBox 2"/>
-          <p:cNvSpPr txBox="1"/>
-          <p:nvPr/>
-        </p:nvSpPr>
-        <p:spPr>
-          <a:xfrm>
-            <a:off x="274320" y="73152"/>
-            <a:ext cx="11612880" cy="502920"/>
-          </a:xfrm>
-          <a:prstGeom prst="rect">
-            <a:avLst/>
-          </a:prstGeom>
-          <a:noFill/>
-        </p:spPr>
-        <p:txBody>
-          <a:bodyPr wrap="square">
-            <a:spAutoFit/>
-          </a:bodyPr>
-          <a:lstStyle/>
-          <a:p>
-            <a:pPr algn="l"/>
-            <a:r>
-              <a:rPr sz="1900" b="1" i="0">
-                <a:solidFill>
-                  <a:srgbClr val="FFFFFF"/>
-                </a:solidFill>
-                <a:latin typeface="Calibri"/>
-              </a:rPr>
-              <a:t>16. Sem impor forma funcional, a raça continua pesando na previsão da renda</a:t>
-            </a:r>
-          </a:p>
-        </p:txBody>
-      </p:sp>
-      <p:sp>
-        <p:nvSpPr>
-          <p:cNvPr id="4" name="TextBox 3"/>
-          <p:cNvSpPr txBox="1"/>
-          <p:nvPr/>
-        </p:nvSpPr>
-        <p:spPr>
-          <a:xfrm>
-            <a:off x="274320" y="594360"/>
-            <a:ext cx="10972800" cy="347472"/>
-          </a:xfrm>
-          <a:prstGeom prst="rect">
-            <a:avLst/>
-          </a:prstGeom>
-          <a:noFill/>
-        </p:spPr>
-        <p:txBody>
-          <a:bodyPr wrap="square">
-            <a:spAutoFit/>
-          </a:bodyPr>
-          <a:lstStyle/>
-          <a:p>
-            <a:pPr algn="l"/>
-            <a:r>
-              <a:rPr sz="1400" b="0" i="0">
-                <a:solidFill>
-                  <a:srgbClr val="BBDEFB"/>
-                </a:solidFill>
-                <a:latin typeface="Calibri"/>
-              </a:rPr>
-              <a:t>XGBoost com R² de teste 0,644 | profundidade escolhida por validação cruzada (10)</a:t>
-            </a:r>
-          </a:p>
-        </p:txBody>
-      </p:sp>
-      <p:pic>
-        <p:nvPicPr>
-          <p:cNvPr id="5" name="Picture 4" descr="shap_importance_xgb.png"/>
-          <p:cNvPicPr>
-            <a:picLocks noChangeAspect="1"/>
-          </p:cNvPicPr>
-          <p:nvPr/>
-        </p:nvPicPr>
-        <p:blipFill>
-          <a:blip r:embed="rId2"/>
-          <a:stretch>
-            <a:fillRect/>
-          </a:stretch>
-        </p:blipFill>
-        <p:spPr>
-          <a:xfrm>
-            <a:off x="274320" y="1097280"/>
-            <a:ext cx="6217920" cy="4606059"/>
-          </a:xfrm>
-          <a:prstGeom prst="rect">
-            <a:avLst/>
-          </a:prstGeom>
-        </p:spPr>
-      </p:pic>
-      <p:sp>
-        <p:nvSpPr>
-          <p:cNvPr id="6" name="TextBox 5"/>
-          <p:cNvSpPr txBox="1"/>
-          <p:nvPr/>
-        </p:nvSpPr>
-        <p:spPr>
-          <a:xfrm>
-            <a:off x="6766560" y="1097280"/>
-            <a:ext cx="5303520" cy="365760"/>
-          </a:xfrm>
-          <a:prstGeom prst="rect">
-            <a:avLst/>
-          </a:prstGeom>
-          <a:noFill/>
-        </p:spPr>
-        <p:txBody>
-          <a:bodyPr wrap="square">
-            <a:spAutoFit/>
-          </a:bodyPr>
-          <a:lstStyle/>
-          <a:p>
-            <a:pPr algn="l"/>
-            <a:r>
-              <a:rPr sz="1600" b="1" i="0">
-                <a:solidFill>
-                  <a:srgbClr val="1F3864"/>
-                </a:solidFill>
-                <a:latin typeface="Calibri"/>
-              </a:rPr>
-              <a:t>Destaques com as novas variáveis</a:t>
-            </a:r>
-          </a:p>
-        </p:txBody>
-      </p:sp>
-      <p:sp>
-        <p:nvSpPr>
-          <p:cNvPr id="7" name="Rectangle 6"/>
-          <p:cNvSpPr/>
-          <p:nvPr/>
-        </p:nvSpPr>
-        <p:spPr>
-          <a:xfrm>
-            <a:off x="6766560" y="1554480"/>
-            <a:ext cx="5303520" cy="749808"/>
-          </a:xfrm>
-          <a:prstGeom prst="rect">
-            <a:avLst/>
-          </a:prstGeom>
-          <a:solidFill>
-            <a:srgbClr val="F5F5F5"/>
-          </a:solidFill>
-          <a:ln w="6350">
-            <a:solidFill>
-              <a:srgbClr val="616161"/>
-            </a:solidFill>
-          </a:ln>
-        </p:spPr>
-        <p:style>
-          <a:lnRef idx="1">
-            <a:schemeClr val="accent1"/>
-          </a:lnRef>
-          <a:fillRef idx="3">
-            <a:schemeClr val="accent1"/>
-          </a:fillRef>
-          <a:effectRef idx="2">
-            <a:schemeClr val="accent1"/>
-          </a:effectRef>
-          <a:fontRef idx="minor">
-            <a:schemeClr val="lt1"/>
-          </a:fontRef>
-        </p:style>
-        <p:txBody>
-          <a:bodyPr rtlCol="0" anchor="ctr"/>
-          <a:lstStyle/>
-          <a:p>
-            <a:pPr algn="ctr"/>
-          </a:p>
-        </p:txBody>
-      </p:sp>
-      <p:sp>
-        <p:nvSpPr>
-          <p:cNvPr id="8" name="TextBox 7"/>
-          <p:cNvSpPr txBox="1"/>
-          <p:nvPr/>
-        </p:nvSpPr>
-        <p:spPr>
-          <a:xfrm>
-            <a:off x="6858000" y="1600200"/>
-            <a:ext cx="457200" cy="365760"/>
-          </a:xfrm>
-          <a:prstGeom prst="rect">
-            <a:avLst/>
-          </a:prstGeom>
-          <a:noFill/>
-        </p:spPr>
-        <p:txBody>
-          <a:bodyPr wrap="square">
-            <a:spAutoFit/>
-          </a:bodyPr>
-          <a:lstStyle/>
-          <a:p>
-            <a:pPr algn="l"/>
-            <a:r>
-              <a:rPr sz="1200" b="1" i="0">
-                <a:solidFill>
-                  <a:srgbClr val="1565C0"/>
-                </a:solidFill>
-                <a:latin typeface="Calibri"/>
-              </a:rPr>
-              <a:t>#1</a:t>
-            </a:r>
-          </a:p>
-        </p:txBody>
-      </p:sp>
-      <p:sp>
-        <p:nvSpPr>
-          <p:cNvPr id="9" name="TextBox 8"/>
-          <p:cNvSpPr txBox="1"/>
-          <p:nvPr/>
-        </p:nvSpPr>
-        <p:spPr>
-          <a:xfrm>
-            <a:off x="7360920" y="1600200"/>
-            <a:ext cx="3017520" cy="365760"/>
-          </a:xfrm>
-          <a:prstGeom prst="rect">
-            <a:avLst/>
-          </a:prstGeom>
-          <a:noFill/>
-        </p:spPr>
-        <p:txBody>
-          <a:bodyPr wrap="square">
-            <a:spAutoFit/>
-          </a:bodyPr>
-          <a:lstStyle/>
-          <a:p>
-            <a:pPr algn="l"/>
-            <a:r>
-              <a:rPr sz="1150" b="1" i="0">
-                <a:solidFill>
-                  <a:srgbClr val="1565C0"/>
-                </a:solidFill>
-                <a:latin typeface="Calibri"/>
-              </a:rPr>
-              <a:t>Renda média UPA (exceto o próprio)</a:t>
-            </a:r>
-          </a:p>
-        </p:txBody>
-      </p:sp>
-      <p:sp>
-        <p:nvSpPr>
-          <p:cNvPr id="10" name="TextBox 9"/>
-          <p:cNvSpPr txBox="1"/>
-          <p:nvPr/>
-        </p:nvSpPr>
-        <p:spPr>
-          <a:xfrm>
-            <a:off x="10424160" y="1600200"/>
-            <a:ext cx="1600200" cy="365760"/>
-          </a:xfrm>
-          <a:prstGeom prst="rect">
-            <a:avLst/>
-          </a:prstGeom>
-          <a:noFill/>
-        </p:spPr>
-        <p:txBody>
-          <a:bodyPr wrap="square">
-            <a:spAutoFit/>
-          </a:bodyPr>
-          <a:lstStyle/>
-          <a:p>
-            <a:pPr algn="l"/>
-            <a:r>
-              <a:rPr sz="1100" b="1" i="0">
-                <a:solidFill>
-                  <a:srgbClr val="1565C0"/>
-                </a:solidFill>
-                <a:latin typeface="Calibri"/>
-              </a:rPr>
-              <a:t>|SHAP| = 0,188</a:t>
-            </a:r>
-          </a:p>
-        </p:txBody>
-      </p:sp>
-      <p:sp>
-        <p:nvSpPr>
-          <p:cNvPr id="11" name="TextBox 10"/>
-          <p:cNvSpPr txBox="1"/>
-          <p:nvPr/>
-        </p:nvSpPr>
-        <p:spPr>
-          <a:xfrm>
-            <a:off x="7360920" y="1920240"/>
-            <a:ext cx="4480560" cy="274320"/>
-          </a:xfrm>
-          <a:prstGeom prst="rect">
-            <a:avLst/>
-          </a:prstGeom>
-          <a:noFill/>
-        </p:spPr>
-        <p:txBody>
-          <a:bodyPr wrap="square">
-            <a:spAutoFit/>
-          </a:bodyPr>
-          <a:lstStyle/>
-          <a:p>
-            <a:pPr algn="l"/>
-            <a:r>
-              <a:rPr sz="950" b="0" i="1">
-                <a:solidFill>
-                  <a:srgbClr val="616161"/>
-                </a:solidFill>
-                <a:latin typeface="Calibri"/>
-              </a:rPr>
-              <a:t>Wilson (1987): o contexto do bairro pesa tanto quanto o diploma</a:t>
-            </a:r>
-          </a:p>
-        </p:txBody>
-      </p:sp>
-      <p:sp>
-        <p:nvSpPr>
-          <p:cNvPr id="12" name="Rectangle 11"/>
-          <p:cNvSpPr/>
-          <p:nvPr/>
-        </p:nvSpPr>
-        <p:spPr>
-          <a:xfrm>
-            <a:off x="6766560" y="2359152"/>
-            <a:ext cx="5303520" cy="749808"/>
-          </a:xfrm>
-          <a:prstGeom prst="rect">
-            <a:avLst/>
-          </a:prstGeom>
-          <a:solidFill>
-            <a:srgbClr val="F5F5F5"/>
-          </a:solidFill>
-          <a:ln w="6350">
-            <a:solidFill>
-              <a:srgbClr val="616161"/>
-            </a:solidFill>
-          </a:ln>
-        </p:spPr>
-        <p:style>
-          <a:lnRef idx="1">
-            <a:schemeClr val="accent1"/>
-          </a:lnRef>
-          <a:fillRef idx="3">
-            <a:schemeClr val="accent1"/>
-          </a:fillRef>
-          <a:effectRef idx="2">
-            <a:schemeClr val="accent1"/>
-          </a:effectRef>
-          <a:fontRef idx="minor">
-            <a:schemeClr val="lt1"/>
-          </a:fontRef>
-        </p:style>
-        <p:txBody>
-          <a:bodyPr rtlCol="0" anchor="ctr"/>
-          <a:lstStyle/>
-          <a:p>
-            <a:pPr algn="ctr"/>
-          </a:p>
-        </p:txBody>
-      </p:sp>
-      <p:sp>
-        <p:nvSpPr>
-          <p:cNvPr id="13" name="TextBox 12"/>
-          <p:cNvSpPr txBox="1"/>
-          <p:nvPr/>
-        </p:nvSpPr>
-        <p:spPr>
-          <a:xfrm>
-            <a:off x="6858000" y="2404872"/>
-            <a:ext cx="457200" cy="365760"/>
-          </a:xfrm>
-          <a:prstGeom prst="rect">
-            <a:avLst/>
-          </a:prstGeom>
-          <a:noFill/>
-        </p:spPr>
-        <p:txBody>
-          <a:bodyPr wrap="square">
-            <a:spAutoFit/>
-          </a:bodyPr>
-          <a:lstStyle/>
-          <a:p>
-            <a:pPr algn="l"/>
-            <a:r>
-              <a:rPr sz="1200" b="1" i="0">
-                <a:solidFill>
-                  <a:srgbClr val="212121"/>
-                </a:solidFill>
-                <a:latin typeface="Calibri"/>
-              </a:rPr>
-              <a:t>#2</a:t>
-            </a:r>
-          </a:p>
-        </p:txBody>
-      </p:sp>
-      <p:sp>
-        <p:nvSpPr>
-          <p:cNvPr id="14" name="TextBox 13"/>
-          <p:cNvSpPr txBox="1"/>
-          <p:nvPr/>
-        </p:nvSpPr>
-        <p:spPr>
-          <a:xfrm>
-            <a:off x="7360920" y="2404872"/>
-            <a:ext cx="3017520" cy="365760"/>
-          </a:xfrm>
-          <a:prstGeom prst="rect">
-            <a:avLst/>
-          </a:prstGeom>
-          <a:noFill/>
-        </p:spPr>
-        <p:txBody>
-          <a:bodyPr wrap="square">
-            <a:spAutoFit/>
-          </a:bodyPr>
-          <a:lstStyle/>
-          <a:p>
-            <a:pPr algn="l"/>
-            <a:r>
-              <a:rPr sz="1150" b="0" i="0">
-                <a:solidFill>
-                  <a:srgbClr val="212121"/>
-                </a:solidFill>
-                <a:latin typeface="Calibri"/>
-              </a:rPr>
-              <a:t>Educ.: superior completo</a:t>
-            </a:r>
-          </a:p>
-        </p:txBody>
-      </p:sp>
-      <p:sp>
-        <p:nvSpPr>
-          <p:cNvPr id="15" name="TextBox 14"/>
-          <p:cNvSpPr txBox="1"/>
-          <p:nvPr/>
-        </p:nvSpPr>
-        <p:spPr>
-          <a:xfrm>
-            <a:off x="10424160" y="2404872"/>
-            <a:ext cx="1600200" cy="365760"/>
-          </a:xfrm>
-          <a:prstGeom prst="rect">
-            <a:avLst/>
-          </a:prstGeom>
-          <a:noFill/>
-        </p:spPr>
-        <p:txBody>
-          <a:bodyPr wrap="square">
-            <a:spAutoFit/>
-          </a:bodyPr>
-          <a:lstStyle/>
-          <a:p>
-            <a:pPr algn="l"/>
-            <a:r>
-              <a:rPr sz="1100" b="1" i="0">
-                <a:solidFill>
-                  <a:srgbClr val="212121"/>
-                </a:solidFill>
-                <a:latin typeface="Calibri"/>
-              </a:rPr>
-              <a:t>|SHAP| = 0,178</a:t>
-            </a:r>
-          </a:p>
-        </p:txBody>
-      </p:sp>
-      <p:sp>
-        <p:nvSpPr>
-          <p:cNvPr id="16" name="TextBox 15"/>
-          <p:cNvSpPr txBox="1"/>
-          <p:nvPr/>
-        </p:nvSpPr>
-        <p:spPr>
-          <a:xfrm>
-            <a:off x="7360920" y="2724912"/>
-            <a:ext cx="4480560" cy="274320"/>
-          </a:xfrm>
-          <a:prstGeom prst="rect">
-            <a:avLst/>
-          </a:prstGeom>
-          <a:noFill/>
-        </p:spPr>
-        <p:txBody>
-          <a:bodyPr wrap="square">
-            <a:spAutoFit/>
-          </a:bodyPr>
-          <a:lstStyle/>
-          <a:p>
-            <a:pPr algn="l"/>
-            <a:r>
-              <a:rPr sz="950" b="0" i="1">
-                <a:solidFill>
-                  <a:srgbClr val="616161"/>
-                </a:solidFill>
-                <a:latin typeface="Calibri"/>
-              </a:rPr>
-              <a:t/>
-            </a:r>
-          </a:p>
-        </p:txBody>
-      </p:sp>
-      <p:sp>
-        <p:nvSpPr>
-          <p:cNvPr id="17" name="Rectangle 16"/>
-          <p:cNvSpPr/>
-          <p:nvPr/>
-        </p:nvSpPr>
-        <p:spPr>
-          <a:xfrm>
-            <a:off x="6766560" y="3163824"/>
-            <a:ext cx="5303520" cy="749808"/>
-          </a:xfrm>
-          <a:prstGeom prst="rect">
-            <a:avLst/>
-          </a:prstGeom>
-          <a:solidFill>
-            <a:srgbClr val="F5F5F5"/>
-          </a:solidFill>
-          <a:ln w="6350">
-            <a:solidFill>
-              <a:srgbClr val="616161"/>
-            </a:solidFill>
-          </a:ln>
-        </p:spPr>
-        <p:style>
-          <a:lnRef idx="1">
-            <a:schemeClr val="accent1"/>
-          </a:lnRef>
-          <a:fillRef idx="3">
-            <a:schemeClr val="accent1"/>
-          </a:fillRef>
-          <a:effectRef idx="2">
-            <a:schemeClr val="accent1"/>
-          </a:effectRef>
-          <a:fontRef idx="minor">
-            <a:schemeClr val="lt1"/>
-          </a:fontRef>
-        </p:style>
-        <p:txBody>
-          <a:bodyPr rtlCol="0" anchor="ctr"/>
-          <a:lstStyle/>
-          <a:p>
-            <a:pPr algn="ctr"/>
-          </a:p>
-        </p:txBody>
-      </p:sp>
-      <p:sp>
-        <p:nvSpPr>
-          <p:cNvPr id="18" name="TextBox 17"/>
-          <p:cNvSpPr txBox="1"/>
-          <p:nvPr/>
-        </p:nvSpPr>
-        <p:spPr>
-          <a:xfrm>
-            <a:off x="6858000" y="3209544"/>
-            <a:ext cx="457200" cy="365760"/>
-          </a:xfrm>
-          <a:prstGeom prst="rect">
-            <a:avLst/>
-          </a:prstGeom>
-          <a:noFill/>
-        </p:spPr>
-        <p:txBody>
-          <a:bodyPr wrap="square">
-            <a:spAutoFit/>
-          </a:bodyPr>
-          <a:lstStyle/>
-          <a:p>
-            <a:pPr algn="l"/>
-            <a:r>
-              <a:rPr sz="1200" b="1" i="0">
-                <a:solidFill>
-                  <a:srgbClr val="212121"/>
-                </a:solidFill>
-                <a:latin typeface="Calibri"/>
-              </a:rPr>
-              <a:t>#3</a:t>
-            </a:r>
-          </a:p>
-        </p:txBody>
-      </p:sp>
-      <p:sp>
-        <p:nvSpPr>
-          <p:cNvPr id="19" name="TextBox 18"/>
-          <p:cNvSpPr txBox="1"/>
-          <p:nvPr/>
-        </p:nvSpPr>
-        <p:spPr>
-          <a:xfrm>
-            <a:off x="7360920" y="3209544"/>
-            <a:ext cx="3017520" cy="365760"/>
-          </a:xfrm>
-          <a:prstGeom prst="rect">
-            <a:avLst/>
-          </a:prstGeom>
-          <a:noFill/>
-        </p:spPr>
-        <p:txBody>
-          <a:bodyPr wrap="square">
-            <a:spAutoFit/>
-          </a:bodyPr>
-          <a:lstStyle/>
-          <a:p>
-            <a:pPr algn="l"/>
-            <a:r>
-              <a:rPr sz="1150" b="0" i="0">
-                <a:solidFill>
-                  <a:srgbClr val="212121"/>
-                </a:solidFill>
-                <a:latin typeface="Calibri"/>
-              </a:rPr>
-              <a:t>Horas trabalhadas</a:t>
-            </a:r>
-          </a:p>
-        </p:txBody>
-      </p:sp>
-      <p:sp>
-        <p:nvSpPr>
-          <p:cNvPr id="20" name="TextBox 19"/>
-          <p:cNvSpPr txBox="1"/>
-          <p:nvPr/>
-        </p:nvSpPr>
-        <p:spPr>
-          <a:xfrm>
-            <a:off x="10424160" y="3209544"/>
-            <a:ext cx="1600200" cy="365760"/>
-          </a:xfrm>
-          <a:prstGeom prst="rect">
-            <a:avLst/>
-          </a:prstGeom>
-          <a:noFill/>
-        </p:spPr>
-        <p:txBody>
-          <a:bodyPr wrap="square">
-            <a:spAutoFit/>
-          </a:bodyPr>
-          <a:lstStyle/>
-          <a:p>
-            <a:pPr algn="l"/>
-            <a:r>
-              <a:rPr sz="1100" b="1" i="0">
-                <a:solidFill>
-                  <a:srgbClr val="212121"/>
-                </a:solidFill>
-                <a:latin typeface="Calibri"/>
-              </a:rPr>
-              <a:t>|SHAP| = 0,172</a:t>
-            </a:r>
-          </a:p>
-        </p:txBody>
-      </p:sp>
-      <p:sp>
-        <p:nvSpPr>
-          <p:cNvPr id="21" name="TextBox 20"/>
-          <p:cNvSpPr txBox="1"/>
-          <p:nvPr/>
-        </p:nvSpPr>
-        <p:spPr>
-          <a:xfrm>
-            <a:off x="7360920" y="3529584"/>
-            <a:ext cx="4480560" cy="274320"/>
-          </a:xfrm>
-          <a:prstGeom prst="rect">
-            <a:avLst/>
-          </a:prstGeom>
-          <a:noFill/>
-        </p:spPr>
-        <p:txBody>
-          <a:bodyPr wrap="square">
-            <a:spAutoFit/>
-          </a:bodyPr>
-          <a:lstStyle/>
-          <a:p>
-            <a:pPr algn="l"/>
-            <a:r>
-              <a:rPr sz="950" b="0" i="1">
-                <a:solidFill>
-                  <a:srgbClr val="616161"/>
-                </a:solidFill>
-                <a:latin typeface="Calibri"/>
-              </a:rPr>
-              <a:t>jornada — a variável de esforço declarado</a:t>
-            </a:r>
-          </a:p>
-        </p:txBody>
-      </p:sp>
-      <p:sp>
-        <p:nvSpPr>
-          <p:cNvPr id="22" name="Rectangle 21"/>
-          <p:cNvSpPr/>
-          <p:nvPr/>
-        </p:nvSpPr>
-        <p:spPr>
-          <a:xfrm>
-            <a:off x="6766560" y="3968496"/>
-            <a:ext cx="5303520" cy="749808"/>
-          </a:xfrm>
-          <a:prstGeom prst="rect">
-            <a:avLst/>
-          </a:prstGeom>
-          <a:solidFill>
-            <a:srgbClr val="F5F5F5"/>
-          </a:solidFill>
-          <a:ln w="6350">
-            <a:solidFill>
-              <a:srgbClr val="616161"/>
-            </a:solidFill>
-          </a:ln>
-        </p:spPr>
-        <p:style>
-          <a:lnRef idx="1">
-            <a:schemeClr val="accent1"/>
-          </a:lnRef>
-          <a:fillRef idx="3">
-            <a:schemeClr val="accent1"/>
-          </a:fillRef>
-          <a:effectRef idx="2">
-            <a:schemeClr val="accent1"/>
-          </a:effectRef>
-          <a:fontRef idx="minor">
-            <a:schemeClr val="lt1"/>
-          </a:fontRef>
-        </p:style>
-        <p:txBody>
-          <a:bodyPr rtlCol="0" anchor="ctr"/>
-          <a:lstStyle/>
-          <a:p>
-            <a:pPr algn="ctr"/>
-          </a:p>
-        </p:txBody>
-      </p:sp>
-      <p:sp>
-        <p:nvSpPr>
-          <p:cNvPr id="23" name="TextBox 22"/>
-          <p:cNvSpPr txBox="1"/>
-          <p:nvPr/>
-        </p:nvSpPr>
-        <p:spPr>
-          <a:xfrm>
-            <a:off x="6858000" y="4014216"/>
-            <a:ext cx="457200" cy="365760"/>
-          </a:xfrm>
-          <a:prstGeom prst="rect">
-            <a:avLst/>
-          </a:prstGeom>
-          <a:noFill/>
-        </p:spPr>
-        <p:txBody>
-          <a:bodyPr wrap="square">
-            <a:spAutoFit/>
-          </a:bodyPr>
-          <a:lstStyle/>
-          <a:p>
-            <a:pPr algn="l"/>
-            <a:r>
-              <a:rPr sz="1200" b="1" i="0">
-                <a:solidFill>
-                  <a:srgbClr val="212121"/>
-                </a:solidFill>
-                <a:latin typeface="Calibri"/>
-              </a:rPr>
-              <a:t>#4</a:t>
-            </a:r>
-          </a:p>
-        </p:txBody>
-      </p:sp>
-      <p:sp>
-        <p:nvSpPr>
-          <p:cNvPr id="24" name="TextBox 23"/>
-          <p:cNvSpPr txBox="1"/>
-          <p:nvPr/>
-        </p:nvSpPr>
-        <p:spPr>
-          <a:xfrm>
-            <a:off x="7360920" y="4014216"/>
-            <a:ext cx="3017520" cy="365760"/>
-          </a:xfrm>
-          <a:prstGeom prst="rect">
-            <a:avLst/>
-          </a:prstGeom>
-          <a:noFill/>
-        </p:spPr>
-        <p:txBody>
-          <a:bodyPr wrap="square">
-            <a:spAutoFit/>
-          </a:bodyPr>
-          <a:lstStyle/>
-          <a:p>
-            <a:pPr algn="l"/>
-            <a:r>
-              <a:rPr sz="1150" b="0" i="0">
-                <a:solidFill>
-                  <a:srgbClr val="212121"/>
-                </a:solidFill>
-                <a:latin typeface="Calibri"/>
-              </a:rPr>
-              <a:t>Gênero (feminino)</a:t>
-            </a:r>
-          </a:p>
-        </p:txBody>
-      </p:sp>
-      <p:sp>
-        <p:nvSpPr>
-          <p:cNvPr id="25" name="TextBox 24"/>
-          <p:cNvSpPr txBox="1"/>
-          <p:nvPr/>
-        </p:nvSpPr>
-        <p:spPr>
-          <a:xfrm>
-            <a:off x="10424160" y="4014216"/>
-            <a:ext cx="1600200" cy="365760"/>
-          </a:xfrm>
-          <a:prstGeom prst="rect">
-            <a:avLst/>
-          </a:prstGeom>
-          <a:noFill/>
-        </p:spPr>
-        <p:txBody>
-          <a:bodyPr wrap="square">
-            <a:spAutoFit/>
-          </a:bodyPr>
-          <a:lstStyle/>
-          <a:p>
-            <a:pPr algn="l"/>
-            <a:r>
-              <a:rPr sz="1100" b="1" i="0">
-                <a:solidFill>
-                  <a:srgbClr val="212121"/>
-                </a:solidFill>
-                <a:latin typeface="Calibri"/>
-              </a:rPr>
-              <a:t>|SHAP| = 0,106</a:t>
-            </a:r>
-          </a:p>
-        </p:txBody>
-      </p:sp>
-      <p:sp>
-        <p:nvSpPr>
-          <p:cNvPr id="26" name="TextBox 25"/>
-          <p:cNvSpPr txBox="1"/>
-          <p:nvPr/>
-        </p:nvSpPr>
-        <p:spPr>
-          <a:xfrm>
-            <a:off x="7360920" y="4334256"/>
-            <a:ext cx="4480560" cy="274320"/>
-          </a:xfrm>
-          <a:prstGeom prst="rect">
-            <a:avLst/>
-          </a:prstGeom>
-          <a:noFill/>
-        </p:spPr>
-        <p:txBody>
-          <a:bodyPr wrap="square">
-            <a:spAutoFit/>
-          </a:bodyPr>
-          <a:lstStyle/>
-          <a:p>
-            <a:pPr algn="l"/>
-            <a:r>
-              <a:rPr sz="950" b="0" i="1">
-                <a:solidFill>
-                  <a:srgbClr val="616161"/>
-                </a:solidFill>
-                <a:latin typeface="Calibri"/>
-              </a:rPr>
-              <a:t/>
-            </a:r>
-          </a:p>
-        </p:txBody>
-      </p:sp>
-      <p:sp>
-        <p:nvSpPr>
-          <p:cNvPr id="27" name="Rectangle 26"/>
-          <p:cNvSpPr/>
-          <p:nvPr/>
-        </p:nvSpPr>
-        <p:spPr>
-          <a:xfrm>
-            <a:off x="6766560" y="4773168"/>
-            <a:ext cx="5303520" cy="749808"/>
-          </a:xfrm>
-          <a:prstGeom prst="rect">
-            <a:avLst/>
-          </a:prstGeom>
-          <a:solidFill>
-            <a:srgbClr val="FFEBEE"/>
-          </a:solidFill>
-          <a:ln w="6350">
-            <a:solidFill>
-              <a:srgbClr val="B71C1C"/>
-            </a:solidFill>
-          </a:ln>
-        </p:spPr>
-        <p:style>
-          <a:lnRef idx="1">
-            <a:schemeClr val="accent1"/>
-          </a:lnRef>
-          <a:fillRef idx="3">
-            <a:schemeClr val="accent1"/>
-          </a:fillRef>
-          <a:effectRef idx="2">
-            <a:schemeClr val="accent1"/>
-          </a:effectRef>
-          <a:fontRef idx="minor">
-            <a:schemeClr val="lt1"/>
-          </a:fontRef>
-        </p:style>
-        <p:txBody>
-          <a:bodyPr rtlCol="0" anchor="ctr"/>
-          <a:lstStyle/>
-          <a:p>
-            <a:pPr algn="ctr"/>
-          </a:p>
-        </p:txBody>
-      </p:sp>
-      <p:sp>
-        <p:nvSpPr>
-          <p:cNvPr id="28" name="TextBox 27"/>
-          <p:cNvSpPr txBox="1"/>
-          <p:nvPr/>
-        </p:nvSpPr>
-        <p:spPr>
-          <a:xfrm>
-            <a:off x="6858000" y="4818888"/>
-            <a:ext cx="457200" cy="365760"/>
-          </a:xfrm>
-          <a:prstGeom prst="rect">
-            <a:avLst/>
-          </a:prstGeom>
-          <a:noFill/>
-        </p:spPr>
-        <p:txBody>
-          <a:bodyPr wrap="square">
-            <a:spAutoFit/>
-          </a:bodyPr>
-          <a:lstStyle/>
-          <a:p>
-            <a:pPr algn="l"/>
-            <a:r>
-              <a:rPr sz="1200" b="1" i="0">
-                <a:solidFill>
-                  <a:srgbClr val="B71C1C"/>
-                </a:solidFill>
-                <a:latin typeface="Calibri"/>
-              </a:rPr>
-              <a:t>#14</a:t>
-            </a:r>
-          </a:p>
-        </p:txBody>
-      </p:sp>
-      <p:sp>
-        <p:nvSpPr>
-          <p:cNvPr id="29" name="TextBox 28"/>
-          <p:cNvSpPr txBox="1"/>
-          <p:nvPr/>
-        </p:nvSpPr>
-        <p:spPr>
-          <a:xfrm>
-            <a:off x="7360920" y="4818888"/>
-            <a:ext cx="3017520" cy="365760"/>
-          </a:xfrm>
-          <a:prstGeom prst="rect">
-            <a:avLst/>
-          </a:prstGeom>
-          <a:noFill/>
-        </p:spPr>
-        <p:txBody>
-          <a:bodyPr wrap="square">
-            <a:spAutoFit/>
-          </a:bodyPr>
-          <a:lstStyle/>
-          <a:p>
-            <a:pPr algn="l"/>
-            <a:r>
-              <a:rPr sz="1150" b="1" i="0">
-                <a:solidFill>
-                  <a:srgbClr val="B71C1C"/>
-                </a:solidFill>
-                <a:latin typeface="Calibri"/>
-              </a:rPr>
-              <a:t>Raça (negro)</a:t>
-            </a:r>
-          </a:p>
-        </p:txBody>
-      </p:sp>
-      <p:sp>
-        <p:nvSpPr>
-          <p:cNvPr id="30" name="TextBox 29"/>
-          <p:cNvSpPr txBox="1"/>
-          <p:nvPr/>
-        </p:nvSpPr>
-        <p:spPr>
-          <a:xfrm>
-            <a:off x="10424160" y="4818888"/>
-            <a:ext cx="1600200" cy="365760"/>
-          </a:xfrm>
-          <a:prstGeom prst="rect">
-            <a:avLst/>
-          </a:prstGeom>
-          <a:noFill/>
-        </p:spPr>
-        <p:txBody>
-          <a:bodyPr wrap="square">
-            <a:spAutoFit/>
-          </a:bodyPr>
-          <a:lstStyle/>
-          <a:p>
-            <a:pPr algn="l"/>
-            <a:r>
-              <a:rPr sz="1100" b="1" i="0">
-                <a:solidFill>
-                  <a:srgbClr val="B71C1C"/>
-                </a:solidFill>
-                <a:latin typeface="Calibri"/>
-              </a:rPr>
-              <a:t>|SHAP| = 0,027</a:t>
-            </a:r>
-          </a:p>
-        </p:txBody>
-      </p:sp>
-      <p:sp>
-        <p:nvSpPr>
-          <p:cNvPr id="31" name="TextBox 30"/>
-          <p:cNvSpPr txBox="1"/>
-          <p:nvPr/>
-        </p:nvSpPr>
-        <p:spPr>
-          <a:xfrm>
-            <a:off x="7360920" y="5138928"/>
-            <a:ext cx="4480560" cy="274320"/>
-          </a:xfrm>
-          <a:prstGeom prst="rect">
-            <a:avLst/>
-          </a:prstGeom>
-          <a:noFill/>
-        </p:spPr>
-        <p:txBody>
-          <a:bodyPr wrap="square">
-            <a:spAutoFit/>
-          </a:bodyPr>
-          <a:lstStyle/>
-          <a:p>
-            <a:pPr algn="l"/>
-            <a:r>
-              <a:rPr sz="950" b="0" i="1">
-                <a:solidFill>
-                  <a:srgbClr val="616161"/>
-                </a:solidFill>
-                <a:latin typeface="Calibri"/>
-              </a:rPr>
-              <a:t>sem a renda do bairro entre as features: 0,029</a:t>
-            </a:r>
-          </a:p>
-        </p:txBody>
-      </p:sp>
-      <p:sp>
-        <p:nvSpPr>
-          <p:cNvPr id="32" name="Rectangle 31"/>
-          <p:cNvSpPr/>
-          <p:nvPr/>
-        </p:nvSpPr>
-        <p:spPr>
-          <a:xfrm>
-            <a:off x="0" y="6601968"/>
-            <a:ext cx="12188952" cy="256032"/>
-          </a:xfrm>
-          <a:prstGeom prst="rect">
-            <a:avLst/>
-          </a:prstGeom>
-          <a:solidFill>
-            <a:srgbClr val="1F3864"/>
-          </a:solidFill>
-          <a:ln/>
-        </p:spPr>
-        <p:style>
-          <a:lnRef idx="1">
-            <a:schemeClr val="accent1"/>
-          </a:lnRef>
-          <a:fillRef idx="3">
-            <a:schemeClr val="accent1"/>
-          </a:fillRef>
-          <a:effectRef idx="2">
-            <a:schemeClr val="accent1"/>
-          </a:effectRef>
-          <a:fontRef idx="minor">
-            <a:schemeClr val="lt1"/>
-          </a:fontRef>
-        </p:style>
-        <p:txBody>
-          <a:bodyPr rtlCol="0" anchor="ctr"/>
-          <a:lstStyle/>
-          <a:p>
-            <a:pPr algn="ctr"/>
-          </a:p>
-        </p:txBody>
-      </p:sp>
-      <p:sp>
-        <p:nvSpPr>
-          <p:cNvPr id="33" name="TextBox 32"/>
-          <p:cNvSpPr txBox="1"/>
-          <p:nvPr/>
-        </p:nvSpPr>
-        <p:spPr>
-          <a:xfrm>
-            <a:off x="137160" y="6629400"/>
-            <a:ext cx="10058400" cy="228600"/>
-          </a:xfrm>
-          <a:prstGeom prst="rect">
-            <a:avLst/>
-          </a:prstGeom>
-          <a:noFill/>
-        </p:spPr>
-        <p:txBody>
-          <a:bodyPr wrap="square">
-            <a:spAutoFit/>
-          </a:bodyPr>
-          <a:lstStyle/>
-          <a:p>
-            <a:pPr algn="l"/>
-            <a:r>
-              <a:rPr sz="850" b="0" i="0">
-                <a:solidFill>
-                  <a:srgbClr val="BBDEFB"/>
-                </a:solidFill>
-                <a:latin typeface="Calibri"/>
-              </a:rPr>
-              <a:t>Ricardo Calheiros  |  MBA USP/ESALQ  |  Racismo Estrutural e Mercado de Trabalho</a:t>
-            </a:r>
-          </a:p>
-        </p:txBody>
-      </p:sp>
-      <p:sp>
-        <p:nvSpPr>
-          <p:cNvPr id="34" name="TextBox 33"/>
-          <p:cNvSpPr txBox="1"/>
-          <p:nvPr/>
-        </p:nvSpPr>
-        <p:spPr>
-          <a:xfrm>
-            <a:off x="11521440" y="6629400"/>
-            <a:ext cx="640080" cy="228600"/>
-          </a:xfrm>
-          <a:prstGeom prst="rect">
-            <a:avLst/>
-          </a:prstGeom>
-          <a:noFill/>
-        </p:spPr>
-        <p:txBody>
-          <a:bodyPr wrap="square">
-            <a:spAutoFit/>
-          </a:bodyPr>
-          <a:lstStyle/>
-          <a:p>
-            <a:pPr algn="r"/>
-            <a:r>
-              <a:rPr sz="850" b="0" i="0">
-                <a:solidFill>
-                  <a:srgbClr val="FFFFFF"/>
-                </a:solidFill>
-                <a:latin typeface="Calibri"/>
-              </a:rPr>
-              <a:t>18/24</a:t>
+              <a:t>18/25</a:t>
             </a:r>
           </a:p>
         </p:txBody>
@@ -11076,13 +10937,1997 @@
           <a:p>
             <a:pPr algn="l"/>
             <a:r>
+              <a:rPr sz="1900" b="1" i="0">
+                <a:solidFill>
+                  <a:srgbClr val="FFFFFF"/>
+                </a:solidFill>
+                <a:latin typeface="Calibri"/>
+              </a:rPr>
+              <a:t>17. Sem impor forma funcional, a raça continua pesando na previsão da renda</a:t>
+            </a:r>
+          </a:p>
+        </p:txBody>
+      </p:sp>
+      <p:sp>
+        <p:nvSpPr>
+          <p:cNvPr id="4" name="TextBox 3"/>
+          <p:cNvSpPr txBox="1"/>
+          <p:nvPr/>
+        </p:nvSpPr>
+        <p:spPr>
+          <a:xfrm>
+            <a:off x="274320" y="594360"/>
+            <a:ext cx="10972800" cy="347472"/>
+          </a:xfrm>
+          <a:prstGeom prst="rect">
+            <a:avLst/>
+          </a:prstGeom>
+          <a:noFill/>
+        </p:spPr>
+        <p:txBody>
+          <a:bodyPr wrap="square">
+            <a:spAutoFit/>
+          </a:bodyPr>
+          <a:lstStyle/>
+          <a:p>
+            <a:pPr algn="l"/>
+            <a:r>
+              <a:rPr sz="1400" b="0" i="0">
+                <a:solidFill>
+                  <a:srgbClr val="BBDEFB"/>
+                </a:solidFill>
+                <a:latin typeface="Calibri"/>
+              </a:rPr>
+              <a:t>XGBoost com R² de teste 0,644 | profundidade escolhida por validação cruzada (10)</a:t>
+            </a:r>
+          </a:p>
+        </p:txBody>
+      </p:sp>
+      <p:pic>
+        <p:nvPicPr>
+          <p:cNvPr id="5" name="Picture 4" descr="shap_importance_xgb.png"/>
+          <p:cNvPicPr>
+            <a:picLocks noChangeAspect="1"/>
+          </p:cNvPicPr>
+          <p:nvPr/>
+        </p:nvPicPr>
+        <p:blipFill>
+          <a:blip r:embed="rId2"/>
+          <a:stretch>
+            <a:fillRect/>
+          </a:stretch>
+        </p:blipFill>
+        <p:spPr>
+          <a:xfrm>
+            <a:off x="274320" y="1097280"/>
+            <a:ext cx="6217920" cy="4606059"/>
+          </a:xfrm>
+          <a:prstGeom prst="rect">
+            <a:avLst/>
+          </a:prstGeom>
+        </p:spPr>
+      </p:pic>
+      <p:sp>
+        <p:nvSpPr>
+          <p:cNvPr id="6" name="TextBox 5"/>
+          <p:cNvSpPr txBox="1"/>
+          <p:nvPr/>
+        </p:nvSpPr>
+        <p:spPr>
+          <a:xfrm>
+            <a:off x="6766560" y="1097280"/>
+            <a:ext cx="5303520" cy="365760"/>
+          </a:xfrm>
+          <a:prstGeom prst="rect">
+            <a:avLst/>
+          </a:prstGeom>
+          <a:noFill/>
+        </p:spPr>
+        <p:txBody>
+          <a:bodyPr wrap="square">
+            <a:spAutoFit/>
+          </a:bodyPr>
+          <a:lstStyle/>
+          <a:p>
+            <a:pPr algn="l"/>
+            <a:r>
+              <a:rPr sz="1600" b="1" i="0">
+                <a:solidFill>
+                  <a:srgbClr val="1F3864"/>
+                </a:solidFill>
+                <a:latin typeface="Calibri"/>
+              </a:rPr>
+              <a:t>Destaques com as novas variáveis</a:t>
+            </a:r>
+          </a:p>
+        </p:txBody>
+      </p:sp>
+      <p:sp>
+        <p:nvSpPr>
+          <p:cNvPr id="7" name="Rectangle 6"/>
+          <p:cNvSpPr/>
+          <p:nvPr/>
+        </p:nvSpPr>
+        <p:spPr>
+          <a:xfrm>
+            <a:off x="6766560" y="1554480"/>
+            <a:ext cx="5303520" cy="749808"/>
+          </a:xfrm>
+          <a:prstGeom prst="rect">
+            <a:avLst/>
+          </a:prstGeom>
+          <a:solidFill>
+            <a:srgbClr val="F5F5F5"/>
+          </a:solidFill>
+          <a:ln w="6350">
+            <a:solidFill>
+              <a:srgbClr val="616161"/>
+            </a:solidFill>
+          </a:ln>
+        </p:spPr>
+        <p:style>
+          <a:lnRef idx="1">
+            <a:schemeClr val="accent1"/>
+          </a:lnRef>
+          <a:fillRef idx="3">
+            <a:schemeClr val="accent1"/>
+          </a:fillRef>
+          <a:effectRef idx="2">
+            <a:schemeClr val="accent1"/>
+          </a:effectRef>
+          <a:fontRef idx="minor">
+            <a:schemeClr val="lt1"/>
+          </a:fontRef>
+        </p:style>
+        <p:txBody>
+          <a:bodyPr rtlCol="0" anchor="ctr"/>
+          <a:lstStyle/>
+          <a:p>
+            <a:pPr algn="ctr"/>
+          </a:p>
+        </p:txBody>
+      </p:sp>
+      <p:sp>
+        <p:nvSpPr>
+          <p:cNvPr id="8" name="TextBox 7"/>
+          <p:cNvSpPr txBox="1"/>
+          <p:nvPr/>
+        </p:nvSpPr>
+        <p:spPr>
+          <a:xfrm>
+            <a:off x="6858000" y="1600200"/>
+            <a:ext cx="457200" cy="365760"/>
+          </a:xfrm>
+          <a:prstGeom prst="rect">
+            <a:avLst/>
+          </a:prstGeom>
+          <a:noFill/>
+        </p:spPr>
+        <p:txBody>
+          <a:bodyPr wrap="square">
+            <a:spAutoFit/>
+          </a:bodyPr>
+          <a:lstStyle/>
+          <a:p>
+            <a:pPr algn="l"/>
+            <a:r>
+              <a:rPr sz="1200" b="1" i="0">
+                <a:solidFill>
+                  <a:srgbClr val="1565C0"/>
+                </a:solidFill>
+                <a:latin typeface="Calibri"/>
+              </a:rPr>
+              <a:t>#1</a:t>
+            </a:r>
+          </a:p>
+        </p:txBody>
+      </p:sp>
+      <p:sp>
+        <p:nvSpPr>
+          <p:cNvPr id="9" name="TextBox 8"/>
+          <p:cNvSpPr txBox="1"/>
+          <p:nvPr/>
+        </p:nvSpPr>
+        <p:spPr>
+          <a:xfrm>
+            <a:off x="7360920" y="1600200"/>
+            <a:ext cx="3017520" cy="365760"/>
+          </a:xfrm>
+          <a:prstGeom prst="rect">
+            <a:avLst/>
+          </a:prstGeom>
+          <a:noFill/>
+        </p:spPr>
+        <p:txBody>
+          <a:bodyPr wrap="square">
+            <a:spAutoFit/>
+          </a:bodyPr>
+          <a:lstStyle/>
+          <a:p>
+            <a:pPr algn="l"/>
+            <a:r>
+              <a:rPr sz="1150" b="1" i="0">
+                <a:solidFill>
+                  <a:srgbClr val="1565C0"/>
+                </a:solidFill>
+                <a:latin typeface="Calibri"/>
+              </a:rPr>
+              <a:t>Renda média UPA (exceto o próprio)</a:t>
+            </a:r>
+          </a:p>
+        </p:txBody>
+      </p:sp>
+      <p:sp>
+        <p:nvSpPr>
+          <p:cNvPr id="10" name="TextBox 9"/>
+          <p:cNvSpPr txBox="1"/>
+          <p:nvPr/>
+        </p:nvSpPr>
+        <p:spPr>
+          <a:xfrm>
+            <a:off x="10424160" y="1600200"/>
+            <a:ext cx="1600200" cy="365760"/>
+          </a:xfrm>
+          <a:prstGeom prst="rect">
+            <a:avLst/>
+          </a:prstGeom>
+          <a:noFill/>
+        </p:spPr>
+        <p:txBody>
+          <a:bodyPr wrap="square">
+            <a:spAutoFit/>
+          </a:bodyPr>
+          <a:lstStyle/>
+          <a:p>
+            <a:pPr algn="l"/>
+            <a:r>
+              <a:rPr sz="1100" b="1" i="0">
+                <a:solidFill>
+                  <a:srgbClr val="1565C0"/>
+                </a:solidFill>
+                <a:latin typeface="Calibri"/>
+              </a:rPr>
+              <a:t>|SHAP| = 0,188</a:t>
+            </a:r>
+          </a:p>
+        </p:txBody>
+      </p:sp>
+      <p:sp>
+        <p:nvSpPr>
+          <p:cNvPr id="11" name="TextBox 10"/>
+          <p:cNvSpPr txBox="1"/>
+          <p:nvPr/>
+        </p:nvSpPr>
+        <p:spPr>
+          <a:xfrm>
+            <a:off x="7360920" y="1920240"/>
+            <a:ext cx="4480560" cy="274320"/>
+          </a:xfrm>
+          <a:prstGeom prst="rect">
+            <a:avLst/>
+          </a:prstGeom>
+          <a:noFill/>
+        </p:spPr>
+        <p:txBody>
+          <a:bodyPr wrap="square">
+            <a:spAutoFit/>
+          </a:bodyPr>
+          <a:lstStyle/>
+          <a:p>
+            <a:pPr algn="l"/>
+            <a:r>
+              <a:rPr sz="950" b="0" i="1">
+                <a:solidFill>
+                  <a:srgbClr val="616161"/>
+                </a:solidFill>
+                <a:latin typeface="Calibri"/>
+              </a:rPr>
+              <a:t>Wilson (1987): o contexto do bairro pesa tanto quanto o diploma</a:t>
+            </a:r>
+          </a:p>
+        </p:txBody>
+      </p:sp>
+      <p:sp>
+        <p:nvSpPr>
+          <p:cNvPr id="12" name="Rectangle 11"/>
+          <p:cNvSpPr/>
+          <p:nvPr/>
+        </p:nvSpPr>
+        <p:spPr>
+          <a:xfrm>
+            <a:off x="6766560" y="2359152"/>
+            <a:ext cx="5303520" cy="749808"/>
+          </a:xfrm>
+          <a:prstGeom prst="rect">
+            <a:avLst/>
+          </a:prstGeom>
+          <a:solidFill>
+            <a:srgbClr val="F5F5F5"/>
+          </a:solidFill>
+          <a:ln w="6350">
+            <a:solidFill>
+              <a:srgbClr val="616161"/>
+            </a:solidFill>
+          </a:ln>
+        </p:spPr>
+        <p:style>
+          <a:lnRef idx="1">
+            <a:schemeClr val="accent1"/>
+          </a:lnRef>
+          <a:fillRef idx="3">
+            <a:schemeClr val="accent1"/>
+          </a:fillRef>
+          <a:effectRef idx="2">
+            <a:schemeClr val="accent1"/>
+          </a:effectRef>
+          <a:fontRef idx="minor">
+            <a:schemeClr val="lt1"/>
+          </a:fontRef>
+        </p:style>
+        <p:txBody>
+          <a:bodyPr rtlCol="0" anchor="ctr"/>
+          <a:lstStyle/>
+          <a:p>
+            <a:pPr algn="ctr"/>
+          </a:p>
+        </p:txBody>
+      </p:sp>
+      <p:sp>
+        <p:nvSpPr>
+          <p:cNvPr id="13" name="TextBox 12"/>
+          <p:cNvSpPr txBox="1"/>
+          <p:nvPr/>
+        </p:nvSpPr>
+        <p:spPr>
+          <a:xfrm>
+            <a:off x="6858000" y="2404872"/>
+            <a:ext cx="457200" cy="365760"/>
+          </a:xfrm>
+          <a:prstGeom prst="rect">
+            <a:avLst/>
+          </a:prstGeom>
+          <a:noFill/>
+        </p:spPr>
+        <p:txBody>
+          <a:bodyPr wrap="square">
+            <a:spAutoFit/>
+          </a:bodyPr>
+          <a:lstStyle/>
+          <a:p>
+            <a:pPr algn="l"/>
+            <a:r>
+              <a:rPr sz="1200" b="1" i="0">
+                <a:solidFill>
+                  <a:srgbClr val="212121"/>
+                </a:solidFill>
+                <a:latin typeface="Calibri"/>
+              </a:rPr>
+              <a:t>#2</a:t>
+            </a:r>
+          </a:p>
+        </p:txBody>
+      </p:sp>
+      <p:sp>
+        <p:nvSpPr>
+          <p:cNvPr id="14" name="TextBox 13"/>
+          <p:cNvSpPr txBox="1"/>
+          <p:nvPr/>
+        </p:nvSpPr>
+        <p:spPr>
+          <a:xfrm>
+            <a:off x="7360920" y="2404872"/>
+            <a:ext cx="3017520" cy="365760"/>
+          </a:xfrm>
+          <a:prstGeom prst="rect">
+            <a:avLst/>
+          </a:prstGeom>
+          <a:noFill/>
+        </p:spPr>
+        <p:txBody>
+          <a:bodyPr wrap="square">
+            <a:spAutoFit/>
+          </a:bodyPr>
+          <a:lstStyle/>
+          <a:p>
+            <a:pPr algn="l"/>
+            <a:r>
+              <a:rPr sz="1150" b="0" i="0">
+                <a:solidFill>
+                  <a:srgbClr val="212121"/>
+                </a:solidFill>
+                <a:latin typeface="Calibri"/>
+              </a:rPr>
+              <a:t>Educ.: superior completo</a:t>
+            </a:r>
+          </a:p>
+        </p:txBody>
+      </p:sp>
+      <p:sp>
+        <p:nvSpPr>
+          <p:cNvPr id="15" name="TextBox 14"/>
+          <p:cNvSpPr txBox="1"/>
+          <p:nvPr/>
+        </p:nvSpPr>
+        <p:spPr>
+          <a:xfrm>
+            <a:off x="10424160" y="2404872"/>
+            <a:ext cx="1600200" cy="365760"/>
+          </a:xfrm>
+          <a:prstGeom prst="rect">
+            <a:avLst/>
+          </a:prstGeom>
+          <a:noFill/>
+        </p:spPr>
+        <p:txBody>
+          <a:bodyPr wrap="square">
+            <a:spAutoFit/>
+          </a:bodyPr>
+          <a:lstStyle/>
+          <a:p>
+            <a:pPr algn="l"/>
+            <a:r>
+              <a:rPr sz="1100" b="1" i="0">
+                <a:solidFill>
+                  <a:srgbClr val="212121"/>
+                </a:solidFill>
+                <a:latin typeface="Calibri"/>
+              </a:rPr>
+              <a:t>|SHAP| = 0,178</a:t>
+            </a:r>
+          </a:p>
+        </p:txBody>
+      </p:sp>
+      <p:sp>
+        <p:nvSpPr>
+          <p:cNvPr id="16" name="TextBox 15"/>
+          <p:cNvSpPr txBox="1"/>
+          <p:nvPr/>
+        </p:nvSpPr>
+        <p:spPr>
+          <a:xfrm>
+            <a:off x="7360920" y="2724912"/>
+            <a:ext cx="4480560" cy="274320"/>
+          </a:xfrm>
+          <a:prstGeom prst="rect">
+            <a:avLst/>
+          </a:prstGeom>
+          <a:noFill/>
+        </p:spPr>
+        <p:txBody>
+          <a:bodyPr wrap="square">
+            <a:spAutoFit/>
+          </a:bodyPr>
+          <a:lstStyle/>
+          <a:p>
+            <a:pPr algn="l"/>
+            <a:r>
+              <a:rPr sz="950" b="0" i="1">
+                <a:solidFill>
+                  <a:srgbClr val="616161"/>
+                </a:solidFill>
+                <a:latin typeface="Calibri"/>
+              </a:rPr>
+              <a:t/>
+            </a:r>
+          </a:p>
+        </p:txBody>
+      </p:sp>
+      <p:sp>
+        <p:nvSpPr>
+          <p:cNvPr id="17" name="Rectangle 16"/>
+          <p:cNvSpPr/>
+          <p:nvPr/>
+        </p:nvSpPr>
+        <p:spPr>
+          <a:xfrm>
+            <a:off x="6766560" y="3163824"/>
+            <a:ext cx="5303520" cy="749808"/>
+          </a:xfrm>
+          <a:prstGeom prst="rect">
+            <a:avLst/>
+          </a:prstGeom>
+          <a:solidFill>
+            <a:srgbClr val="F5F5F5"/>
+          </a:solidFill>
+          <a:ln w="6350">
+            <a:solidFill>
+              <a:srgbClr val="616161"/>
+            </a:solidFill>
+          </a:ln>
+        </p:spPr>
+        <p:style>
+          <a:lnRef idx="1">
+            <a:schemeClr val="accent1"/>
+          </a:lnRef>
+          <a:fillRef idx="3">
+            <a:schemeClr val="accent1"/>
+          </a:fillRef>
+          <a:effectRef idx="2">
+            <a:schemeClr val="accent1"/>
+          </a:effectRef>
+          <a:fontRef idx="minor">
+            <a:schemeClr val="lt1"/>
+          </a:fontRef>
+        </p:style>
+        <p:txBody>
+          <a:bodyPr rtlCol="0" anchor="ctr"/>
+          <a:lstStyle/>
+          <a:p>
+            <a:pPr algn="ctr"/>
+          </a:p>
+        </p:txBody>
+      </p:sp>
+      <p:sp>
+        <p:nvSpPr>
+          <p:cNvPr id="18" name="TextBox 17"/>
+          <p:cNvSpPr txBox="1"/>
+          <p:nvPr/>
+        </p:nvSpPr>
+        <p:spPr>
+          <a:xfrm>
+            <a:off x="6858000" y="3209544"/>
+            <a:ext cx="457200" cy="365760"/>
+          </a:xfrm>
+          <a:prstGeom prst="rect">
+            <a:avLst/>
+          </a:prstGeom>
+          <a:noFill/>
+        </p:spPr>
+        <p:txBody>
+          <a:bodyPr wrap="square">
+            <a:spAutoFit/>
+          </a:bodyPr>
+          <a:lstStyle/>
+          <a:p>
+            <a:pPr algn="l"/>
+            <a:r>
+              <a:rPr sz="1200" b="1" i="0">
+                <a:solidFill>
+                  <a:srgbClr val="212121"/>
+                </a:solidFill>
+                <a:latin typeface="Calibri"/>
+              </a:rPr>
+              <a:t>#3</a:t>
+            </a:r>
+          </a:p>
+        </p:txBody>
+      </p:sp>
+      <p:sp>
+        <p:nvSpPr>
+          <p:cNvPr id="19" name="TextBox 18"/>
+          <p:cNvSpPr txBox="1"/>
+          <p:nvPr/>
+        </p:nvSpPr>
+        <p:spPr>
+          <a:xfrm>
+            <a:off x="7360920" y="3209544"/>
+            <a:ext cx="3017520" cy="365760"/>
+          </a:xfrm>
+          <a:prstGeom prst="rect">
+            <a:avLst/>
+          </a:prstGeom>
+          <a:noFill/>
+        </p:spPr>
+        <p:txBody>
+          <a:bodyPr wrap="square">
+            <a:spAutoFit/>
+          </a:bodyPr>
+          <a:lstStyle/>
+          <a:p>
+            <a:pPr algn="l"/>
+            <a:r>
+              <a:rPr sz="1150" b="0" i="0">
+                <a:solidFill>
+                  <a:srgbClr val="212121"/>
+                </a:solidFill>
+                <a:latin typeface="Calibri"/>
+              </a:rPr>
+              <a:t>Horas trabalhadas</a:t>
+            </a:r>
+          </a:p>
+        </p:txBody>
+      </p:sp>
+      <p:sp>
+        <p:nvSpPr>
+          <p:cNvPr id="20" name="TextBox 19"/>
+          <p:cNvSpPr txBox="1"/>
+          <p:nvPr/>
+        </p:nvSpPr>
+        <p:spPr>
+          <a:xfrm>
+            <a:off x="10424160" y="3209544"/>
+            <a:ext cx="1600200" cy="365760"/>
+          </a:xfrm>
+          <a:prstGeom prst="rect">
+            <a:avLst/>
+          </a:prstGeom>
+          <a:noFill/>
+        </p:spPr>
+        <p:txBody>
+          <a:bodyPr wrap="square">
+            <a:spAutoFit/>
+          </a:bodyPr>
+          <a:lstStyle/>
+          <a:p>
+            <a:pPr algn="l"/>
+            <a:r>
+              <a:rPr sz="1100" b="1" i="0">
+                <a:solidFill>
+                  <a:srgbClr val="212121"/>
+                </a:solidFill>
+                <a:latin typeface="Calibri"/>
+              </a:rPr>
+              <a:t>|SHAP| = 0,172</a:t>
+            </a:r>
+          </a:p>
+        </p:txBody>
+      </p:sp>
+      <p:sp>
+        <p:nvSpPr>
+          <p:cNvPr id="21" name="TextBox 20"/>
+          <p:cNvSpPr txBox="1"/>
+          <p:nvPr/>
+        </p:nvSpPr>
+        <p:spPr>
+          <a:xfrm>
+            <a:off x="7360920" y="3529584"/>
+            <a:ext cx="4480560" cy="274320"/>
+          </a:xfrm>
+          <a:prstGeom prst="rect">
+            <a:avLst/>
+          </a:prstGeom>
+          <a:noFill/>
+        </p:spPr>
+        <p:txBody>
+          <a:bodyPr wrap="square">
+            <a:spAutoFit/>
+          </a:bodyPr>
+          <a:lstStyle/>
+          <a:p>
+            <a:pPr algn="l"/>
+            <a:r>
+              <a:rPr sz="950" b="0" i="1">
+                <a:solidFill>
+                  <a:srgbClr val="616161"/>
+                </a:solidFill>
+                <a:latin typeface="Calibri"/>
+              </a:rPr>
+              <a:t>jornada — a variável de esforço declarado</a:t>
+            </a:r>
+          </a:p>
+        </p:txBody>
+      </p:sp>
+      <p:sp>
+        <p:nvSpPr>
+          <p:cNvPr id="22" name="Rectangle 21"/>
+          <p:cNvSpPr/>
+          <p:nvPr/>
+        </p:nvSpPr>
+        <p:spPr>
+          <a:xfrm>
+            <a:off x="6766560" y="3968496"/>
+            <a:ext cx="5303520" cy="749808"/>
+          </a:xfrm>
+          <a:prstGeom prst="rect">
+            <a:avLst/>
+          </a:prstGeom>
+          <a:solidFill>
+            <a:srgbClr val="F5F5F5"/>
+          </a:solidFill>
+          <a:ln w="6350">
+            <a:solidFill>
+              <a:srgbClr val="616161"/>
+            </a:solidFill>
+          </a:ln>
+        </p:spPr>
+        <p:style>
+          <a:lnRef idx="1">
+            <a:schemeClr val="accent1"/>
+          </a:lnRef>
+          <a:fillRef idx="3">
+            <a:schemeClr val="accent1"/>
+          </a:fillRef>
+          <a:effectRef idx="2">
+            <a:schemeClr val="accent1"/>
+          </a:effectRef>
+          <a:fontRef idx="minor">
+            <a:schemeClr val="lt1"/>
+          </a:fontRef>
+        </p:style>
+        <p:txBody>
+          <a:bodyPr rtlCol="0" anchor="ctr"/>
+          <a:lstStyle/>
+          <a:p>
+            <a:pPr algn="ctr"/>
+          </a:p>
+        </p:txBody>
+      </p:sp>
+      <p:sp>
+        <p:nvSpPr>
+          <p:cNvPr id="23" name="TextBox 22"/>
+          <p:cNvSpPr txBox="1"/>
+          <p:nvPr/>
+        </p:nvSpPr>
+        <p:spPr>
+          <a:xfrm>
+            <a:off x="6858000" y="4014216"/>
+            <a:ext cx="457200" cy="365760"/>
+          </a:xfrm>
+          <a:prstGeom prst="rect">
+            <a:avLst/>
+          </a:prstGeom>
+          <a:noFill/>
+        </p:spPr>
+        <p:txBody>
+          <a:bodyPr wrap="square">
+            <a:spAutoFit/>
+          </a:bodyPr>
+          <a:lstStyle/>
+          <a:p>
+            <a:pPr algn="l"/>
+            <a:r>
+              <a:rPr sz="1200" b="1" i="0">
+                <a:solidFill>
+                  <a:srgbClr val="212121"/>
+                </a:solidFill>
+                <a:latin typeface="Calibri"/>
+              </a:rPr>
+              <a:t>#4</a:t>
+            </a:r>
+          </a:p>
+        </p:txBody>
+      </p:sp>
+      <p:sp>
+        <p:nvSpPr>
+          <p:cNvPr id="24" name="TextBox 23"/>
+          <p:cNvSpPr txBox="1"/>
+          <p:nvPr/>
+        </p:nvSpPr>
+        <p:spPr>
+          <a:xfrm>
+            <a:off x="7360920" y="4014216"/>
+            <a:ext cx="3017520" cy="365760"/>
+          </a:xfrm>
+          <a:prstGeom prst="rect">
+            <a:avLst/>
+          </a:prstGeom>
+          <a:noFill/>
+        </p:spPr>
+        <p:txBody>
+          <a:bodyPr wrap="square">
+            <a:spAutoFit/>
+          </a:bodyPr>
+          <a:lstStyle/>
+          <a:p>
+            <a:pPr algn="l"/>
+            <a:r>
+              <a:rPr sz="1150" b="0" i="0">
+                <a:solidFill>
+                  <a:srgbClr val="212121"/>
+                </a:solidFill>
+                <a:latin typeface="Calibri"/>
+              </a:rPr>
+              <a:t>Gênero (feminino)</a:t>
+            </a:r>
+          </a:p>
+        </p:txBody>
+      </p:sp>
+      <p:sp>
+        <p:nvSpPr>
+          <p:cNvPr id="25" name="TextBox 24"/>
+          <p:cNvSpPr txBox="1"/>
+          <p:nvPr/>
+        </p:nvSpPr>
+        <p:spPr>
+          <a:xfrm>
+            <a:off x="10424160" y="4014216"/>
+            <a:ext cx="1600200" cy="365760"/>
+          </a:xfrm>
+          <a:prstGeom prst="rect">
+            <a:avLst/>
+          </a:prstGeom>
+          <a:noFill/>
+        </p:spPr>
+        <p:txBody>
+          <a:bodyPr wrap="square">
+            <a:spAutoFit/>
+          </a:bodyPr>
+          <a:lstStyle/>
+          <a:p>
+            <a:pPr algn="l"/>
+            <a:r>
+              <a:rPr sz="1100" b="1" i="0">
+                <a:solidFill>
+                  <a:srgbClr val="212121"/>
+                </a:solidFill>
+                <a:latin typeface="Calibri"/>
+              </a:rPr>
+              <a:t>|SHAP| = 0,106</a:t>
+            </a:r>
+          </a:p>
+        </p:txBody>
+      </p:sp>
+      <p:sp>
+        <p:nvSpPr>
+          <p:cNvPr id="26" name="TextBox 25"/>
+          <p:cNvSpPr txBox="1"/>
+          <p:nvPr/>
+        </p:nvSpPr>
+        <p:spPr>
+          <a:xfrm>
+            <a:off x="7360920" y="4334256"/>
+            <a:ext cx="4480560" cy="274320"/>
+          </a:xfrm>
+          <a:prstGeom prst="rect">
+            <a:avLst/>
+          </a:prstGeom>
+          <a:noFill/>
+        </p:spPr>
+        <p:txBody>
+          <a:bodyPr wrap="square">
+            <a:spAutoFit/>
+          </a:bodyPr>
+          <a:lstStyle/>
+          <a:p>
+            <a:pPr algn="l"/>
+            <a:r>
+              <a:rPr sz="950" b="0" i="1">
+                <a:solidFill>
+                  <a:srgbClr val="616161"/>
+                </a:solidFill>
+                <a:latin typeface="Calibri"/>
+              </a:rPr>
+              <a:t/>
+            </a:r>
+          </a:p>
+        </p:txBody>
+      </p:sp>
+      <p:sp>
+        <p:nvSpPr>
+          <p:cNvPr id="27" name="Rectangle 26"/>
+          <p:cNvSpPr/>
+          <p:nvPr/>
+        </p:nvSpPr>
+        <p:spPr>
+          <a:xfrm>
+            <a:off x="6766560" y="4773168"/>
+            <a:ext cx="5303520" cy="749808"/>
+          </a:xfrm>
+          <a:prstGeom prst="rect">
+            <a:avLst/>
+          </a:prstGeom>
+          <a:solidFill>
+            <a:srgbClr val="FFEBEE"/>
+          </a:solidFill>
+          <a:ln w="6350">
+            <a:solidFill>
+              <a:srgbClr val="B71C1C"/>
+            </a:solidFill>
+          </a:ln>
+        </p:spPr>
+        <p:style>
+          <a:lnRef idx="1">
+            <a:schemeClr val="accent1"/>
+          </a:lnRef>
+          <a:fillRef idx="3">
+            <a:schemeClr val="accent1"/>
+          </a:fillRef>
+          <a:effectRef idx="2">
+            <a:schemeClr val="accent1"/>
+          </a:effectRef>
+          <a:fontRef idx="minor">
+            <a:schemeClr val="lt1"/>
+          </a:fontRef>
+        </p:style>
+        <p:txBody>
+          <a:bodyPr rtlCol="0" anchor="ctr"/>
+          <a:lstStyle/>
+          <a:p>
+            <a:pPr algn="ctr"/>
+          </a:p>
+        </p:txBody>
+      </p:sp>
+      <p:sp>
+        <p:nvSpPr>
+          <p:cNvPr id="28" name="TextBox 27"/>
+          <p:cNvSpPr txBox="1"/>
+          <p:nvPr/>
+        </p:nvSpPr>
+        <p:spPr>
+          <a:xfrm>
+            <a:off x="6858000" y="4818888"/>
+            <a:ext cx="457200" cy="365760"/>
+          </a:xfrm>
+          <a:prstGeom prst="rect">
+            <a:avLst/>
+          </a:prstGeom>
+          <a:noFill/>
+        </p:spPr>
+        <p:txBody>
+          <a:bodyPr wrap="square">
+            <a:spAutoFit/>
+          </a:bodyPr>
+          <a:lstStyle/>
+          <a:p>
+            <a:pPr algn="l"/>
+            <a:r>
+              <a:rPr sz="1200" b="1" i="0">
+                <a:solidFill>
+                  <a:srgbClr val="B71C1C"/>
+                </a:solidFill>
+                <a:latin typeface="Calibri"/>
+              </a:rPr>
+              <a:t>#14</a:t>
+            </a:r>
+          </a:p>
+        </p:txBody>
+      </p:sp>
+      <p:sp>
+        <p:nvSpPr>
+          <p:cNvPr id="29" name="TextBox 28"/>
+          <p:cNvSpPr txBox="1"/>
+          <p:nvPr/>
+        </p:nvSpPr>
+        <p:spPr>
+          <a:xfrm>
+            <a:off x="7360920" y="4818888"/>
+            <a:ext cx="3017520" cy="365760"/>
+          </a:xfrm>
+          <a:prstGeom prst="rect">
+            <a:avLst/>
+          </a:prstGeom>
+          <a:noFill/>
+        </p:spPr>
+        <p:txBody>
+          <a:bodyPr wrap="square">
+            <a:spAutoFit/>
+          </a:bodyPr>
+          <a:lstStyle/>
+          <a:p>
+            <a:pPr algn="l"/>
+            <a:r>
+              <a:rPr sz="1150" b="1" i="0">
+                <a:solidFill>
+                  <a:srgbClr val="B71C1C"/>
+                </a:solidFill>
+                <a:latin typeface="Calibri"/>
+              </a:rPr>
+              <a:t>Raça (negro)</a:t>
+            </a:r>
+          </a:p>
+        </p:txBody>
+      </p:sp>
+      <p:sp>
+        <p:nvSpPr>
+          <p:cNvPr id="30" name="TextBox 29"/>
+          <p:cNvSpPr txBox="1"/>
+          <p:nvPr/>
+        </p:nvSpPr>
+        <p:spPr>
+          <a:xfrm>
+            <a:off x="10424160" y="4818888"/>
+            <a:ext cx="1600200" cy="365760"/>
+          </a:xfrm>
+          <a:prstGeom prst="rect">
+            <a:avLst/>
+          </a:prstGeom>
+          <a:noFill/>
+        </p:spPr>
+        <p:txBody>
+          <a:bodyPr wrap="square">
+            <a:spAutoFit/>
+          </a:bodyPr>
+          <a:lstStyle/>
+          <a:p>
+            <a:pPr algn="l"/>
+            <a:r>
+              <a:rPr sz="1100" b="1" i="0">
+                <a:solidFill>
+                  <a:srgbClr val="B71C1C"/>
+                </a:solidFill>
+                <a:latin typeface="Calibri"/>
+              </a:rPr>
+              <a:t>|SHAP| = 0,027</a:t>
+            </a:r>
+          </a:p>
+        </p:txBody>
+      </p:sp>
+      <p:sp>
+        <p:nvSpPr>
+          <p:cNvPr id="31" name="TextBox 30"/>
+          <p:cNvSpPr txBox="1"/>
+          <p:nvPr/>
+        </p:nvSpPr>
+        <p:spPr>
+          <a:xfrm>
+            <a:off x="7360920" y="5138928"/>
+            <a:ext cx="4480560" cy="274320"/>
+          </a:xfrm>
+          <a:prstGeom prst="rect">
+            <a:avLst/>
+          </a:prstGeom>
+          <a:noFill/>
+        </p:spPr>
+        <p:txBody>
+          <a:bodyPr wrap="square">
+            <a:spAutoFit/>
+          </a:bodyPr>
+          <a:lstStyle/>
+          <a:p>
+            <a:pPr algn="l"/>
+            <a:r>
+              <a:rPr sz="950" b="0" i="1">
+                <a:solidFill>
+                  <a:srgbClr val="616161"/>
+                </a:solidFill>
+                <a:latin typeface="Calibri"/>
+              </a:rPr>
+              <a:t>sem a renda do bairro entre as features: 0,029</a:t>
+            </a:r>
+          </a:p>
+        </p:txBody>
+      </p:sp>
+      <p:sp>
+        <p:nvSpPr>
+          <p:cNvPr id="32" name="Rectangle 31"/>
+          <p:cNvSpPr/>
+          <p:nvPr/>
+        </p:nvSpPr>
+        <p:spPr>
+          <a:xfrm>
+            <a:off x="0" y="6601968"/>
+            <a:ext cx="12188952" cy="256032"/>
+          </a:xfrm>
+          <a:prstGeom prst="rect">
+            <a:avLst/>
+          </a:prstGeom>
+          <a:solidFill>
+            <a:srgbClr val="1F3864"/>
+          </a:solidFill>
+          <a:ln/>
+        </p:spPr>
+        <p:style>
+          <a:lnRef idx="1">
+            <a:schemeClr val="accent1"/>
+          </a:lnRef>
+          <a:fillRef idx="3">
+            <a:schemeClr val="accent1"/>
+          </a:fillRef>
+          <a:effectRef idx="2">
+            <a:schemeClr val="accent1"/>
+          </a:effectRef>
+          <a:fontRef idx="minor">
+            <a:schemeClr val="lt1"/>
+          </a:fontRef>
+        </p:style>
+        <p:txBody>
+          <a:bodyPr rtlCol="0" anchor="ctr"/>
+          <a:lstStyle/>
+          <a:p>
+            <a:pPr algn="ctr"/>
+          </a:p>
+        </p:txBody>
+      </p:sp>
+      <p:sp>
+        <p:nvSpPr>
+          <p:cNvPr id="33" name="TextBox 32"/>
+          <p:cNvSpPr txBox="1"/>
+          <p:nvPr/>
+        </p:nvSpPr>
+        <p:spPr>
+          <a:xfrm>
+            <a:off x="137160" y="6629400"/>
+            <a:ext cx="10058400" cy="228600"/>
+          </a:xfrm>
+          <a:prstGeom prst="rect">
+            <a:avLst/>
+          </a:prstGeom>
+          <a:noFill/>
+        </p:spPr>
+        <p:txBody>
+          <a:bodyPr wrap="square">
+            <a:spAutoFit/>
+          </a:bodyPr>
+          <a:lstStyle/>
+          <a:p>
+            <a:pPr algn="l"/>
+            <a:r>
+              <a:rPr sz="850" b="0" i="0">
+                <a:solidFill>
+                  <a:srgbClr val="BBDEFB"/>
+                </a:solidFill>
+                <a:latin typeface="Calibri"/>
+              </a:rPr>
+              <a:t>Ricardo Calheiros  |  MBA USP/ESALQ  |  Racismo Estrutural e Mercado de Trabalho</a:t>
+            </a:r>
+          </a:p>
+        </p:txBody>
+      </p:sp>
+      <p:sp>
+        <p:nvSpPr>
+          <p:cNvPr id="34" name="TextBox 33"/>
+          <p:cNvSpPr txBox="1"/>
+          <p:nvPr/>
+        </p:nvSpPr>
+        <p:spPr>
+          <a:xfrm>
+            <a:off x="11521440" y="6629400"/>
+            <a:ext cx="640080" cy="228600"/>
+          </a:xfrm>
+          <a:prstGeom prst="rect">
+            <a:avLst/>
+          </a:prstGeom>
+          <a:noFill/>
+        </p:spPr>
+        <p:txBody>
+          <a:bodyPr wrap="square">
+            <a:spAutoFit/>
+          </a:bodyPr>
+          <a:lstStyle/>
+          <a:p>
+            <a:pPr algn="r"/>
+            <a:r>
+              <a:rPr sz="850" b="0" i="0">
+                <a:solidFill>
+                  <a:srgbClr val="FFFFFF"/>
+                </a:solidFill>
+                <a:latin typeface="Calibri"/>
+              </a:rPr>
+              <a:t>19/25</a:t>
+            </a:r>
+          </a:p>
+        </p:txBody>
+      </p:sp>
+    </p:spTree>
+  </p:cSld>
+  <p:clrMapOvr>
+    <a:masterClrMapping/>
+  </p:clrMapOvr>
+</p:sld>
+</file>
+
+<file path=ppt/slides/slide2.xml><?xml version="1.0" encoding="utf-8"?>
+<p:sld xmlns:a="http://schemas.openxmlformats.org/drawingml/2006/main" xmlns:p="http://schemas.openxmlformats.org/presentationml/2006/main" xmlns:r="http://schemas.openxmlformats.org/officeDocument/2006/relationships">
+  <p:cSld>
+    <p:spTree>
+      <p:nvGrpSpPr>
+        <p:cNvPr id="1" name=""/>
+        <p:cNvGrpSpPr/>
+        <p:nvPr/>
+      </p:nvGrpSpPr>
+      <p:grpSpPr/>
+      <p:sp>
+        <p:nvSpPr>
+          <p:cNvPr id="2" name="Rectangle 1"/>
+          <p:cNvSpPr/>
+          <p:nvPr/>
+        </p:nvSpPr>
+        <p:spPr>
+          <a:xfrm>
+            <a:off x="0" y="0"/>
+            <a:ext cx="12188952" cy="1005840"/>
+          </a:xfrm>
+          <a:prstGeom prst="rect">
+            <a:avLst/>
+          </a:prstGeom>
+          <a:solidFill>
+            <a:srgbClr val="1F3864"/>
+          </a:solidFill>
+          <a:ln/>
+        </p:spPr>
+        <p:style>
+          <a:lnRef idx="1">
+            <a:schemeClr val="accent1"/>
+          </a:lnRef>
+          <a:fillRef idx="3">
+            <a:schemeClr val="accent1"/>
+          </a:fillRef>
+          <a:effectRef idx="2">
+            <a:schemeClr val="accent1"/>
+          </a:effectRef>
+          <a:fontRef idx="minor">
+            <a:schemeClr val="lt1"/>
+          </a:fontRef>
+        </p:style>
+        <p:txBody>
+          <a:bodyPr rtlCol="0" anchor="ctr"/>
+          <a:lstStyle/>
+          <a:p>
+            <a:pPr algn="ctr"/>
+          </a:p>
+        </p:txBody>
+      </p:sp>
+      <p:sp>
+        <p:nvSpPr>
+          <p:cNvPr id="3" name="TextBox 2"/>
+          <p:cNvSpPr txBox="1"/>
+          <p:nvPr/>
+        </p:nvSpPr>
+        <p:spPr>
+          <a:xfrm>
+            <a:off x="274320" y="73152"/>
+            <a:ext cx="11612880" cy="502920"/>
+          </a:xfrm>
+          <a:prstGeom prst="rect">
+            <a:avLst/>
+          </a:prstGeom>
+          <a:noFill/>
+        </p:spPr>
+        <p:txBody>
+          <a:bodyPr wrap="square">
+            <a:spAutoFit/>
+          </a:bodyPr>
+          <a:lstStyle/>
+          <a:p>
+            <a:pPr algn="l"/>
+            <a:r>
               <a:rPr sz="2600" b="1" i="0">
                 <a:solidFill>
                   <a:srgbClr val="FFFFFF"/>
                 </a:solidFill>
                 <a:latin typeface="Calibri"/>
               </a:rPr>
-              <a:t>17. Os quatro métodos apontam para o mesmo lugar</a:t>
+              <a:t>Em três minutos</a:t>
+            </a:r>
+          </a:p>
+        </p:txBody>
+      </p:sp>
+      <p:sp>
+        <p:nvSpPr>
+          <p:cNvPr id="4" name="TextBox 3"/>
+          <p:cNvSpPr txBox="1"/>
+          <p:nvPr/>
+        </p:nvSpPr>
+        <p:spPr>
+          <a:xfrm>
+            <a:off x="274320" y="594360"/>
+            <a:ext cx="10972800" cy="347472"/>
+          </a:xfrm>
+          <a:prstGeom prst="rect">
+            <a:avLst/>
+          </a:prstGeom>
+          <a:noFill/>
+        </p:spPr>
+        <p:txBody>
+          <a:bodyPr wrap="square">
+            <a:spAutoFit/>
+          </a:bodyPr>
+          <a:lstStyle/>
+          <a:p>
+            <a:pPr algn="l"/>
+            <a:r>
+              <a:rPr sz="1400" b="0" i="0">
+                <a:solidFill>
+                  <a:srgbClr val="BBDEFB"/>
+                </a:solidFill>
+                <a:latin typeface="Calibri"/>
+              </a:rPr>
+              <a:t>O que foi medido, o que se achou e o que isso muda</a:t>
+            </a:r>
+          </a:p>
+        </p:txBody>
+      </p:sp>
+      <p:sp>
+        <p:nvSpPr>
+          <p:cNvPr id="5" name="Rectangle 4"/>
+          <p:cNvSpPr/>
+          <p:nvPr/>
+        </p:nvSpPr>
+        <p:spPr>
+          <a:xfrm>
+            <a:off x="365760" y="1234440"/>
+            <a:ext cx="11430000" cy="1005840"/>
+          </a:xfrm>
+          <a:prstGeom prst="rect">
+            <a:avLst/>
+          </a:prstGeom>
+          <a:solidFill>
+            <a:srgbClr val="F5F5F5"/>
+          </a:solidFill>
+          <a:ln/>
+        </p:spPr>
+        <p:style>
+          <a:lnRef idx="1">
+            <a:schemeClr val="accent1"/>
+          </a:lnRef>
+          <a:fillRef idx="3">
+            <a:schemeClr val="accent1"/>
+          </a:fillRef>
+          <a:effectRef idx="2">
+            <a:schemeClr val="accent1"/>
+          </a:effectRef>
+          <a:fontRef idx="minor">
+            <a:schemeClr val="lt1"/>
+          </a:fontRef>
+        </p:style>
+        <p:txBody>
+          <a:bodyPr rtlCol="0" anchor="ctr"/>
+          <a:lstStyle/>
+          <a:p>
+            <a:pPr algn="ctr"/>
+          </a:p>
+        </p:txBody>
+      </p:sp>
+      <p:sp>
+        <p:nvSpPr>
+          <p:cNvPr id="6" name="TextBox 5"/>
+          <p:cNvSpPr txBox="1"/>
+          <p:nvPr/>
+        </p:nvSpPr>
+        <p:spPr>
+          <a:xfrm>
+            <a:off x="594360" y="1344168"/>
+            <a:ext cx="2377440" cy="365760"/>
+          </a:xfrm>
+          <a:prstGeom prst="rect">
+            <a:avLst/>
+          </a:prstGeom>
+          <a:noFill/>
+        </p:spPr>
+        <p:txBody>
+          <a:bodyPr wrap="square">
+            <a:spAutoFit/>
+          </a:bodyPr>
+          <a:lstStyle/>
+          <a:p>
+            <a:pPr algn="l"/>
+            <a:r>
+              <a:rPr sz="1700" b="1" i="0">
+                <a:solidFill>
+                  <a:srgbClr val="1F3864"/>
+                </a:solidFill>
+                <a:latin typeface="Calibri"/>
+              </a:rPr>
+              <a:t>O contexto</a:t>
+            </a:r>
+          </a:p>
+        </p:txBody>
+      </p:sp>
+      <p:sp>
+        <p:nvSpPr>
+          <p:cNvPr id="7" name="TextBox 6"/>
+          <p:cNvSpPr txBox="1"/>
+          <p:nvPr/>
+        </p:nvSpPr>
+        <p:spPr>
+          <a:xfrm>
+            <a:off x="3063240" y="1344168"/>
+            <a:ext cx="8503920" cy="914400"/>
+          </a:xfrm>
+          <a:prstGeom prst="rect">
+            <a:avLst/>
+          </a:prstGeom>
+          <a:noFill/>
+        </p:spPr>
+        <p:txBody>
+          <a:bodyPr wrap="square">
+            <a:spAutoFit/>
+          </a:bodyPr>
+          <a:lstStyle/>
+          <a:p>
+            <a:pPr algn="l"/>
+            <a:r>
+              <a:rPr sz="1350" b="0" i="0">
+                <a:solidFill>
+                  <a:srgbClr val="212121"/>
+                </a:solidFill>
+                <a:latin typeface="Calibri"/>
+              </a:rPr>
+              <a:t>Entre 2016 e 2025, um trabalhador negro ganhou em média 10,5% a menos que um branco com a mesma escolaridade, idade e sexo.</a:t>
+            </a:r>
+          </a:p>
+        </p:txBody>
+      </p:sp>
+      <p:sp>
+        <p:nvSpPr>
+          <p:cNvPr id="8" name="Rectangle 7"/>
+          <p:cNvSpPr/>
+          <p:nvPr/>
+        </p:nvSpPr>
+        <p:spPr>
+          <a:xfrm>
+            <a:off x="365760" y="2404872"/>
+            <a:ext cx="11430000" cy="1005840"/>
+          </a:xfrm>
+          <a:prstGeom prst="rect">
+            <a:avLst/>
+          </a:prstGeom>
+          <a:solidFill>
+            <a:srgbClr val="F5F5F5"/>
+          </a:solidFill>
+          <a:ln/>
+        </p:spPr>
+        <p:style>
+          <a:lnRef idx="1">
+            <a:schemeClr val="accent1"/>
+          </a:lnRef>
+          <a:fillRef idx="3">
+            <a:schemeClr val="accent1"/>
+          </a:fillRef>
+          <a:effectRef idx="2">
+            <a:schemeClr val="accent1"/>
+          </a:effectRef>
+          <a:fontRef idx="minor">
+            <a:schemeClr val="lt1"/>
+          </a:fontRef>
+        </p:style>
+        <p:txBody>
+          <a:bodyPr rtlCol="0" anchor="ctr"/>
+          <a:lstStyle/>
+          <a:p>
+            <a:pPr algn="ctr"/>
+          </a:p>
+        </p:txBody>
+      </p:sp>
+      <p:sp>
+        <p:nvSpPr>
+          <p:cNvPr id="9" name="TextBox 8"/>
+          <p:cNvSpPr txBox="1"/>
+          <p:nvPr/>
+        </p:nvSpPr>
+        <p:spPr>
+          <a:xfrm>
+            <a:off x="594360" y="2514600"/>
+            <a:ext cx="2377440" cy="365760"/>
+          </a:xfrm>
+          <a:prstGeom prst="rect">
+            <a:avLst/>
+          </a:prstGeom>
+          <a:noFill/>
+        </p:spPr>
+        <p:txBody>
+          <a:bodyPr wrap="square">
+            <a:spAutoFit/>
+          </a:bodyPr>
+          <a:lstStyle/>
+          <a:p>
+            <a:pPr algn="l"/>
+            <a:r>
+              <a:rPr sz="1700" b="1" i="0">
+                <a:solidFill>
+                  <a:srgbClr val="1F3864"/>
+                </a:solidFill>
+                <a:latin typeface="Calibri"/>
+              </a:rPr>
+              <a:t>O desequilíbrio</a:t>
+            </a:r>
+          </a:p>
+        </p:txBody>
+      </p:sp>
+      <p:sp>
+        <p:nvSpPr>
+          <p:cNvPr id="10" name="TextBox 9"/>
+          <p:cNvSpPr txBox="1"/>
+          <p:nvPr/>
+        </p:nvSpPr>
+        <p:spPr>
+          <a:xfrm>
+            <a:off x="3063240" y="2514600"/>
+            <a:ext cx="8503920" cy="914400"/>
+          </a:xfrm>
+          <a:prstGeom prst="rect">
+            <a:avLst/>
+          </a:prstGeom>
+          <a:noFill/>
+        </p:spPr>
+        <p:txBody>
+          <a:bodyPr wrap="square">
+            <a:spAutoFit/>
+          </a:bodyPr>
+          <a:lstStyle/>
+          <a:p>
+            <a:pPr algn="l"/>
+            <a:r>
+              <a:rPr sz="1350" b="0" i="0">
+                <a:solidFill>
+                  <a:srgbClr val="212121"/>
+                </a:solidFill>
+                <a:latin typeface="Calibri"/>
+              </a:rPr>
+              <a:t>Comparando só pessoas do mesmo bairro, o gap cai 39,5% (a parte mediada pela segregação residencial) — e ainda sobram 6,1%, dos quais 5,6% persistem dentro da mesma ocupação.</a:t>
+            </a:r>
+          </a:p>
+        </p:txBody>
+      </p:sp>
+      <p:sp>
+        <p:nvSpPr>
+          <p:cNvPr id="11" name="Rectangle 10"/>
+          <p:cNvSpPr/>
+          <p:nvPr/>
+        </p:nvSpPr>
+        <p:spPr>
+          <a:xfrm>
+            <a:off x="365760" y="3575304"/>
+            <a:ext cx="11430000" cy="1005840"/>
+          </a:xfrm>
+          <a:prstGeom prst="rect">
+            <a:avLst/>
+          </a:prstGeom>
+          <a:solidFill>
+            <a:srgbClr val="F5F5F5"/>
+          </a:solidFill>
+          <a:ln/>
+        </p:spPr>
+        <p:style>
+          <a:lnRef idx="1">
+            <a:schemeClr val="accent1"/>
+          </a:lnRef>
+          <a:fillRef idx="3">
+            <a:schemeClr val="accent1"/>
+          </a:fillRef>
+          <a:effectRef idx="2">
+            <a:schemeClr val="accent1"/>
+          </a:effectRef>
+          <a:fontRef idx="minor">
+            <a:schemeClr val="lt1"/>
+          </a:fontRef>
+        </p:style>
+        <p:txBody>
+          <a:bodyPr rtlCol="0" anchor="ctr"/>
+          <a:lstStyle/>
+          <a:p>
+            <a:pPr algn="ctr"/>
+          </a:p>
+        </p:txBody>
+      </p:sp>
+      <p:sp>
+        <p:nvSpPr>
+          <p:cNvPr id="12" name="TextBox 11"/>
+          <p:cNvSpPr txBox="1"/>
+          <p:nvPr/>
+        </p:nvSpPr>
+        <p:spPr>
+          <a:xfrm>
+            <a:off x="594360" y="3685032"/>
+            <a:ext cx="2377440" cy="365760"/>
+          </a:xfrm>
+          <a:prstGeom prst="rect">
+            <a:avLst/>
+          </a:prstGeom>
+          <a:noFill/>
+        </p:spPr>
+        <p:txBody>
+          <a:bodyPr wrap="square">
+            <a:spAutoFit/>
+          </a:bodyPr>
+          <a:lstStyle/>
+          <a:p>
+            <a:pPr algn="l"/>
+            <a:r>
+              <a:rPr sz="1700" b="1" i="0">
+                <a:solidFill>
+                  <a:srgbClr val="1F3864"/>
+                </a:solidFill>
+                <a:latin typeface="Calibri"/>
+              </a:rPr>
+              <a:t>A evidência</a:t>
+            </a:r>
+          </a:p>
+        </p:txBody>
+      </p:sp>
+      <p:sp>
+        <p:nvSpPr>
+          <p:cNvPr id="13" name="TextBox 12"/>
+          <p:cNvSpPr txBox="1"/>
+          <p:nvPr/>
+        </p:nvSpPr>
+        <p:spPr>
+          <a:xfrm>
+            <a:off x="3063240" y="3685032"/>
+            <a:ext cx="8503920" cy="914400"/>
+          </a:xfrm>
+          <a:prstGeom prst="rect">
+            <a:avLst/>
+          </a:prstGeom>
+          <a:noFill/>
+        </p:spPr>
+        <p:txBody>
+          <a:bodyPr wrap="square">
+            <a:spAutoFit/>
+          </a:bodyPr>
+          <a:lstStyle/>
+          <a:p>
+            <a:pPr algn="l"/>
+            <a:r>
+              <a:rPr sz="1350" b="0" i="0">
+                <a:solidFill>
+                  <a:srgbClr val="212121"/>
+                </a:solidFill>
+                <a:latin typeface="Calibri"/>
+              </a:rPr>
+              <a:t>Quatro métodos independentes sobre a população da PNAD Contínua (41.454 bairros): o bairro medeia 39,5% do gap; 17,9% do gap são retornos diferenciais; a penalidade cresce no topo; e a chance de chegar a um cargo qualificado é 19% menor.</a:t>
+            </a:r>
+          </a:p>
+        </p:txBody>
+      </p:sp>
+      <p:sp>
+        <p:nvSpPr>
+          <p:cNvPr id="14" name="Rectangle 13"/>
+          <p:cNvSpPr/>
+          <p:nvPr/>
+        </p:nvSpPr>
+        <p:spPr>
+          <a:xfrm>
+            <a:off x="365760" y="4745736"/>
+            <a:ext cx="11430000" cy="1005840"/>
+          </a:xfrm>
+          <a:prstGeom prst="rect">
+            <a:avLst/>
+          </a:prstGeom>
+          <a:solidFill>
+            <a:srgbClr val="F5F5F5"/>
+          </a:solidFill>
+          <a:ln/>
+        </p:spPr>
+        <p:style>
+          <a:lnRef idx="1">
+            <a:schemeClr val="accent1"/>
+          </a:lnRef>
+          <a:fillRef idx="3">
+            <a:schemeClr val="accent1"/>
+          </a:fillRef>
+          <a:effectRef idx="2">
+            <a:schemeClr val="accent1"/>
+          </a:effectRef>
+          <a:fontRef idx="minor">
+            <a:schemeClr val="lt1"/>
+          </a:fontRef>
+        </p:style>
+        <p:txBody>
+          <a:bodyPr rtlCol="0" anchor="ctr"/>
+          <a:lstStyle/>
+          <a:p>
+            <a:pPr algn="ctr"/>
+          </a:p>
+        </p:txBody>
+      </p:sp>
+      <p:sp>
+        <p:nvSpPr>
+          <p:cNvPr id="15" name="TextBox 14"/>
+          <p:cNvSpPr txBox="1"/>
+          <p:nvPr/>
+        </p:nvSpPr>
+        <p:spPr>
+          <a:xfrm>
+            <a:off x="594360" y="4855464"/>
+            <a:ext cx="2377440" cy="365760"/>
+          </a:xfrm>
+          <a:prstGeom prst="rect">
+            <a:avLst/>
+          </a:prstGeom>
+          <a:noFill/>
+        </p:spPr>
+        <p:txBody>
+          <a:bodyPr wrap="square">
+            <a:spAutoFit/>
+          </a:bodyPr>
+          <a:lstStyle/>
+          <a:p>
+            <a:pPr algn="l"/>
+            <a:r>
+              <a:rPr sz="1700" b="1" i="0">
+                <a:solidFill>
+                  <a:srgbClr val="1F3864"/>
+                </a:solidFill>
+                <a:latin typeface="Calibri"/>
+              </a:rPr>
+              <a:t>O que muda</a:t>
+            </a:r>
+          </a:p>
+        </p:txBody>
+      </p:sp>
+      <p:sp>
+        <p:nvSpPr>
+          <p:cNvPr id="16" name="TextBox 15"/>
+          <p:cNvSpPr txBox="1"/>
+          <p:nvPr/>
+        </p:nvSpPr>
+        <p:spPr>
+          <a:xfrm>
+            <a:off x="3063240" y="4855464"/>
+            <a:ext cx="8503920" cy="914400"/>
+          </a:xfrm>
+          <a:prstGeom prst="rect">
+            <a:avLst/>
+          </a:prstGeom>
+          <a:noFill/>
+        </p:spPr>
+        <p:txBody>
+          <a:bodyPr wrap="square">
+            <a:spAutoFit/>
+          </a:bodyPr>
+          <a:lstStyle/>
+          <a:p>
+            <a:pPr algn="l"/>
+            <a:r>
+              <a:rPr sz="1350" b="0" i="0">
+                <a:solidFill>
+                  <a:srgbClr val="212121"/>
+                </a:solidFill>
+                <a:latin typeface="Calibri"/>
+              </a:rPr>
+              <a:t>Entre os mais escolarizados, a penalidade salarial é pequena, mas a desvantagem de acesso persiste — política de educação isolada não alcança a porta.</a:t>
+            </a:r>
+          </a:p>
+        </p:txBody>
+      </p:sp>
+      <p:sp>
+        <p:nvSpPr>
+          <p:cNvPr id="17" name="Rectangle 16"/>
+          <p:cNvSpPr/>
+          <p:nvPr/>
+        </p:nvSpPr>
+        <p:spPr>
+          <a:xfrm>
+            <a:off x="365760" y="5833872"/>
+            <a:ext cx="11430000" cy="685800"/>
+          </a:xfrm>
+          <a:prstGeom prst="rect">
+            <a:avLst/>
+          </a:prstGeom>
+          <a:solidFill>
+            <a:srgbClr val="B71C1C"/>
+          </a:solidFill>
+          <a:ln/>
+        </p:spPr>
+        <p:style>
+          <a:lnRef idx="1">
+            <a:schemeClr val="accent1"/>
+          </a:lnRef>
+          <a:fillRef idx="3">
+            <a:schemeClr val="accent1"/>
+          </a:fillRef>
+          <a:effectRef idx="2">
+            <a:schemeClr val="accent1"/>
+          </a:effectRef>
+          <a:fontRef idx="minor">
+            <a:schemeClr val="lt1"/>
+          </a:fontRef>
+        </p:style>
+        <p:txBody>
+          <a:bodyPr rtlCol="0" anchor="ctr"/>
+          <a:lstStyle/>
+          <a:p>
+            <a:pPr algn="ctr"/>
+          </a:p>
+        </p:txBody>
+      </p:sp>
+      <p:sp>
+        <p:nvSpPr>
+          <p:cNvPr id="18" name="TextBox 17"/>
+          <p:cNvSpPr txBox="1"/>
+          <p:nvPr/>
+        </p:nvSpPr>
+        <p:spPr>
+          <a:xfrm>
+            <a:off x="548640" y="5870448"/>
+            <a:ext cx="11064240" cy="621792"/>
+          </a:xfrm>
+          <a:prstGeom prst="rect">
+            <a:avLst/>
+          </a:prstGeom>
+          <a:noFill/>
+        </p:spPr>
+        <p:txBody>
+          <a:bodyPr wrap="square">
+            <a:spAutoFit/>
+          </a:bodyPr>
+          <a:lstStyle/>
+          <a:p>
+            <a:pPr algn="ctr"/>
+            <a:r>
+              <a:rPr sz="1300" b="1" i="0">
+                <a:solidFill>
+                  <a:srgbClr val="FFFFFF"/>
+                </a:solidFill>
+                <a:latin typeface="Calibri"/>
+              </a:rPr>
+              <a:t>Com a mesma escolaridade, idade, sexo e bairro, um trabalhador negro ganha 6,1% a menos e tem chances 19% menores de chegar a um cargo qualificado. O diploma quase iguala o salário, mas não abre a porta.</a:t>
+            </a:r>
+          </a:p>
+        </p:txBody>
+      </p:sp>
+      <p:sp>
+        <p:nvSpPr>
+          <p:cNvPr id="19" name="Rectangle 18"/>
+          <p:cNvSpPr/>
+          <p:nvPr/>
+        </p:nvSpPr>
+        <p:spPr>
+          <a:xfrm>
+            <a:off x="0" y="6601968"/>
+            <a:ext cx="12188952" cy="256032"/>
+          </a:xfrm>
+          <a:prstGeom prst="rect">
+            <a:avLst/>
+          </a:prstGeom>
+          <a:solidFill>
+            <a:srgbClr val="1F3864"/>
+          </a:solidFill>
+          <a:ln/>
+        </p:spPr>
+        <p:style>
+          <a:lnRef idx="1">
+            <a:schemeClr val="accent1"/>
+          </a:lnRef>
+          <a:fillRef idx="3">
+            <a:schemeClr val="accent1"/>
+          </a:fillRef>
+          <a:effectRef idx="2">
+            <a:schemeClr val="accent1"/>
+          </a:effectRef>
+          <a:fontRef idx="minor">
+            <a:schemeClr val="lt1"/>
+          </a:fontRef>
+        </p:style>
+        <p:txBody>
+          <a:bodyPr rtlCol="0" anchor="ctr"/>
+          <a:lstStyle/>
+          <a:p>
+            <a:pPr algn="ctr"/>
+          </a:p>
+        </p:txBody>
+      </p:sp>
+      <p:sp>
+        <p:nvSpPr>
+          <p:cNvPr id="20" name="TextBox 19"/>
+          <p:cNvSpPr txBox="1"/>
+          <p:nvPr/>
+        </p:nvSpPr>
+        <p:spPr>
+          <a:xfrm>
+            <a:off x="137160" y="6629400"/>
+            <a:ext cx="10058400" cy="228600"/>
+          </a:xfrm>
+          <a:prstGeom prst="rect">
+            <a:avLst/>
+          </a:prstGeom>
+          <a:noFill/>
+        </p:spPr>
+        <p:txBody>
+          <a:bodyPr wrap="square">
+            <a:spAutoFit/>
+          </a:bodyPr>
+          <a:lstStyle/>
+          <a:p>
+            <a:pPr algn="l"/>
+            <a:r>
+              <a:rPr sz="850" b="0" i="0">
+                <a:solidFill>
+                  <a:srgbClr val="BBDEFB"/>
+                </a:solidFill>
+                <a:latin typeface="Calibri"/>
+              </a:rPr>
+              <a:t>Ricardo Calheiros  |  MBA USP/ESALQ  |  Racismo Estrutural e Mercado de Trabalho</a:t>
+            </a:r>
+          </a:p>
+        </p:txBody>
+      </p:sp>
+      <p:sp>
+        <p:nvSpPr>
+          <p:cNvPr id="21" name="TextBox 20"/>
+          <p:cNvSpPr txBox="1"/>
+          <p:nvPr/>
+        </p:nvSpPr>
+        <p:spPr>
+          <a:xfrm>
+            <a:off x="11521440" y="6629400"/>
+            <a:ext cx="640080" cy="228600"/>
+          </a:xfrm>
+          <a:prstGeom prst="rect">
+            <a:avLst/>
+          </a:prstGeom>
+          <a:noFill/>
+        </p:spPr>
+        <p:txBody>
+          <a:bodyPr wrap="square">
+            <a:spAutoFit/>
+          </a:bodyPr>
+          <a:lstStyle/>
+          <a:p>
+            <a:pPr algn="r"/>
+            <a:r>
+              <a:rPr sz="850" b="0" i="0">
+                <a:solidFill>
+                  <a:srgbClr val="FFFFFF"/>
+                </a:solidFill>
+                <a:latin typeface="Calibri"/>
+              </a:rPr>
+              <a:t>2/25</a:t>
+            </a:r>
+          </a:p>
+        </p:txBody>
+      </p:sp>
+    </p:spTree>
+  </p:cSld>
+  <p:clrMapOvr>
+    <a:masterClrMapping/>
+  </p:clrMapOvr>
+</p:sld>
+</file>
+
+<file path=ppt/slides/slide20.xml><?xml version="1.0" encoding="utf-8"?>
+<p:sld xmlns:a="http://schemas.openxmlformats.org/drawingml/2006/main" xmlns:p="http://schemas.openxmlformats.org/presentationml/2006/main" xmlns:r="http://schemas.openxmlformats.org/officeDocument/2006/relationships">
+  <p:cSld>
+    <p:spTree>
+      <p:nvGrpSpPr>
+        <p:cNvPr id="1" name=""/>
+        <p:cNvGrpSpPr/>
+        <p:nvPr/>
+      </p:nvGrpSpPr>
+      <p:grpSpPr/>
+      <p:sp>
+        <p:nvSpPr>
+          <p:cNvPr id="2" name="Rectangle 1"/>
+          <p:cNvSpPr/>
+          <p:nvPr/>
+        </p:nvSpPr>
+        <p:spPr>
+          <a:xfrm>
+            <a:off x="0" y="0"/>
+            <a:ext cx="12188952" cy="1005840"/>
+          </a:xfrm>
+          <a:prstGeom prst="rect">
+            <a:avLst/>
+          </a:prstGeom>
+          <a:solidFill>
+            <a:srgbClr val="1F3864"/>
+          </a:solidFill>
+          <a:ln/>
+        </p:spPr>
+        <p:style>
+          <a:lnRef idx="1">
+            <a:schemeClr val="accent1"/>
+          </a:lnRef>
+          <a:fillRef idx="3">
+            <a:schemeClr val="accent1"/>
+          </a:fillRef>
+          <a:effectRef idx="2">
+            <a:schemeClr val="accent1"/>
+          </a:effectRef>
+          <a:fontRef idx="minor">
+            <a:schemeClr val="lt1"/>
+          </a:fontRef>
+        </p:style>
+        <p:txBody>
+          <a:bodyPr rtlCol="0" anchor="ctr"/>
+          <a:lstStyle/>
+          <a:p>
+            <a:pPr algn="ctr"/>
+          </a:p>
+        </p:txBody>
+      </p:sp>
+      <p:sp>
+        <p:nvSpPr>
+          <p:cNvPr id="3" name="TextBox 2"/>
+          <p:cNvSpPr txBox="1"/>
+          <p:nvPr/>
+        </p:nvSpPr>
+        <p:spPr>
+          <a:xfrm>
+            <a:off x="274320" y="73152"/>
+            <a:ext cx="11612880" cy="502920"/>
+          </a:xfrm>
+          <a:prstGeom prst="rect">
+            <a:avLst/>
+          </a:prstGeom>
+          <a:noFill/>
+        </p:spPr>
+        <p:txBody>
+          <a:bodyPr wrap="square">
+            <a:spAutoFit/>
+          </a:bodyPr>
+          <a:lstStyle/>
+          <a:p>
+            <a:pPr algn="l"/>
+            <a:r>
+              <a:rPr sz="2600" b="1" i="0">
+                <a:solidFill>
+                  <a:srgbClr val="FFFFFF"/>
+                </a:solidFill>
+                <a:latin typeface="Calibri"/>
+              </a:rPr>
+              <a:t>18. Os quatro métodos apontam para o mesmo lugar</a:t>
             </a:r>
           </a:p>
         </p:txBody>
@@ -11787,1761 +13632,7 @@
                 </a:solidFill>
                 <a:latin typeface="Calibri"/>
               </a:rPr>
-              <a:t>19/24</a:t>
-            </a:r>
-          </a:p>
-        </p:txBody>
-      </p:sp>
-    </p:spTree>
-  </p:cSld>
-  <p:clrMapOvr>
-    <a:masterClrMapping/>
-  </p:clrMapOvr>
-</p:sld>
-</file>
-
-<file path=ppt/slides/slide2.xml><?xml version="1.0" encoding="utf-8"?>
-<p:sld xmlns:a="http://schemas.openxmlformats.org/drawingml/2006/main" xmlns:p="http://schemas.openxmlformats.org/presentationml/2006/main" xmlns:r="http://schemas.openxmlformats.org/officeDocument/2006/relationships">
-  <p:cSld>
-    <p:spTree>
-      <p:nvGrpSpPr>
-        <p:cNvPr id="1" name=""/>
-        <p:cNvGrpSpPr/>
-        <p:nvPr/>
-      </p:nvGrpSpPr>
-      <p:grpSpPr/>
-      <p:sp>
-        <p:nvSpPr>
-          <p:cNvPr id="2" name="Rectangle 1"/>
-          <p:cNvSpPr/>
-          <p:nvPr/>
-        </p:nvSpPr>
-        <p:spPr>
-          <a:xfrm>
-            <a:off x="0" y="0"/>
-            <a:ext cx="12188952" cy="1005840"/>
-          </a:xfrm>
-          <a:prstGeom prst="rect">
-            <a:avLst/>
-          </a:prstGeom>
-          <a:solidFill>
-            <a:srgbClr val="1F3864"/>
-          </a:solidFill>
-          <a:ln/>
-        </p:spPr>
-        <p:style>
-          <a:lnRef idx="1">
-            <a:schemeClr val="accent1"/>
-          </a:lnRef>
-          <a:fillRef idx="3">
-            <a:schemeClr val="accent1"/>
-          </a:fillRef>
-          <a:effectRef idx="2">
-            <a:schemeClr val="accent1"/>
-          </a:effectRef>
-          <a:fontRef idx="minor">
-            <a:schemeClr val="lt1"/>
-          </a:fontRef>
-        </p:style>
-        <p:txBody>
-          <a:bodyPr rtlCol="0" anchor="ctr"/>
-          <a:lstStyle/>
-          <a:p>
-            <a:pPr algn="ctr"/>
-          </a:p>
-        </p:txBody>
-      </p:sp>
-      <p:sp>
-        <p:nvSpPr>
-          <p:cNvPr id="3" name="TextBox 2"/>
-          <p:cNvSpPr txBox="1"/>
-          <p:nvPr/>
-        </p:nvSpPr>
-        <p:spPr>
-          <a:xfrm>
-            <a:off x="274320" y="73152"/>
-            <a:ext cx="11612880" cy="502920"/>
-          </a:xfrm>
-          <a:prstGeom prst="rect">
-            <a:avLst/>
-          </a:prstGeom>
-          <a:noFill/>
-        </p:spPr>
-        <p:txBody>
-          <a:bodyPr wrap="square">
-            <a:spAutoFit/>
-          </a:bodyPr>
-          <a:lstStyle/>
-          <a:p>
-            <a:pPr algn="l"/>
-            <a:r>
-              <a:rPr sz="2600" b="1" i="0">
-                <a:solidFill>
-                  <a:srgbClr val="FFFFFF"/>
-                </a:solidFill>
-                <a:latin typeface="Calibri"/>
-              </a:rPr>
-              <a:t>Em três minutos</a:t>
-            </a:r>
-          </a:p>
-        </p:txBody>
-      </p:sp>
-      <p:sp>
-        <p:nvSpPr>
-          <p:cNvPr id="4" name="TextBox 3"/>
-          <p:cNvSpPr txBox="1"/>
-          <p:nvPr/>
-        </p:nvSpPr>
-        <p:spPr>
-          <a:xfrm>
-            <a:off x="274320" y="594360"/>
-            <a:ext cx="10972800" cy="347472"/>
-          </a:xfrm>
-          <a:prstGeom prst="rect">
-            <a:avLst/>
-          </a:prstGeom>
-          <a:noFill/>
-        </p:spPr>
-        <p:txBody>
-          <a:bodyPr wrap="square">
-            <a:spAutoFit/>
-          </a:bodyPr>
-          <a:lstStyle/>
-          <a:p>
-            <a:pPr algn="l"/>
-            <a:r>
-              <a:rPr sz="1400" b="0" i="0">
-                <a:solidFill>
-                  <a:srgbClr val="BBDEFB"/>
-                </a:solidFill>
-                <a:latin typeface="Calibri"/>
-              </a:rPr>
-              <a:t>O que foi medido, o que se achou e o que isso muda</a:t>
-            </a:r>
-          </a:p>
-        </p:txBody>
-      </p:sp>
-      <p:sp>
-        <p:nvSpPr>
-          <p:cNvPr id="5" name="Rectangle 4"/>
-          <p:cNvSpPr/>
-          <p:nvPr/>
-        </p:nvSpPr>
-        <p:spPr>
-          <a:xfrm>
-            <a:off x="365760" y="1234440"/>
-            <a:ext cx="11430000" cy="1005840"/>
-          </a:xfrm>
-          <a:prstGeom prst="rect">
-            <a:avLst/>
-          </a:prstGeom>
-          <a:solidFill>
-            <a:srgbClr val="F5F5F5"/>
-          </a:solidFill>
-          <a:ln/>
-        </p:spPr>
-        <p:style>
-          <a:lnRef idx="1">
-            <a:schemeClr val="accent1"/>
-          </a:lnRef>
-          <a:fillRef idx="3">
-            <a:schemeClr val="accent1"/>
-          </a:fillRef>
-          <a:effectRef idx="2">
-            <a:schemeClr val="accent1"/>
-          </a:effectRef>
-          <a:fontRef idx="minor">
-            <a:schemeClr val="lt1"/>
-          </a:fontRef>
-        </p:style>
-        <p:txBody>
-          <a:bodyPr rtlCol="0" anchor="ctr"/>
-          <a:lstStyle/>
-          <a:p>
-            <a:pPr algn="ctr"/>
-          </a:p>
-        </p:txBody>
-      </p:sp>
-      <p:sp>
-        <p:nvSpPr>
-          <p:cNvPr id="6" name="TextBox 5"/>
-          <p:cNvSpPr txBox="1"/>
-          <p:nvPr/>
-        </p:nvSpPr>
-        <p:spPr>
-          <a:xfrm>
-            <a:off x="594360" y="1344168"/>
-            <a:ext cx="2377440" cy="365760"/>
-          </a:xfrm>
-          <a:prstGeom prst="rect">
-            <a:avLst/>
-          </a:prstGeom>
-          <a:noFill/>
-        </p:spPr>
-        <p:txBody>
-          <a:bodyPr wrap="square">
-            <a:spAutoFit/>
-          </a:bodyPr>
-          <a:lstStyle/>
-          <a:p>
-            <a:pPr algn="l"/>
-            <a:r>
-              <a:rPr sz="1700" b="1" i="0">
-                <a:solidFill>
-                  <a:srgbClr val="1F3864"/>
-                </a:solidFill>
-                <a:latin typeface="Calibri"/>
-              </a:rPr>
-              <a:t>O contexto</a:t>
-            </a:r>
-          </a:p>
-        </p:txBody>
-      </p:sp>
-      <p:sp>
-        <p:nvSpPr>
-          <p:cNvPr id="7" name="TextBox 6"/>
-          <p:cNvSpPr txBox="1"/>
-          <p:nvPr/>
-        </p:nvSpPr>
-        <p:spPr>
-          <a:xfrm>
-            <a:off x="3063240" y="1344168"/>
-            <a:ext cx="8503920" cy="914400"/>
-          </a:xfrm>
-          <a:prstGeom prst="rect">
-            <a:avLst/>
-          </a:prstGeom>
-          <a:noFill/>
-        </p:spPr>
-        <p:txBody>
-          <a:bodyPr wrap="square">
-            <a:spAutoFit/>
-          </a:bodyPr>
-          <a:lstStyle/>
-          <a:p>
-            <a:pPr algn="l"/>
-            <a:r>
-              <a:rPr sz="1350" b="0" i="0">
-                <a:solidFill>
-                  <a:srgbClr val="212121"/>
-                </a:solidFill>
-                <a:latin typeface="Calibri"/>
-              </a:rPr>
-              <a:t>Entre 2016 e 2025, um trabalhador negro ganhou em média 10,5% a menos que um branco com a mesma escolaridade, idade e sexo.</a:t>
-            </a:r>
-          </a:p>
-        </p:txBody>
-      </p:sp>
-      <p:sp>
-        <p:nvSpPr>
-          <p:cNvPr id="8" name="Rectangle 7"/>
-          <p:cNvSpPr/>
-          <p:nvPr/>
-        </p:nvSpPr>
-        <p:spPr>
-          <a:xfrm>
-            <a:off x="365760" y="2404872"/>
-            <a:ext cx="11430000" cy="1005840"/>
-          </a:xfrm>
-          <a:prstGeom prst="rect">
-            <a:avLst/>
-          </a:prstGeom>
-          <a:solidFill>
-            <a:srgbClr val="F5F5F5"/>
-          </a:solidFill>
-          <a:ln/>
-        </p:spPr>
-        <p:style>
-          <a:lnRef idx="1">
-            <a:schemeClr val="accent1"/>
-          </a:lnRef>
-          <a:fillRef idx="3">
-            <a:schemeClr val="accent1"/>
-          </a:fillRef>
-          <a:effectRef idx="2">
-            <a:schemeClr val="accent1"/>
-          </a:effectRef>
-          <a:fontRef idx="minor">
-            <a:schemeClr val="lt1"/>
-          </a:fontRef>
-        </p:style>
-        <p:txBody>
-          <a:bodyPr rtlCol="0" anchor="ctr"/>
-          <a:lstStyle/>
-          <a:p>
-            <a:pPr algn="ctr"/>
-          </a:p>
-        </p:txBody>
-      </p:sp>
-      <p:sp>
-        <p:nvSpPr>
-          <p:cNvPr id="9" name="TextBox 8"/>
-          <p:cNvSpPr txBox="1"/>
-          <p:nvPr/>
-        </p:nvSpPr>
-        <p:spPr>
-          <a:xfrm>
-            <a:off x="594360" y="2514600"/>
-            <a:ext cx="2377440" cy="365760"/>
-          </a:xfrm>
-          <a:prstGeom prst="rect">
-            <a:avLst/>
-          </a:prstGeom>
-          <a:noFill/>
-        </p:spPr>
-        <p:txBody>
-          <a:bodyPr wrap="square">
-            <a:spAutoFit/>
-          </a:bodyPr>
-          <a:lstStyle/>
-          <a:p>
-            <a:pPr algn="l"/>
-            <a:r>
-              <a:rPr sz="1700" b="1" i="0">
-                <a:solidFill>
-                  <a:srgbClr val="1F3864"/>
-                </a:solidFill>
-                <a:latin typeface="Calibri"/>
-              </a:rPr>
-              <a:t>O desequilíbrio</a:t>
-            </a:r>
-          </a:p>
-        </p:txBody>
-      </p:sp>
-      <p:sp>
-        <p:nvSpPr>
-          <p:cNvPr id="10" name="TextBox 9"/>
-          <p:cNvSpPr txBox="1"/>
-          <p:nvPr/>
-        </p:nvSpPr>
-        <p:spPr>
-          <a:xfrm>
-            <a:off x="3063240" y="2514600"/>
-            <a:ext cx="8503920" cy="914400"/>
-          </a:xfrm>
-          <a:prstGeom prst="rect">
-            <a:avLst/>
-          </a:prstGeom>
-          <a:noFill/>
-        </p:spPr>
-        <p:txBody>
-          <a:bodyPr wrap="square">
-            <a:spAutoFit/>
-          </a:bodyPr>
-          <a:lstStyle/>
-          <a:p>
-            <a:pPr algn="l"/>
-            <a:r>
-              <a:rPr sz="1350" b="0" i="0">
-                <a:solidFill>
-                  <a:srgbClr val="212121"/>
-                </a:solidFill>
-                <a:latin typeface="Calibri"/>
-              </a:rPr>
-              <a:t>Comparando só pessoas do mesmo bairro, o gap cai 39,5% (a parte mediada pela segregação residencial) — e ainda sobram 6,1%, dos quais 5,6% persistem dentro da mesma ocupação.</a:t>
-            </a:r>
-          </a:p>
-        </p:txBody>
-      </p:sp>
-      <p:sp>
-        <p:nvSpPr>
-          <p:cNvPr id="11" name="Rectangle 10"/>
-          <p:cNvSpPr/>
-          <p:nvPr/>
-        </p:nvSpPr>
-        <p:spPr>
-          <a:xfrm>
-            <a:off x="365760" y="3575304"/>
-            <a:ext cx="11430000" cy="1005840"/>
-          </a:xfrm>
-          <a:prstGeom prst="rect">
-            <a:avLst/>
-          </a:prstGeom>
-          <a:solidFill>
-            <a:srgbClr val="F5F5F5"/>
-          </a:solidFill>
-          <a:ln/>
-        </p:spPr>
-        <p:style>
-          <a:lnRef idx="1">
-            <a:schemeClr val="accent1"/>
-          </a:lnRef>
-          <a:fillRef idx="3">
-            <a:schemeClr val="accent1"/>
-          </a:fillRef>
-          <a:effectRef idx="2">
-            <a:schemeClr val="accent1"/>
-          </a:effectRef>
-          <a:fontRef idx="minor">
-            <a:schemeClr val="lt1"/>
-          </a:fontRef>
-        </p:style>
-        <p:txBody>
-          <a:bodyPr rtlCol="0" anchor="ctr"/>
-          <a:lstStyle/>
-          <a:p>
-            <a:pPr algn="ctr"/>
-          </a:p>
-        </p:txBody>
-      </p:sp>
-      <p:sp>
-        <p:nvSpPr>
-          <p:cNvPr id="12" name="TextBox 11"/>
-          <p:cNvSpPr txBox="1"/>
-          <p:nvPr/>
-        </p:nvSpPr>
-        <p:spPr>
-          <a:xfrm>
-            <a:off x="594360" y="3685032"/>
-            <a:ext cx="2377440" cy="365760"/>
-          </a:xfrm>
-          <a:prstGeom prst="rect">
-            <a:avLst/>
-          </a:prstGeom>
-          <a:noFill/>
-        </p:spPr>
-        <p:txBody>
-          <a:bodyPr wrap="square">
-            <a:spAutoFit/>
-          </a:bodyPr>
-          <a:lstStyle/>
-          <a:p>
-            <a:pPr algn="l"/>
-            <a:r>
-              <a:rPr sz="1700" b="1" i="0">
-                <a:solidFill>
-                  <a:srgbClr val="1F3864"/>
-                </a:solidFill>
-                <a:latin typeface="Calibri"/>
-              </a:rPr>
-              <a:t>A evidência</a:t>
-            </a:r>
-          </a:p>
-        </p:txBody>
-      </p:sp>
-      <p:sp>
-        <p:nvSpPr>
-          <p:cNvPr id="13" name="TextBox 12"/>
-          <p:cNvSpPr txBox="1"/>
-          <p:nvPr/>
-        </p:nvSpPr>
-        <p:spPr>
-          <a:xfrm>
-            <a:off x="3063240" y="3685032"/>
-            <a:ext cx="8503920" cy="914400"/>
-          </a:xfrm>
-          <a:prstGeom prst="rect">
-            <a:avLst/>
-          </a:prstGeom>
-          <a:noFill/>
-        </p:spPr>
-        <p:txBody>
-          <a:bodyPr wrap="square">
-            <a:spAutoFit/>
-          </a:bodyPr>
-          <a:lstStyle/>
-          <a:p>
-            <a:pPr algn="l"/>
-            <a:r>
-              <a:rPr sz="1350" b="0" i="0">
-                <a:solidFill>
-                  <a:srgbClr val="212121"/>
-                </a:solidFill>
-                <a:latin typeface="Calibri"/>
-              </a:rPr>
-              <a:t>Quatro métodos independentes sobre a população da PNAD Contínua (41.454 bairros): o bairro medeia 39,5% do gap; 17,9% do gap são retornos diferenciais; a penalidade cresce no topo; e a chance de chegar a um cargo qualificado é 19% menor.</a:t>
-            </a:r>
-          </a:p>
-        </p:txBody>
-      </p:sp>
-      <p:sp>
-        <p:nvSpPr>
-          <p:cNvPr id="14" name="Rectangle 13"/>
-          <p:cNvSpPr/>
-          <p:nvPr/>
-        </p:nvSpPr>
-        <p:spPr>
-          <a:xfrm>
-            <a:off x="365760" y="4745736"/>
-            <a:ext cx="11430000" cy="1005840"/>
-          </a:xfrm>
-          <a:prstGeom prst="rect">
-            <a:avLst/>
-          </a:prstGeom>
-          <a:solidFill>
-            <a:srgbClr val="F5F5F5"/>
-          </a:solidFill>
-          <a:ln/>
-        </p:spPr>
-        <p:style>
-          <a:lnRef idx="1">
-            <a:schemeClr val="accent1"/>
-          </a:lnRef>
-          <a:fillRef idx="3">
-            <a:schemeClr val="accent1"/>
-          </a:fillRef>
-          <a:effectRef idx="2">
-            <a:schemeClr val="accent1"/>
-          </a:effectRef>
-          <a:fontRef idx="minor">
-            <a:schemeClr val="lt1"/>
-          </a:fontRef>
-        </p:style>
-        <p:txBody>
-          <a:bodyPr rtlCol="0" anchor="ctr"/>
-          <a:lstStyle/>
-          <a:p>
-            <a:pPr algn="ctr"/>
-          </a:p>
-        </p:txBody>
-      </p:sp>
-      <p:sp>
-        <p:nvSpPr>
-          <p:cNvPr id="15" name="TextBox 14"/>
-          <p:cNvSpPr txBox="1"/>
-          <p:nvPr/>
-        </p:nvSpPr>
-        <p:spPr>
-          <a:xfrm>
-            <a:off x="594360" y="4855464"/>
-            <a:ext cx="2377440" cy="365760"/>
-          </a:xfrm>
-          <a:prstGeom prst="rect">
-            <a:avLst/>
-          </a:prstGeom>
-          <a:noFill/>
-        </p:spPr>
-        <p:txBody>
-          <a:bodyPr wrap="square">
-            <a:spAutoFit/>
-          </a:bodyPr>
-          <a:lstStyle/>
-          <a:p>
-            <a:pPr algn="l"/>
-            <a:r>
-              <a:rPr sz="1700" b="1" i="0">
-                <a:solidFill>
-                  <a:srgbClr val="1F3864"/>
-                </a:solidFill>
-                <a:latin typeface="Calibri"/>
-              </a:rPr>
-              <a:t>O que muda</a:t>
-            </a:r>
-          </a:p>
-        </p:txBody>
-      </p:sp>
-      <p:sp>
-        <p:nvSpPr>
-          <p:cNvPr id="16" name="TextBox 15"/>
-          <p:cNvSpPr txBox="1"/>
-          <p:nvPr/>
-        </p:nvSpPr>
-        <p:spPr>
-          <a:xfrm>
-            <a:off x="3063240" y="4855464"/>
-            <a:ext cx="8503920" cy="914400"/>
-          </a:xfrm>
-          <a:prstGeom prst="rect">
-            <a:avLst/>
-          </a:prstGeom>
-          <a:noFill/>
-        </p:spPr>
-        <p:txBody>
-          <a:bodyPr wrap="square">
-            <a:spAutoFit/>
-          </a:bodyPr>
-          <a:lstStyle/>
-          <a:p>
-            <a:pPr algn="l"/>
-            <a:r>
-              <a:rPr sz="1350" b="0" i="0">
-                <a:solidFill>
-                  <a:srgbClr val="212121"/>
-                </a:solidFill>
-                <a:latin typeface="Calibri"/>
-              </a:rPr>
-              <a:t>Entre os mais escolarizados, a penalidade salarial é pequena, mas a desvantagem de acesso persiste — política de educação isolada não alcança a porta.</a:t>
-            </a:r>
-          </a:p>
-        </p:txBody>
-      </p:sp>
-      <p:sp>
-        <p:nvSpPr>
-          <p:cNvPr id="17" name="Rectangle 16"/>
-          <p:cNvSpPr/>
-          <p:nvPr/>
-        </p:nvSpPr>
-        <p:spPr>
-          <a:xfrm>
-            <a:off x="365760" y="5833872"/>
-            <a:ext cx="11430000" cy="685800"/>
-          </a:xfrm>
-          <a:prstGeom prst="rect">
-            <a:avLst/>
-          </a:prstGeom>
-          <a:solidFill>
-            <a:srgbClr val="B71C1C"/>
-          </a:solidFill>
-          <a:ln/>
-        </p:spPr>
-        <p:style>
-          <a:lnRef idx="1">
-            <a:schemeClr val="accent1"/>
-          </a:lnRef>
-          <a:fillRef idx="3">
-            <a:schemeClr val="accent1"/>
-          </a:fillRef>
-          <a:effectRef idx="2">
-            <a:schemeClr val="accent1"/>
-          </a:effectRef>
-          <a:fontRef idx="minor">
-            <a:schemeClr val="lt1"/>
-          </a:fontRef>
-        </p:style>
-        <p:txBody>
-          <a:bodyPr rtlCol="0" anchor="ctr"/>
-          <a:lstStyle/>
-          <a:p>
-            <a:pPr algn="ctr"/>
-          </a:p>
-        </p:txBody>
-      </p:sp>
-      <p:sp>
-        <p:nvSpPr>
-          <p:cNvPr id="18" name="TextBox 17"/>
-          <p:cNvSpPr txBox="1"/>
-          <p:nvPr/>
-        </p:nvSpPr>
-        <p:spPr>
-          <a:xfrm>
-            <a:off x="548640" y="5870448"/>
-            <a:ext cx="11064240" cy="621792"/>
-          </a:xfrm>
-          <a:prstGeom prst="rect">
-            <a:avLst/>
-          </a:prstGeom>
-          <a:noFill/>
-        </p:spPr>
-        <p:txBody>
-          <a:bodyPr wrap="square">
-            <a:spAutoFit/>
-          </a:bodyPr>
-          <a:lstStyle/>
-          <a:p>
-            <a:pPr algn="ctr"/>
-            <a:r>
-              <a:rPr sz="1300" b="1" i="0">
-                <a:solidFill>
-                  <a:srgbClr val="FFFFFF"/>
-                </a:solidFill>
-                <a:latin typeface="Calibri"/>
-              </a:rPr>
-              <a:t>Com a mesma escolaridade, idade, sexo e bairro, um trabalhador negro ganha 6,1% a menos e tem chances 19% menores de chegar a um cargo qualificado. O diploma quase iguala o salário, mas não abre a porta.</a:t>
-            </a:r>
-          </a:p>
-        </p:txBody>
-      </p:sp>
-      <p:sp>
-        <p:nvSpPr>
-          <p:cNvPr id="19" name="Rectangle 18"/>
-          <p:cNvSpPr/>
-          <p:nvPr/>
-        </p:nvSpPr>
-        <p:spPr>
-          <a:xfrm>
-            <a:off x="0" y="6601968"/>
-            <a:ext cx="12188952" cy="256032"/>
-          </a:xfrm>
-          <a:prstGeom prst="rect">
-            <a:avLst/>
-          </a:prstGeom>
-          <a:solidFill>
-            <a:srgbClr val="1F3864"/>
-          </a:solidFill>
-          <a:ln/>
-        </p:spPr>
-        <p:style>
-          <a:lnRef idx="1">
-            <a:schemeClr val="accent1"/>
-          </a:lnRef>
-          <a:fillRef idx="3">
-            <a:schemeClr val="accent1"/>
-          </a:fillRef>
-          <a:effectRef idx="2">
-            <a:schemeClr val="accent1"/>
-          </a:effectRef>
-          <a:fontRef idx="minor">
-            <a:schemeClr val="lt1"/>
-          </a:fontRef>
-        </p:style>
-        <p:txBody>
-          <a:bodyPr rtlCol="0" anchor="ctr"/>
-          <a:lstStyle/>
-          <a:p>
-            <a:pPr algn="ctr"/>
-          </a:p>
-        </p:txBody>
-      </p:sp>
-      <p:sp>
-        <p:nvSpPr>
-          <p:cNvPr id="20" name="TextBox 19"/>
-          <p:cNvSpPr txBox="1"/>
-          <p:nvPr/>
-        </p:nvSpPr>
-        <p:spPr>
-          <a:xfrm>
-            <a:off x="137160" y="6629400"/>
-            <a:ext cx="10058400" cy="228600"/>
-          </a:xfrm>
-          <a:prstGeom prst="rect">
-            <a:avLst/>
-          </a:prstGeom>
-          <a:noFill/>
-        </p:spPr>
-        <p:txBody>
-          <a:bodyPr wrap="square">
-            <a:spAutoFit/>
-          </a:bodyPr>
-          <a:lstStyle/>
-          <a:p>
-            <a:pPr algn="l"/>
-            <a:r>
-              <a:rPr sz="850" b="0" i="0">
-                <a:solidFill>
-                  <a:srgbClr val="BBDEFB"/>
-                </a:solidFill>
-                <a:latin typeface="Calibri"/>
-              </a:rPr>
-              <a:t>Ricardo Calheiros  |  MBA USP/ESALQ  |  Racismo Estrutural e Mercado de Trabalho</a:t>
-            </a:r>
-          </a:p>
-        </p:txBody>
-      </p:sp>
-      <p:sp>
-        <p:nvSpPr>
-          <p:cNvPr id="21" name="TextBox 20"/>
-          <p:cNvSpPr txBox="1"/>
-          <p:nvPr/>
-        </p:nvSpPr>
-        <p:spPr>
-          <a:xfrm>
-            <a:off x="11521440" y="6629400"/>
-            <a:ext cx="640080" cy="228600"/>
-          </a:xfrm>
-          <a:prstGeom prst="rect">
-            <a:avLst/>
-          </a:prstGeom>
-          <a:noFill/>
-        </p:spPr>
-        <p:txBody>
-          <a:bodyPr wrap="square">
-            <a:spAutoFit/>
-          </a:bodyPr>
-          <a:lstStyle/>
-          <a:p>
-            <a:pPr algn="r"/>
-            <a:r>
-              <a:rPr sz="850" b="0" i="0">
-                <a:solidFill>
-                  <a:srgbClr val="FFFFFF"/>
-                </a:solidFill>
-                <a:latin typeface="Calibri"/>
-              </a:rPr>
-              <a:t>2/24</a:t>
-            </a:r>
-          </a:p>
-        </p:txBody>
-      </p:sp>
-    </p:spTree>
-  </p:cSld>
-  <p:clrMapOvr>
-    <a:masterClrMapping/>
-  </p:clrMapOvr>
-</p:sld>
-</file>
-
-<file path=ppt/slides/slide20.xml><?xml version="1.0" encoding="utf-8"?>
-<p:sld xmlns:a="http://schemas.openxmlformats.org/drawingml/2006/main" xmlns:p="http://schemas.openxmlformats.org/presentationml/2006/main" xmlns:r="http://schemas.openxmlformats.org/officeDocument/2006/relationships">
-  <p:cSld>
-    <p:spTree>
-      <p:nvGrpSpPr>
-        <p:cNvPr id="1" name=""/>
-        <p:cNvGrpSpPr/>
-        <p:nvPr/>
-      </p:nvGrpSpPr>
-      <p:grpSpPr/>
-      <p:sp>
-        <p:nvSpPr>
-          <p:cNvPr id="2" name="Rectangle 1"/>
-          <p:cNvSpPr/>
-          <p:nvPr/>
-        </p:nvSpPr>
-        <p:spPr>
-          <a:xfrm>
-            <a:off x="0" y="0"/>
-            <a:ext cx="12188952" cy="1005840"/>
-          </a:xfrm>
-          <a:prstGeom prst="rect">
-            <a:avLst/>
-          </a:prstGeom>
-          <a:solidFill>
-            <a:srgbClr val="1F3864"/>
-          </a:solidFill>
-          <a:ln/>
-        </p:spPr>
-        <p:style>
-          <a:lnRef idx="1">
-            <a:schemeClr val="accent1"/>
-          </a:lnRef>
-          <a:fillRef idx="3">
-            <a:schemeClr val="accent1"/>
-          </a:fillRef>
-          <a:effectRef idx="2">
-            <a:schemeClr val="accent1"/>
-          </a:effectRef>
-          <a:fontRef idx="minor">
-            <a:schemeClr val="lt1"/>
-          </a:fontRef>
-        </p:style>
-        <p:txBody>
-          <a:bodyPr rtlCol="0" anchor="ctr"/>
-          <a:lstStyle/>
-          <a:p>
-            <a:pPr algn="ctr"/>
-          </a:p>
-        </p:txBody>
-      </p:sp>
-      <p:sp>
-        <p:nvSpPr>
-          <p:cNvPr id="3" name="TextBox 2"/>
-          <p:cNvSpPr txBox="1"/>
-          <p:nvPr/>
-        </p:nvSpPr>
-        <p:spPr>
-          <a:xfrm>
-            <a:off x="274320" y="73152"/>
-            <a:ext cx="11612880" cy="502920"/>
-          </a:xfrm>
-          <a:prstGeom prst="rect">
-            <a:avLst/>
-          </a:prstGeom>
-          <a:noFill/>
-        </p:spPr>
-        <p:txBody>
-          <a:bodyPr wrap="square">
-            <a:spAutoFit/>
-          </a:bodyPr>
-          <a:lstStyle/>
-          <a:p>
-            <a:pPr algn="l"/>
-            <a:r>
-              <a:rPr sz="2600" b="1" i="0">
-                <a:solidFill>
-                  <a:srgbClr val="FFFFFF"/>
-                </a:solidFill>
-                <a:latin typeface="Calibri"/>
-              </a:rPr>
-              <a:t>18. Duas barreiras, um sistema: porta de entrada e salário</a:t>
-            </a:r>
-          </a:p>
-        </p:txBody>
-      </p:sp>
-      <p:sp>
-        <p:nvSpPr>
-          <p:cNvPr id="4" name="TextBox 3"/>
-          <p:cNvSpPr txBox="1"/>
-          <p:nvPr/>
-        </p:nvSpPr>
-        <p:spPr>
-          <a:xfrm>
-            <a:off x="274320" y="594360"/>
-            <a:ext cx="10972800" cy="347472"/>
-          </a:xfrm>
-          <a:prstGeom prst="rect">
-            <a:avLst/>
-          </a:prstGeom>
-          <a:noFill/>
-        </p:spPr>
-        <p:txBody>
-          <a:bodyPr wrap="square">
-            <a:spAutoFit/>
-          </a:bodyPr>
-          <a:lstStyle/>
-          <a:p>
-            <a:pPr algn="l"/>
-            <a:r>
-              <a:rPr sz="1400" b="0" i="0">
-                <a:solidFill>
-                  <a:srgbClr val="BBDEFB"/>
-                </a:solidFill>
-                <a:latin typeface="Calibri"/>
-              </a:rPr>
-              <a:t>Os métodos do núcleo apontam para o mesmo diagnóstico</a:t>
-            </a:r>
-          </a:p>
-        </p:txBody>
-      </p:sp>
-      <p:sp>
-        <p:nvSpPr>
-          <p:cNvPr id="5" name="Rectangle 4"/>
-          <p:cNvSpPr/>
-          <p:nvPr/>
-        </p:nvSpPr>
-        <p:spPr>
-          <a:xfrm>
-            <a:off x="274320" y="1188720"/>
-            <a:ext cx="5303520" cy="2103120"/>
-          </a:xfrm>
-          <a:prstGeom prst="rect">
-            <a:avLst/>
-          </a:prstGeom>
-          <a:solidFill>
-            <a:srgbClr val="F5F5F5"/>
-          </a:solidFill>
-          <a:ln w="19050">
-            <a:solidFill>
-              <a:srgbClr val="B71C1C"/>
-            </a:solidFill>
-          </a:ln>
-        </p:spPr>
-        <p:style>
-          <a:lnRef idx="1">
-            <a:schemeClr val="accent1"/>
-          </a:lnRef>
-          <a:fillRef idx="3">
-            <a:schemeClr val="accent1"/>
-          </a:fillRef>
-          <a:effectRef idx="2">
-            <a:schemeClr val="accent1"/>
-          </a:effectRef>
-          <a:fontRef idx="minor">
-            <a:schemeClr val="lt1"/>
-          </a:fontRef>
-        </p:style>
-        <p:txBody>
-          <a:bodyPr rtlCol="0" anchor="ctr"/>
-          <a:lstStyle/>
-          <a:p>
-            <a:pPr algn="ctr"/>
-          </a:p>
-        </p:txBody>
-      </p:sp>
-      <p:sp>
-        <p:nvSpPr>
-          <p:cNvPr id="6" name="Rectangle 5"/>
-          <p:cNvSpPr/>
-          <p:nvPr/>
-        </p:nvSpPr>
-        <p:spPr>
-          <a:xfrm>
-            <a:off x="274320" y="1188720"/>
-            <a:ext cx="5303520" cy="457200"/>
-          </a:xfrm>
-          <a:prstGeom prst="rect">
-            <a:avLst/>
-          </a:prstGeom>
-          <a:solidFill>
-            <a:srgbClr val="B71C1C"/>
-          </a:solidFill>
-          <a:ln/>
-        </p:spPr>
-        <p:style>
-          <a:lnRef idx="1">
-            <a:schemeClr val="accent1"/>
-          </a:lnRef>
-          <a:fillRef idx="3">
-            <a:schemeClr val="accent1"/>
-          </a:fillRef>
-          <a:effectRef idx="2">
-            <a:schemeClr val="accent1"/>
-          </a:effectRef>
-          <a:fontRef idx="minor">
-            <a:schemeClr val="lt1"/>
-          </a:fontRef>
-        </p:style>
-        <p:txBody>
-          <a:bodyPr rtlCol="0" anchor="ctr"/>
-          <a:lstStyle/>
-          <a:p>
-            <a:pPr algn="ctr"/>
-          </a:p>
-        </p:txBody>
-      </p:sp>
-      <p:sp>
-        <p:nvSpPr>
-          <p:cNvPr id="7" name="TextBox 6"/>
-          <p:cNvSpPr txBox="1"/>
-          <p:nvPr/>
-        </p:nvSpPr>
-        <p:spPr>
-          <a:xfrm>
-            <a:off x="365760" y="1234440"/>
-            <a:ext cx="5120640" cy="411480"/>
-          </a:xfrm>
-          <a:prstGeom prst="rect">
-            <a:avLst/>
-          </a:prstGeom>
-          <a:noFill/>
-        </p:spPr>
-        <p:txBody>
-          <a:bodyPr wrap="square">
-            <a:spAutoFit/>
-          </a:bodyPr>
-          <a:lstStyle/>
-          <a:p>
-            <a:pPr algn="ctr"/>
-            <a:r>
-              <a:rPr sz="1300" b="1" i="0">
-                <a:solidFill>
-                  <a:srgbClr val="FFFFFF"/>
-                </a:solidFill>
-                <a:latin typeface="Calibri"/>
-              </a:rPr>
-              <a:t>DISCRIMINAÇÃO DE ACESSO</a:t>
-            </a:r>
-          </a:p>
-        </p:txBody>
-      </p:sp>
-      <p:sp>
-        <p:nvSpPr>
-          <p:cNvPr id="8" name="TextBox 7"/>
-          <p:cNvSpPr txBox="1"/>
-          <p:nvPr/>
-        </p:nvSpPr>
-        <p:spPr>
-          <a:xfrm>
-            <a:off x="457200" y="1755648"/>
-            <a:ext cx="4937760" cy="457200"/>
-          </a:xfrm>
-          <a:prstGeom prst="rect">
-            <a:avLst/>
-          </a:prstGeom>
-          <a:noFill/>
-        </p:spPr>
-        <p:txBody>
-          <a:bodyPr wrap="square">
-            <a:spAutoFit/>
-          </a:bodyPr>
-          <a:lstStyle/>
-          <a:p>
-            <a:pPr algn="l"/>
-            <a:r>
-              <a:rPr sz="1200" b="0" i="0">
-                <a:solidFill>
-                  <a:srgbClr val="212121"/>
-                </a:solidFill>
-                <a:latin typeface="Calibri"/>
-              </a:rPr>
-              <a:t>• GLMM: OR=0,814 para ocp. qualificada</a:t>
-            </a:r>
-          </a:p>
-        </p:txBody>
-      </p:sp>
-      <p:sp>
-        <p:nvSpPr>
-          <p:cNvPr id="9" name="TextBox 8"/>
-          <p:cNvSpPr txBox="1"/>
-          <p:nvPr/>
-        </p:nvSpPr>
-        <p:spPr>
-          <a:xfrm>
-            <a:off x="457200" y="2231136"/>
-            <a:ext cx="4937760" cy="457200"/>
-          </a:xfrm>
-          <a:prstGeom prst="rect">
-            <a:avLst/>
-          </a:prstGeom>
-          <a:noFill/>
-        </p:spPr>
-        <p:txBody>
-          <a:bodyPr wrap="square">
-            <a:spAutoFit/>
-          </a:bodyPr>
-          <a:lstStyle/>
-          <a:p>
-            <a:pPr algn="l"/>
-            <a:r>
-              <a:rPr sz="1200" b="0" i="0">
-                <a:solidFill>
-                  <a:srgbClr val="212121"/>
-                </a:solidFill>
-                <a:latin typeface="Calibri"/>
-              </a:rPr>
-              <a:t>• AME=-2,60 p.p. no A2 (mesmo bairro)</a:t>
-            </a:r>
-          </a:p>
-        </p:txBody>
-      </p:sp>
-      <p:sp>
-        <p:nvSpPr>
-          <p:cNvPr id="10" name="TextBox 9"/>
-          <p:cNvSpPr txBox="1"/>
-          <p:nvPr/>
-        </p:nvSpPr>
-        <p:spPr>
-          <a:xfrm>
-            <a:off x="457200" y="2706624"/>
-            <a:ext cx="4937760" cy="457200"/>
-          </a:xfrm>
-          <a:prstGeom prst="rect">
-            <a:avLst/>
-          </a:prstGeom>
-          <a:noFill/>
-        </p:spPr>
-        <p:txBody>
-          <a:bodyPr wrap="square">
-            <a:spAutoFit/>
-          </a:bodyPr>
-          <a:lstStyle/>
-          <a:p>
-            <a:pPr algn="l"/>
-            <a:r>
-              <a:rPr sz="1200" b="0" i="0">
-                <a:solidFill>
-                  <a:srgbClr val="212121"/>
-                </a:solidFill>
-                <a:latin typeface="Calibri"/>
-              </a:rPr>
-              <a:t>• Persiste após todos os controles observáveis</a:t>
-            </a:r>
-          </a:p>
-        </p:txBody>
-      </p:sp>
-      <p:sp>
-        <p:nvSpPr>
-          <p:cNvPr id="11" name="Rectangle 10"/>
-          <p:cNvSpPr/>
-          <p:nvPr/>
-        </p:nvSpPr>
-        <p:spPr>
-          <a:xfrm>
-            <a:off x="6309360" y="1188720"/>
-            <a:ext cx="5303520" cy="2103120"/>
-          </a:xfrm>
-          <a:prstGeom prst="rect">
-            <a:avLst/>
-          </a:prstGeom>
-          <a:solidFill>
-            <a:srgbClr val="F5F5F5"/>
-          </a:solidFill>
-          <a:ln w="19050">
-            <a:solidFill>
-              <a:srgbClr val="1565C0"/>
-            </a:solidFill>
-          </a:ln>
-        </p:spPr>
-        <p:style>
-          <a:lnRef idx="1">
-            <a:schemeClr val="accent1"/>
-          </a:lnRef>
-          <a:fillRef idx="3">
-            <a:schemeClr val="accent1"/>
-          </a:fillRef>
-          <a:effectRef idx="2">
-            <a:schemeClr val="accent1"/>
-          </a:effectRef>
-          <a:fontRef idx="minor">
-            <a:schemeClr val="lt1"/>
-          </a:fontRef>
-        </p:style>
-        <p:txBody>
-          <a:bodyPr rtlCol="0" anchor="ctr"/>
-          <a:lstStyle/>
-          <a:p>
-            <a:pPr algn="ctr"/>
-          </a:p>
-        </p:txBody>
-      </p:sp>
-      <p:sp>
-        <p:nvSpPr>
-          <p:cNvPr id="12" name="Rectangle 11"/>
-          <p:cNvSpPr/>
-          <p:nvPr/>
-        </p:nvSpPr>
-        <p:spPr>
-          <a:xfrm>
-            <a:off x="6309360" y="1188720"/>
-            <a:ext cx="5303520" cy="457200"/>
-          </a:xfrm>
-          <a:prstGeom prst="rect">
-            <a:avLst/>
-          </a:prstGeom>
-          <a:solidFill>
-            <a:srgbClr val="1565C0"/>
-          </a:solidFill>
-          <a:ln/>
-        </p:spPr>
-        <p:style>
-          <a:lnRef idx="1">
-            <a:schemeClr val="accent1"/>
-          </a:lnRef>
-          <a:fillRef idx="3">
-            <a:schemeClr val="accent1"/>
-          </a:fillRef>
-          <a:effectRef idx="2">
-            <a:schemeClr val="accent1"/>
-          </a:effectRef>
-          <a:fontRef idx="minor">
-            <a:schemeClr val="lt1"/>
-          </a:fontRef>
-        </p:style>
-        <p:txBody>
-          <a:bodyPr rtlCol="0" anchor="ctr"/>
-          <a:lstStyle/>
-          <a:p>
-            <a:pPr algn="ctr"/>
-          </a:p>
-        </p:txBody>
-      </p:sp>
-      <p:sp>
-        <p:nvSpPr>
-          <p:cNvPr id="13" name="TextBox 12"/>
-          <p:cNvSpPr txBox="1"/>
-          <p:nvPr/>
-        </p:nvSpPr>
-        <p:spPr>
-          <a:xfrm>
-            <a:off x="6400800" y="1234440"/>
-            <a:ext cx="5120640" cy="411480"/>
-          </a:xfrm>
-          <a:prstGeom prst="rect">
-            <a:avLst/>
-          </a:prstGeom>
-          <a:noFill/>
-        </p:spPr>
-        <p:txBody>
-          <a:bodyPr wrap="square">
-            <a:spAutoFit/>
-          </a:bodyPr>
-          <a:lstStyle/>
-          <a:p>
-            <a:pPr algn="ctr"/>
-            <a:r>
-              <a:rPr sz="1300" b="1" i="0">
-                <a:solidFill>
-                  <a:srgbClr val="FFFFFF"/>
-                </a:solidFill>
-                <a:latin typeface="Calibri"/>
-              </a:rPr>
-              <a:t>DISCRIMINAÇÃO DE REMUNERAÇÃO</a:t>
-            </a:r>
-          </a:p>
-        </p:txBody>
-      </p:sp>
-      <p:sp>
-        <p:nvSpPr>
-          <p:cNvPr id="14" name="TextBox 13"/>
-          <p:cNvSpPr txBox="1"/>
-          <p:nvPr/>
-        </p:nvSpPr>
-        <p:spPr>
-          <a:xfrm>
-            <a:off x="6492240" y="1755648"/>
-            <a:ext cx="4937760" cy="457200"/>
-          </a:xfrm>
-          <a:prstGeom prst="rect">
-            <a:avLst/>
-          </a:prstGeom>
-          <a:noFill/>
-        </p:spPr>
-        <p:txBody>
-          <a:bodyPr wrap="square">
-            <a:spAutoFit/>
-          </a:bodyPr>
-          <a:lstStyle/>
-          <a:p>
-            <a:pPr algn="l"/>
-            <a:r>
-              <a:rPr sz="1200" b="0" i="0">
-                <a:solidFill>
-                  <a:srgbClr val="212121"/>
-                </a:solidFill>
-                <a:latin typeface="Calibri"/>
-              </a:rPr>
-              <a:t>• HLM M4: gap de 5,6% dentro da ocupação</a:t>
-            </a:r>
-          </a:p>
-        </p:txBody>
-      </p:sp>
-      <p:sp>
-        <p:nvSpPr>
-          <p:cNvPr id="15" name="TextBox 14"/>
-          <p:cNvSpPr txBox="1"/>
-          <p:nvPr/>
-        </p:nvSpPr>
-        <p:spPr>
-          <a:xfrm>
-            <a:off x="6492240" y="2231136"/>
-            <a:ext cx="4937760" cy="457200"/>
-          </a:xfrm>
-          <a:prstGeom prst="rect">
-            <a:avLst/>
-          </a:prstGeom>
-          <a:noFill/>
-        </p:spPr>
-        <p:txBody>
-          <a:bodyPr wrap="square">
-            <a:spAutoFit/>
-          </a:bodyPr>
-          <a:lstStyle/>
-          <a:p>
-            <a:pPr algn="l"/>
-            <a:r>
-              <a:rPr sz="1200" b="0" i="0">
-                <a:solidFill>
-                  <a:srgbClr val="212121"/>
-                </a:solidFill>
-                <a:latin typeface="Calibri"/>
-              </a:rPr>
-              <a:t>• Quantílica: de 4,3% no q10 a 8,4% no q90 (penalidade condicional)</a:t>
-            </a:r>
-          </a:p>
-        </p:txBody>
-      </p:sp>
-      <p:sp>
-        <p:nvSpPr>
-          <p:cNvPr id="16" name="TextBox 15"/>
-          <p:cNvSpPr txBox="1"/>
-          <p:nvPr/>
-        </p:nvSpPr>
-        <p:spPr>
-          <a:xfrm>
-            <a:off x="6492240" y="2706624"/>
-            <a:ext cx="4937760" cy="457200"/>
-          </a:xfrm>
-          <a:prstGeom prst="rect">
-            <a:avLst/>
-          </a:prstGeom>
-          <a:noFill/>
-        </p:spPr>
-        <p:txBody>
-          <a:bodyPr wrap="square">
-            <a:spAutoFit/>
-          </a:bodyPr>
-          <a:lstStyle/>
-          <a:p>
-            <a:pPr algn="l"/>
-            <a:r>
-              <a:rPr sz="1200" b="0" i="0">
-                <a:solidFill>
-                  <a:srgbClr val="212121"/>
-                </a:solidFill>
-                <a:latin typeface="Calibri"/>
-              </a:rPr>
-              <a:t>• SHAP: raça é o 14º de 28 preditores no XGBoost</a:t>
-            </a:r>
-          </a:p>
-        </p:txBody>
-      </p:sp>
-      <p:sp>
-        <p:nvSpPr>
-          <p:cNvPr id="17" name="Rectangle 16"/>
-          <p:cNvSpPr/>
-          <p:nvPr/>
-        </p:nvSpPr>
-        <p:spPr>
-          <a:xfrm>
-            <a:off x="3291840" y="3611880"/>
-            <a:ext cx="5303520" cy="2103120"/>
-          </a:xfrm>
-          <a:prstGeom prst="rect">
-            <a:avLst/>
-          </a:prstGeom>
-          <a:solidFill>
-            <a:srgbClr val="F5F5F5"/>
-          </a:solidFill>
-          <a:ln w="19050">
-            <a:solidFill>
-              <a:srgbClr val="1F3864"/>
-            </a:solidFill>
-          </a:ln>
-        </p:spPr>
-        <p:style>
-          <a:lnRef idx="1">
-            <a:schemeClr val="accent1"/>
-          </a:lnRef>
-          <a:fillRef idx="3">
-            <a:schemeClr val="accent1"/>
-          </a:fillRef>
-          <a:effectRef idx="2">
-            <a:schemeClr val="accent1"/>
-          </a:effectRef>
-          <a:fontRef idx="minor">
-            <a:schemeClr val="lt1"/>
-          </a:fontRef>
-        </p:style>
-        <p:txBody>
-          <a:bodyPr rtlCol="0" anchor="ctr"/>
-          <a:lstStyle/>
-          <a:p>
-            <a:pPr algn="ctr"/>
-          </a:p>
-        </p:txBody>
-      </p:sp>
-      <p:sp>
-        <p:nvSpPr>
-          <p:cNvPr id="18" name="Rectangle 17"/>
-          <p:cNvSpPr/>
-          <p:nvPr/>
-        </p:nvSpPr>
-        <p:spPr>
-          <a:xfrm>
-            <a:off x="3291840" y="3611880"/>
-            <a:ext cx="5303520" cy="457200"/>
-          </a:xfrm>
-          <a:prstGeom prst="rect">
-            <a:avLst/>
-          </a:prstGeom>
-          <a:solidFill>
-            <a:srgbClr val="1F3864"/>
-          </a:solidFill>
-          <a:ln/>
-        </p:spPr>
-        <p:style>
-          <a:lnRef idx="1">
-            <a:schemeClr val="accent1"/>
-          </a:lnRef>
-          <a:fillRef idx="3">
-            <a:schemeClr val="accent1"/>
-          </a:fillRef>
-          <a:effectRef idx="2">
-            <a:schemeClr val="accent1"/>
-          </a:effectRef>
-          <a:fontRef idx="minor">
-            <a:schemeClr val="lt1"/>
-          </a:fontRef>
-        </p:style>
-        <p:txBody>
-          <a:bodyPr rtlCol="0" anchor="ctr"/>
-          <a:lstStyle/>
-          <a:p>
-            <a:pPr algn="ctr"/>
-          </a:p>
-        </p:txBody>
-      </p:sp>
-      <p:sp>
-        <p:nvSpPr>
-          <p:cNvPr id="19" name="TextBox 18"/>
-          <p:cNvSpPr txBox="1"/>
-          <p:nvPr/>
-        </p:nvSpPr>
-        <p:spPr>
-          <a:xfrm>
-            <a:off x="3383280" y="3657600"/>
-            <a:ext cx="5120640" cy="411480"/>
-          </a:xfrm>
-          <a:prstGeom prst="rect">
-            <a:avLst/>
-          </a:prstGeom>
-          <a:noFill/>
-        </p:spPr>
-        <p:txBody>
-          <a:bodyPr wrap="square">
-            <a:spAutoFit/>
-          </a:bodyPr>
-          <a:lstStyle/>
-          <a:p>
-            <a:pPr algn="ctr"/>
-            <a:r>
-              <a:rPr sz="1300" b="1" i="0">
-                <a:solidFill>
-                  <a:srgbClr val="FFFFFF"/>
-                </a:solidFill>
-                <a:latin typeface="Calibri"/>
-              </a:rPr>
-              <a:t>PENALIDADE INTERSECCIONAL</a:t>
-            </a:r>
-          </a:p>
-        </p:txBody>
-      </p:sp>
-      <p:sp>
-        <p:nvSpPr>
-          <p:cNvPr id="20" name="TextBox 19"/>
-          <p:cNvSpPr txBox="1"/>
-          <p:nvPr/>
-        </p:nvSpPr>
-        <p:spPr>
-          <a:xfrm>
-            <a:off x="3474720" y="4178808"/>
-            <a:ext cx="4937760" cy="457200"/>
-          </a:xfrm>
-          <a:prstGeom prst="rect">
-            <a:avLst/>
-          </a:prstGeom>
-          <a:noFill/>
-        </p:spPr>
-        <p:txBody>
-          <a:bodyPr wrap="square">
-            <a:spAutoFit/>
-          </a:bodyPr>
-          <a:lstStyle/>
-          <a:p>
-            <a:pPr algn="l"/>
-            <a:r>
-              <a:rPr sz="1200" b="0" i="0">
-                <a:solidFill>
-                  <a:srgbClr val="212121"/>
-                </a:solidFill>
-                <a:latin typeface="Calibri"/>
-              </a:rPr>
-              <a:t>• Mulher Negra: gap de 80,7%</a:t>
-            </a:r>
-          </a:p>
-        </p:txBody>
-      </p:sp>
-      <p:sp>
-        <p:nvSpPr>
-          <p:cNvPr id="21" name="TextBox 20"/>
-          <p:cNvSpPr txBox="1"/>
-          <p:nvPr/>
-        </p:nvSpPr>
-        <p:spPr>
-          <a:xfrm>
-            <a:off x="3474720" y="4654296"/>
-            <a:ext cx="4937760" cy="457200"/>
-          </a:xfrm>
-          <a:prstGeom prst="rect">
-            <a:avLst/>
-          </a:prstGeom>
-          <a:noFill/>
-        </p:spPr>
-        <p:txBody>
-          <a:bodyPr wrap="square">
-            <a:spAutoFit/>
-          </a:bodyPr>
-          <a:lstStyle/>
-          <a:p>
-            <a:pPr algn="l"/>
-            <a:r>
-              <a:rPr sz="1200" b="0" i="0">
-                <a:solidFill>
-                  <a:srgbClr val="212121"/>
-                </a:solidFill>
-                <a:latin typeface="Calibri"/>
-              </a:rPr>
-              <a:t>• Acumula raça e gênero, sem multiplicar (log)</a:t>
-            </a:r>
-          </a:p>
-        </p:txBody>
-      </p:sp>
-      <p:sp>
-        <p:nvSpPr>
-          <p:cNvPr id="22" name="TextBox 21"/>
-          <p:cNvSpPr txBox="1"/>
-          <p:nvPr/>
-        </p:nvSpPr>
-        <p:spPr>
-          <a:xfrm>
-            <a:off x="3474720" y="5129784"/>
-            <a:ext cx="4937760" cy="457200"/>
-          </a:xfrm>
-          <a:prstGeom prst="rect">
-            <a:avLst/>
-          </a:prstGeom>
-          <a:noFill/>
-        </p:spPr>
-        <p:txBody>
-          <a:bodyPr wrap="square">
-            <a:spAutoFit/>
-          </a:bodyPr>
-          <a:lstStyle/>
-          <a:p>
-            <a:pPr algn="l"/>
-            <a:r>
-              <a:rPr sz="1200" b="0" i="0">
-                <a:solidFill>
-                  <a:srgbClr val="212121"/>
-                </a:solidFill>
-                <a:latin typeface="Calibri"/>
-              </a:rPr>
-              <a:t>• Dirigentes: OR 0,63; top 10%: OR 0,28</a:t>
-            </a:r>
-          </a:p>
-        </p:txBody>
-      </p:sp>
-      <p:sp>
-        <p:nvSpPr>
-          <p:cNvPr id="23" name="Rectangle 22"/>
-          <p:cNvSpPr/>
-          <p:nvPr/>
-        </p:nvSpPr>
-        <p:spPr>
-          <a:xfrm>
-            <a:off x="274320" y="5852160"/>
-            <a:ext cx="11612880" cy="457200"/>
-          </a:xfrm>
-          <a:prstGeom prst="rect">
-            <a:avLst/>
-          </a:prstGeom>
-          <a:solidFill>
-            <a:srgbClr val="1F3864"/>
-          </a:solidFill>
-          <a:ln/>
-        </p:spPr>
-        <p:style>
-          <a:lnRef idx="1">
-            <a:schemeClr val="accent1"/>
-          </a:lnRef>
-          <a:fillRef idx="3">
-            <a:schemeClr val="accent1"/>
-          </a:fillRef>
-          <a:effectRef idx="2">
-            <a:schemeClr val="accent1"/>
-          </a:effectRef>
-          <a:fontRef idx="minor">
-            <a:schemeClr val="lt1"/>
-          </a:fontRef>
-        </p:style>
-        <p:txBody>
-          <a:bodyPr rtlCol="0" anchor="ctr"/>
-          <a:lstStyle/>
-          <a:p>
-            <a:pPr algn="ctr"/>
-          </a:p>
-        </p:txBody>
-      </p:sp>
-      <p:sp>
-        <p:nvSpPr>
-          <p:cNvPr id="24" name="TextBox 23"/>
-          <p:cNvSpPr txBox="1"/>
-          <p:nvPr/>
-        </p:nvSpPr>
-        <p:spPr>
-          <a:xfrm>
-            <a:off x="457200" y="5897880"/>
-            <a:ext cx="11247120" cy="411480"/>
-          </a:xfrm>
-          <a:prstGeom prst="rect">
-            <a:avLst/>
-          </a:prstGeom>
-          <a:noFill/>
-        </p:spPr>
-        <p:txBody>
-          <a:bodyPr wrap="square">
-            <a:spAutoFit/>
-          </a:bodyPr>
-          <a:lstStyle/>
-          <a:p>
-            <a:pPr algn="ctr"/>
-            <a:r>
-              <a:rPr sz="1200" b="1" i="0">
-                <a:solidFill>
-                  <a:srgbClr val="FFFFFF"/>
-                </a:solidFill>
-                <a:latin typeface="Calibri"/>
-              </a:rPr>
-              <a:t>Oaxaca: 82,1% do gap é composição e 17,9% retornos | GLMM mostra a barreira de acesso (OR=0,814) | RIF: discriminação de preço maior na base (piso pegajoso)</a:t>
-            </a:r>
-          </a:p>
-        </p:txBody>
-      </p:sp>
-      <p:sp>
-        <p:nvSpPr>
-          <p:cNvPr id="25" name="Rectangle 24"/>
-          <p:cNvSpPr/>
-          <p:nvPr/>
-        </p:nvSpPr>
-        <p:spPr>
-          <a:xfrm>
-            <a:off x="0" y="6601968"/>
-            <a:ext cx="12188952" cy="256032"/>
-          </a:xfrm>
-          <a:prstGeom prst="rect">
-            <a:avLst/>
-          </a:prstGeom>
-          <a:solidFill>
-            <a:srgbClr val="1F3864"/>
-          </a:solidFill>
-          <a:ln/>
-        </p:spPr>
-        <p:style>
-          <a:lnRef idx="1">
-            <a:schemeClr val="accent1"/>
-          </a:lnRef>
-          <a:fillRef idx="3">
-            <a:schemeClr val="accent1"/>
-          </a:fillRef>
-          <a:effectRef idx="2">
-            <a:schemeClr val="accent1"/>
-          </a:effectRef>
-          <a:fontRef idx="minor">
-            <a:schemeClr val="lt1"/>
-          </a:fontRef>
-        </p:style>
-        <p:txBody>
-          <a:bodyPr rtlCol="0" anchor="ctr"/>
-          <a:lstStyle/>
-          <a:p>
-            <a:pPr algn="ctr"/>
-          </a:p>
-        </p:txBody>
-      </p:sp>
-      <p:sp>
-        <p:nvSpPr>
-          <p:cNvPr id="26" name="TextBox 25"/>
-          <p:cNvSpPr txBox="1"/>
-          <p:nvPr/>
-        </p:nvSpPr>
-        <p:spPr>
-          <a:xfrm>
-            <a:off x="137160" y="6629400"/>
-            <a:ext cx="10058400" cy="228600"/>
-          </a:xfrm>
-          <a:prstGeom prst="rect">
-            <a:avLst/>
-          </a:prstGeom>
-          <a:noFill/>
-        </p:spPr>
-        <p:txBody>
-          <a:bodyPr wrap="square">
-            <a:spAutoFit/>
-          </a:bodyPr>
-          <a:lstStyle/>
-          <a:p>
-            <a:pPr algn="l"/>
-            <a:r>
-              <a:rPr sz="850" b="0" i="0">
-                <a:solidFill>
-                  <a:srgbClr val="BBDEFB"/>
-                </a:solidFill>
-                <a:latin typeface="Calibri"/>
-              </a:rPr>
-              <a:t>Ricardo Calheiros  |  MBA USP/ESALQ  |  Racismo Estrutural e Mercado de Trabalho</a:t>
-            </a:r>
-          </a:p>
-        </p:txBody>
-      </p:sp>
-      <p:sp>
-        <p:nvSpPr>
-          <p:cNvPr id="27" name="TextBox 26"/>
-          <p:cNvSpPr txBox="1"/>
-          <p:nvPr/>
-        </p:nvSpPr>
-        <p:spPr>
-          <a:xfrm>
-            <a:off x="11521440" y="6629400"/>
-            <a:ext cx="640080" cy="228600"/>
-          </a:xfrm>
-          <a:prstGeom prst="rect">
-            <a:avLst/>
-          </a:prstGeom>
-          <a:noFill/>
-        </p:spPr>
-        <p:txBody>
-          <a:bodyPr wrap="square">
-            <a:spAutoFit/>
-          </a:bodyPr>
-          <a:lstStyle/>
-          <a:p>
-            <a:pPr algn="r"/>
-            <a:r>
-              <a:rPr sz="850" b="0" i="0">
-                <a:solidFill>
-                  <a:srgbClr val="FFFFFF"/>
-                </a:solidFill>
-                <a:latin typeface="Calibri"/>
-              </a:rPr>
-              <a:t>20/24</a:t>
+              <a:t>20/25</a:t>
             </a:r>
           </a:p>
         </p:txBody>
@@ -13629,13 +13720,13 @@
           <a:p>
             <a:pPr algn="l"/>
             <a:r>
-              <a:rPr sz="2200" b="1" i="0">
+              <a:rPr sz="2600" b="1" i="0">
                 <a:solidFill>
                   <a:srgbClr val="FFFFFF"/>
                 </a:solidFill>
                 <a:latin typeface="Calibri"/>
               </a:rPr>
-              <a:t>19. As políticas de diversidade cuidam da entrada, não da subida</a:t>
+              <a:t>19. Duas barreiras, um sistema: porta de entrada e salário</a:t>
             </a:r>
           </a:p>
         </p:txBody>
@@ -13670,7 +13761,7 @@
                 </a:solidFill>
                 <a:latin typeface="Calibri"/>
               </a:rPr>
-              <a:t>O que os resultados dizem sobre os instrumentos vigentes</a:t>
+              <a:t>Os métodos do núcleo apontam para o mesmo diagnóstico</a:t>
             </a:r>
           </a:p>
         </p:txBody>
@@ -13683,8 +13774,8 @@
         </p:nvSpPr>
         <p:spPr>
           <a:xfrm>
-            <a:off x="320040" y="1143000"/>
-            <a:ext cx="2811780" cy="4846320"/>
+            <a:off x="274320" y="1188720"/>
+            <a:ext cx="5303520" cy="2103120"/>
           </a:xfrm>
           <a:prstGeom prst="rect">
             <a:avLst/>
@@ -13728,8 +13819,8 @@
         </p:nvSpPr>
         <p:spPr>
           <a:xfrm>
-            <a:off x="320040" y="1143000"/>
-            <a:ext cx="2811780" cy="502920"/>
+            <a:off x="274320" y="1188720"/>
+            <a:ext cx="5303520" cy="457200"/>
           </a:xfrm>
           <a:prstGeom prst="rect">
             <a:avLst/>
@@ -13769,8 +13860,43 @@
         </p:nvSpPr>
         <p:spPr>
           <a:xfrm>
-            <a:off x="411480" y="1188720"/>
-            <a:ext cx="2628900" cy="457200"/>
+            <a:off x="365760" y="1234440"/>
+            <a:ext cx="5120640" cy="411480"/>
+          </a:xfrm>
+          <a:prstGeom prst="rect">
+            <a:avLst/>
+          </a:prstGeom>
+          <a:noFill/>
+        </p:spPr>
+        <p:txBody>
+          <a:bodyPr wrap="square">
+            <a:spAutoFit/>
+          </a:bodyPr>
+          <a:lstStyle/>
+          <a:p>
+            <a:pPr algn="ctr"/>
+            <a:r>
+              <a:rPr sz="1300" b="1" i="0">
+                <a:solidFill>
+                  <a:srgbClr val="FFFFFF"/>
+                </a:solidFill>
+                <a:latin typeface="Calibri"/>
+              </a:rPr>
+              <a:t>DISCRIMINAÇÃO DE ACESSO</a:t>
+            </a:r>
+          </a:p>
+        </p:txBody>
+      </p:sp>
+      <p:sp>
+        <p:nvSpPr>
+          <p:cNvPr id="8" name="TextBox 7"/>
+          <p:cNvSpPr txBox="1"/>
+          <p:nvPr/>
+        </p:nvSpPr>
+        <p:spPr>
+          <a:xfrm>
+            <a:off x="457200" y="1755648"/>
+            <a:ext cx="4937760" cy="457200"/>
           </a:xfrm>
           <a:prstGeom prst="rect">
             <a:avLst/>
@@ -13785,27 +13911,27 @@
           <a:p>
             <a:pPr algn="l"/>
             <a:r>
-              <a:rPr sz="1300" b="1" i="0">
-                <a:solidFill>
-                  <a:srgbClr val="FFFFFF"/>
-                </a:solidFill>
-                <a:latin typeface="Calibri"/>
-              </a:rPr>
-              <a:t>Ingresso, não ascensão</a:t>
-            </a:r>
-          </a:p>
-        </p:txBody>
-      </p:sp>
-      <p:sp>
-        <p:nvSpPr>
-          <p:cNvPr id="8" name="TextBox 7"/>
-          <p:cNvSpPr txBox="1"/>
-          <p:nvPr/>
-        </p:nvSpPr>
-        <p:spPr>
-          <a:xfrm>
-            <a:off x="457200" y="1783080"/>
-            <a:ext cx="2537460" cy="4023360"/>
+              <a:rPr sz="1200" b="0" i="0">
+                <a:solidFill>
+                  <a:srgbClr val="212121"/>
+                </a:solidFill>
+                <a:latin typeface="Calibri"/>
+              </a:rPr>
+              <a:t>• GLMM: OR=0,814 para ocp. qualificada</a:t>
+            </a:r>
+          </a:p>
+        </p:txBody>
+      </p:sp>
+      <p:sp>
+        <p:nvSpPr>
+          <p:cNvPr id="9" name="TextBox 8"/>
+          <p:cNvSpPr txBox="1"/>
+          <p:nvPr/>
+        </p:nvSpPr>
+        <p:spPr>
+          <a:xfrm>
+            <a:off x="457200" y="2231136"/>
+            <a:ext cx="4937760" cy="457200"/>
           </a:xfrm>
           <a:prstGeom prst="rect">
             <a:avLst/>
@@ -13820,27 +13946,62 @@
           <a:p>
             <a:pPr algn="l"/>
             <a:r>
-              <a:rPr sz="1300" b="0" i="0">
+              <a:rPr sz="1200" b="0" i="0">
                 <a:solidFill>
                   <a:srgbClr val="212121"/>
                 </a:solidFill>
                 <a:latin typeface="Calibri"/>
               </a:rPr>
-              <a:t>Cotas no ensino (Lei 12.711/2012, atualizada em 2023) e nos concursos (Lei 15.142/2025) atuam na entrada. A barreira cresce no topo: chances 24% menores no décimo mais rico. A reserva de cargos de confiança (Decreto 11.443/2023) vale só no governo federal.</a:t>
-            </a:r>
-          </a:p>
-        </p:txBody>
-      </p:sp>
-      <p:sp>
-        <p:nvSpPr>
-          <p:cNvPr id="9" name="Rectangle 8"/>
+              <a:t>• AME=-2,60 p.p. no A2 (mesmo bairro)</a:t>
+            </a:r>
+          </a:p>
+        </p:txBody>
+      </p:sp>
+      <p:sp>
+        <p:nvSpPr>
+          <p:cNvPr id="10" name="TextBox 9"/>
+          <p:cNvSpPr txBox="1"/>
+          <p:nvPr/>
+        </p:nvSpPr>
+        <p:spPr>
+          <a:xfrm>
+            <a:off x="457200" y="2706624"/>
+            <a:ext cx="4937760" cy="457200"/>
+          </a:xfrm>
+          <a:prstGeom prst="rect">
+            <a:avLst/>
+          </a:prstGeom>
+          <a:noFill/>
+        </p:spPr>
+        <p:txBody>
+          <a:bodyPr wrap="square">
+            <a:spAutoFit/>
+          </a:bodyPr>
+          <a:lstStyle/>
+          <a:p>
+            <a:pPr algn="l"/>
+            <a:r>
+              <a:rPr sz="1200" b="0" i="0">
+                <a:solidFill>
+                  <a:srgbClr val="212121"/>
+                </a:solidFill>
+                <a:latin typeface="Calibri"/>
+              </a:rPr>
+              <a:t>• Persiste após todos os controles observáveis</a:t>
+            </a:r>
+          </a:p>
+        </p:txBody>
+      </p:sp>
+      <p:sp>
+        <p:nvSpPr>
+          <p:cNvPr id="11" name="Rectangle 10"/>
           <p:cNvSpPr/>
           <p:nvPr/>
         </p:nvSpPr>
         <p:spPr>
           <a:xfrm>
-            <a:off x="3223260" y="1143000"/>
-            <a:ext cx="2811780" cy="4846320"/>
+            <a:off x="6309360" y="1188720"/>
+            <a:ext cx="5303520" cy="2103120"/>
           </a:xfrm>
           <a:prstGeom prst="rect">
             <a:avLst/>
@@ -13878,14 +14039,14 @@
       </p:sp>
       <p:sp>
         <p:nvSpPr>
-          <p:cNvPr id="10" name="Rectangle 9"/>
+          <p:cNvPr id="12" name="Rectangle 11"/>
           <p:cNvSpPr/>
           <p:nvPr/>
         </p:nvSpPr>
         <p:spPr>
           <a:xfrm>
-            <a:off x="3223260" y="1143000"/>
-            <a:ext cx="2811780" cy="502920"/>
+            <a:off x="6309360" y="1188720"/>
+            <a:ext cx="5303520" cy="457200"/>
           </a:xfrm>
           <a:prstGeom prst="rect">
             <a:avLst/>
@@ -13919,14 +14080,49 @@
       </p:sp>
       <p:sp>
         <p:nvSpPr>
-          <p:cNvPr id="11" name="TextBox 10"/>
-          <p:cNvSpPr txBox="1"/>
-          <p:nvPr/>
-        </p:nvSpPr>
-        <p:spPr>
-          <a:xfrm>
-            <a:off x="3314700" y="1188720"/>
-            <a:ext cx="2628900" cy="457200"/>
+          <p:cNvPr id="13" name="TextBox 12"/>
+          <p:cNvSpPr txBox="1"/>
+          <p:nvPr/>
+        </p:nvSpPr>
+        <p:spPr>
+          <a:xfrm>
+            <a:off x="6400800" y="1234440"/>
+            <a:ext cx="5120640" cy="411480"/>
+          </a:xfrm>
+          <a:prstGeom prst="rect">
+            <a:avLst/>
+          </a:prstGeom>
+          <a:noFill/>
+        </p:spPr>
+        <p:txBody>
+          <a:bodyPr wrap="square">
+            <a:spAutoFit/>
+          </a:bodyPr>
+          <a:lstStyle/>
+          <a:p>
+            <a:pPr algn="ctr"/>
+            <a:r>
+              <a:rPr sz="1300" b="1" i="0">
+                <a:solidFill>
+                  <a:srgbClr val="FFFFFF"/>
+                </a:solidFill>
+                <a:latin typeface="Calibri"/>
+              </a:rPr>
+              <a:t>DISCRIMINAÇÃO DE REMUNERAÇÃO</a:t>
+            </a:r>
+          </a:p>
+        </p:txBody>
+      </p:sp>
+      <p:sp>
+        <p:nvSpPr>
+          <p:cNvPr id="14" name="TextBox 13"/>
+          <p:cNvSpPr txBox="1"/>
+          <p:nvPr/>
+        </p:nvSpPr>
+        <p:spPr>
+          <a:xfrm>
+            <a:off x="6492240" y="1755648"/>
+            <a:ext cx="4937760" cy="457200"/>
           </a:xfrm>
           <a:prstGeom prst="rect">
             <a:avLst/>
@@ -13941,27 +14137,27 @@
           <a:p>
             <a:pPr algn="l"/>
             <a:r>
-              <a:rPr sz="1300" b="1" i="0">
-                <a:solidFill>
-                  <a:srgbClr val="FFFFFF"/>
-                </a:solidFill>
-                <a:latin typeface="Calibri"/>
-              </a:rPr>
-              <a:t>Educação iguala o salário, não a porta</a:t>
-            </a:r>
-          </a:p>
-        </p:txBody>
-      </p:sp>
-      <p:sp>
-        <p:nvSpPr>
-          <p:cNvPr id="12" name="TextBox 11"/>
-          <p:cNvSpPr txBox="1"/>
-          <p:nvPr/>
-        </p:nvSpPr>
-        <p:spPr>
-          <a:xfrm>
-            <a:off x="3360420" y="1783080"/>
-            <a:ext cx="2537460" cy="4023360"/>
+              <a:rPr sz="1200" b="0" i="0">
+                <a:solidFill>
+                  <a:srgbClr val="212121"/>
+                </a:solidFill>
+                <a:latin typeface="Calibri"/>
+              </a:rPr>
+              <a:t>• HLM M4: gap de 5,6% dentro da ocupação</a:t>
+            </a:r>
+          </a:p>
+        </p:txBody>
+      </p:sp>
+      <p:sp>
+        <p:nvSpPr>
+          <p:cNvPr id="15" name="TextBox 14"/>
+          <p:cNvSpPr txBox="1"/>
+          <p:nvPr/>
+        </p:nvSpPr>
+        <p:spPr>
+          <a:xfrm>
+            <a:off x="6492240" y="2231136"/>
+            <a:ext cx="4937760" cy="457200"/>
           </a:xfrm>
           <a:prstGeom prst="rect">
             <a:avLst/>
@@ -13976,27 +14172,62 @@
           <a:p>
             <a:pPr algn="l"/>
             <a:r>
-              <a:rPr sz="1300" b="0" i="0">
+              <a:rPr sz="1200" b="0" i="0">
                 <a:solidFill>
                   <a:srgbClr val="212121"/>
                 </a:solidFill>
                 <a:latin typeface="Calibri"/>
               </a:rPr>
-              <a:t>A penalidade cai a 1,1% na pós-graduação, mas as chances de acesso seguem 23% menores. Prouni, Fies e cotas no ensino atacam a barreira que mais cede ao diploma.</a:t>
-            </a:r>
-          </a:p>
-        </p:txBody>
-      </p:sp>
-      <p:sp>
-        <p:nvSpPr>
-          <p:cNvPr id="13" name="Rectangle 12"/>
+              <a:t>• Quantílica: de 4,3% no q10 a 8,4% no q90 (penalidade condicional)</a:t>
+            </a:r>
+          </a:p>
+        </p:txBody>
+      </p:sp>
+      <p:sp>
+        <p:nvSpPr>
+          <p:cNvPr id="16" name="TextBox 15"/>
+          <p:cNvSpPr txBox="1"/>
+          <p:nvPr/>
+        </p:nvSpPr>
+        <p:spPr>
+          <a:xfrm>
+            <a:off x="6492240" y="2706624"/>
+            <a:ext cx="4937760" cy="457200"/>
+          </a:xfrm>
+          <a:prstGeom prst="rect">
+            <a:avLst/>
+          </a:prstGeom>
+          <a:noFill/>
+        </p:spPr>
+        <p:txBody>
+          <a:bodyPr wrap="square">
+            <a:spAutoFit/>
+          </a:bodyPr>
+          <a:lstStyle/>
+          <a:p>
+            <a:pPr algn="l"/>
+            <a:r>
+              <a:rPr sz="1200" b="0" i="0">
+                <a:solidFill>
+                  <a:srgbClr val="212121"/>
+                </a:solidFill>
+                <a:latin typeface="Calibri"/>
+              </a:rPr>
+              <a:t>• SHAP: raça é o 14º de 28 preditores no XGBoost</a:t>
+            </a:r>
+          </a:p>
+        </p:txBody>
+      </p:sp>
+      <p:sp>
+        <p:nvSpPr>
+          <p:cNvPr id="17" name="Rectangle 16"/>
           <p:cNvSpPr/>
           <p:nvPr/>
         </p:nvSpPr>
         <p:spPr>
           <a:xfrm>
-            <a:off x="6126480" y="1143000"/>
-            <a:ext cx="2811780" cy="4846320"/>
+            <a:off x="3291840" y="3611880"/>
+            <a:ext cx="5303520" cy="2103120"/>
           </a:xfrm>
           <a:prstGeom prst="rect">
             <a:avLst/>
@@ -14006,7 +14237,7 @@
           </a:solidFill>
           <a:ln w="19050">
             <a:solidFill>
-              <a:srgbClr val="2E7D32"/>
+              <a:srgbClr val="1F3864"/>
             </a:solidFill>
           </a:ln>
         </p:spPr>
@@ -14034,20 +14265,20 @@
       </p:sp>
       <p:sp>
         <p:nvSpPr>
-          <p:cNvPr id="14" name="Rectangle 13"/>
+          <p:cNvPr id="18" name="Rectangle 17"/>
           <p:cNvSpPr/>
           <p:nvPr/>
         </p:nvSpPr>
         <p:spPr>
           <a:xfrm>
-            <a:off x="6126480" y="1143000"/>
-            <a:ext cx="2811780" cy="502920"/>
+            <a:off x="3291840" y="3611880"/>
+            <a:ext cx="5303520" cy="457200"/>
           </a:xfrm>
           <a:prstGeom prst="rect">
             <a:avLst/>
           </a:prstGeom>
           <a:solidFill>
-            <a:srgbClr val="2E7D32"/>
+            <a:srgbClr val="1F3864"/>
           </a:solidFill>
           <a:ln/>
         </p:spPr>
@@ -14075,14 +14306,49 @@
       </p:sp>
       <p:sp>
         <p:nvSpPr>
-          <p:cNvPr id="15" name="TextBox 14"/>
-          <p:cNvSpPr txBox="1"/>
-          <p:nvPr/>
-        </p:nvSpPr>
-        <p:spPr>
-          <a:xfrm>
-            <a:off x="6217920" y="1188720"/>
-            <a:ext cx="2628900" cy="457200"/>
+          <p:cNvPr id="19" name="TextBox 18"/>
+          <p:cNvSpPr txBox="1"/>
+          <p:nvPr/>
+        </p:nvSpPr>
+        <p:spPr>
+          <a:xfrm>
+            <a:off x="3383280" y="3657600"/>
+            <a:ext cx="5120640" cy="411480"/>
+          </a:xfrm>
+          <a:prstGeom prst="rect">
+            <a:avLst/>
+          </a:prstGeom>
+          <a:noFill/>
+        </p:spPr>
+        <p:txBody>
+          <a:bodyPr wrap="square">
+            <a:spAutoFit/>
+          </a:bodyPr>
+          <a:lstStyle/>
+          <a:p>
+            <a:pPr algn="ctr"/>
+            <a:r>
+              <a:rPr sz="1300" b="1" i="0">
+                <a:solidFill>
+                  <a:srgbClr val="FFFFFF"/>
+                </a:solidFill>
+                <a:latin typeface="Calibri"/>
+              </a:rPr>
+              <a:t>PENALIDADE INTERSECCIONAL</a:t>
+            </a:r>
+          </a:p>
+        </p:txBody>
+      </p:sp>
+      <p:sp>
+        <p:nvSpPr>
+          <p:cNvPr id="20" name="TextBox 19"/>
+          <p:cNvSpPr txBox="1"/>
+          <p:nvPr/>
+        </p:nvSpPr>
+        <p:spPr>
+          <a:xfrm>
+            <a:off x="3474720" y="4178808"/>
+            <a:ext cx="4937760" cy="457200"/>
           </a:xfrm>
           <a:prstGeom prst="rect">
             <a:avLst/>
@@ -14097,27 +14363,27 @@
           <a:p>
             <a:pPr algn="l"/>
             <a:r>
-              <a:rPr sz="1300" b="1" i="0">
-                <a:solidFill>
-                  <a:srgbClr val="FFFFFF"/>
-                </a:solidFill>
-                <a:latin typeface="Calibri"/>
-              </a:rPr>
-              <a:t>Sem território</a:t>
-            </a:r>
-          </a:p>
-        </p:txBody>
-      </p:sp>
-      <p:sp>
-        <p:nvSpPr>
-          <p:cNvPr id="16" name="TextBox 15"/>
-          <p:cNvSpPr txBox="1"/>
-          <p:nvPr/>
-        </p:nvSpPr>
-        <p:spPr>
-          <a:xfrm>
-            <a:off x="6263640" y="1783080"/>
-            <a:ext cx="2537460" cy="4023360"/>
+              <a:rPr sz="1200" b="0" i="0">
+                <a:solidFill>
+                  <a:srgbClr val="212121"/>
+                </a:solidFill>
+                <a:latin typeface="Calibri"/>
+              </a:rPr>
+              <a:t>• Mulher Negra: gap de 80,7%</a:t>
+            </a:r>
+          </a:p>
+        </p:txBody>
+      </p:sp>
+      <p:sp>
+        <p:nvSpPr>
+          <p:cNvPr id="21" name="TextBox 20"/>
+          <p:cNvSpPr txBox="1"/>
+          <p:nvPr/>
+        </p:nvSpPr>
+        <p:spPr>
+          <a:xfrm>
+            <a:off x="3474720" y="4654296"/>
+            <a:ext cx="4937760" cy="457200"/>
           </a:xfrm>
           <a:prstGeom prst="rect">
             <a:avLst/>
@@ -14132,39 +14398,70 @@
           <a:p>
             <a:pPr algn="l"/>
             <a:r>
-              <a:rPr sz="1300" b="0" i="0">
+              <a:rPr sz="1200" b="0" i="0">
                 <a:solidFill>
                   <a:srgbClr val="212121"/>
                 </a:solidFill>
                 <a:latin typeface="Calibri"/>
               </a:rPr>
-              <a:t>39,5% do gap passa pelo bairro de moradia, e nenhum instrumento federal de diversidade usa o local de moradia como critério.</a:t>
-            </a:r>
-          </a:p>
-        </p:txBody>
-      </p:sp>
-      <p:sp>
-        <p:nvSpPr>
-          <p:cNvPr id="17" name="Rectangle 16"/>
+              <a:t>• Acumula raça e gênero, sem multiplicar (log)</a:t>
+            </a:r>
+          </a:p>
+        </p:txBody>
+      </p:sp>
+      <p:sp>
+        <p:nvSpPr>
+          <p:cNvPr id="22" name="TextBox 21"/>
+          <p:cNvSpPr txBox="1"/>
+          <p:nvPr/>
+        </p:nvSpPr>
+        <p:spPr>
+          <a:xfrm>
+            <a:off x="3474720" y="5129784"/>
+            <a:ext cx="4937760" cy="457200"/>
+          </a:xfrm>
+          <a:prstGeom prst="rect">
+            <a:avLst/>
+          </a:prstGeom>
+          <a:noFill/>
+        </p:spPr>
+        <p:txBody>
+          <a:bodyPr wrap="square">
+            <a:spAutoFit/>
+          </a:bodyPr>
+          <a:lstStyle/>
+          <a:p>
+            <a:pPr algn="l"/>
+            <a:r>
+              <a:rPr sz="1200" b="0" i="0">
+                <a:solidFill>
+                  <a:srgbClr val="212121"/>
+                </a:solidFill>
+                <a:latin typeface="Calibri"/>
+              </a:rPr>
+              <a:t>• Dirigentes: OR 0,63; top 10%: OR 0,28</a:t>
+            </a:r>
+          </a:p>
+        </p:txBody>
+      </p:sp>
+      <p:sp>
+        <p:nvSpPr>
+          <p:cNvPr id="23" name="Rectangle 22"/>
           <p:cNvSpPr/>
           <p:nvPr/>
         </p:nvSpPr>
         <p:spPr>
           <a:xfrm>
-            <a:off x="9029700" y="1143000"/>
-            <a:ext cx="2811780" cy="4846320"/>
+            <a:off x="274320" y="5852160"/>
+            <a:ext cx="11612880" cy="457200"/>
           </a:xfrm>
           <a:prstGeom prst="rect">
             <a:avLst/>
           </a:prstGeom>
           <a:solidFill>
-            <a:srgbClr val="F5F5F5"/>
+            <a:srgbClr val="1F3864"/>
           </a:solidFill>
-          <a:ln w="19050">
-            <a:solidFill>
-              <a:srgbClr val="6A008A"/>
-            </a:solidFill>
-          </a:ln>
+          <a:ln/>
         </p:spPr>
         <p:style>
           <a:lnRef idx="1">
@@ -14190,20 +14487,55 @@
       </p:sp>
       <p:sp>
         <p:nvSpPr>
-          <p:cNvPr id="18" name="Rectangle 17"/>
+          <p:cNvPr id="24" name="TextBox 23"/>
+          <p:cNvSpPr txBox="1"/>
+          <p:nvPr/>
+        </p:nvSpPr>
+        <p:spPr>
+          <a:xfrm>
+            <a:off x="457200" y="5897880"/>
+            <a:ext cx="11247120" cy="411480"/>
+          </a:xfrm>
+          <a:prstGeom prst="rect">
+            <a:avLst/>
+          </a:prstGeom>
+          <a:noFill/>
+        </p:spPr>
+        <p:txBody>
+          <a:bodyPr wrap="square">
+            <a:spAutoFit/>
+          </a:bodyPr>
+          <a:lstStyle/>
+          <a:p>
+            <a:pPr algn="ctr"/>
+            <a:r>
+              <a:rPr sz="1200" b="1" i="0">
+                <a:solidFill>
+                  <a:srgbClr val="FFFFFF"/>
+                </a:solidFill>
+                <a:latin typeface="Calibri"/>
+              </a:rPr>
+              <a:t>Oaxaca: 82,1% do gap é composição e 17,9% retornos | GLMM mostra a barreira de acesso (OR=0,814) | RIF: discriminação de preço maior na base (piso pegajoso)</a:t>
+            </a:r>
+          </a:p>
+        </p:txBody>
+      </p:sp>
+      <p:sp>
+        <p:nvSpPr>
+          <p:cNvPr id="25" name="Rectangle 24"/>
           <p:cNvSpPr/>
           <p:nvPr/>
         </p:nvSpPr>
         <p:spPr>
           <a:xfrm>
-            <a:off x="9029700" y="1143000"/>
-            <a:ext cx="2811780" cy="502920"/>
+            <a:off x="0" y="6601968"/>
+            <a:ext cx="12188952" cy="256032"/>
           </a:xfrm>
           <a:prstGeom prst="rect">
             <a:avLst/>
           </a:prstGeom>
           <a:solidFill>
-            <a:srgbClr val="6A008A"/>
+            <a:srgbClr val="1F3864"/>
           </a:solidFill>
           <a:ln/>
         </p:spPr>
@@ -14231,153 +14563,7 @@
       </p:sp>
       <p:sp>
         <p:nvSpPr>
-          <p:cNvPr id="19" name="TextBox 18"/>
-          <p:cNvSpPr txBox="1"/>
-          <p:nvPr/>
-        </p:nvSpPr>
-        <p:spPr>
-          <a:xfrm>
-            <a:off x="9121140" y="1188720"/>
-            <a:ext cx="2628900" cy="457200"/>
-          </a:xfrm>
-          <a:prstGeom prst="rect">
-            <a:avLst/>
-          </a:prstGeom>
-          <a:noFill/>
-        </p:spPr>
-        <p:txBody>
-          <a:bodyPr wrap="square">
-            <a:spAutoFit/>
-          </a:bodyPr>
-          <a:lstStyle/>
-          <a:p>
-            <a:pPr algn="l"/>
-            <a:r>
-              <a:rPr sz="1300" b="1" i="0">
-                <a:solidFill>
-                  <a:srgbClr val="FFFFFF"/>
-                </a:solidFill>
-                <a:latin typeface="Calibri"/>
-              </a:rPr>
-              <a:t>Um eixo de cada vez</a:t>
-            </a:r>
-          </a:p>
-        </p:txBody>
-      </p:sp>
-      <p:sp>
-        <p:nvSpPr>
-          <p:cNvPr id="20" name="TextBox 19"/>
-          <p:cNvSpPr txBox="1"/>
-          <p:nvPr/>
-        </p:nvSpPr>
-        <p:spPr>
-          <a:xfrm>
-            <a:off x="9166860" y="1783080"/>
-            <a:ext cx="2537460" cy="4023360"/>
-          </a:xfrm>
-          <a:prstGeom prst="rect">
-            <a:avLst/>
-          </a:prstGeom>
-          <a:noFill/>
-        </p:spPr>
-        <p:txBody>
-          <a:bodyPr wrap="square">
-            <a:spAutoFit/>
-          </a:bodyPr>
-          <a:lstStyle/>
-          <a:p>
-            <a:pPr algn="l"/>
-            <a:r>
-              <a:rPr sz="1300" b="0" i="0">
-                <a:solidFill>
-                  <a:srgbClr val="212121"/>
-                </a:solidFill>
-                <a:latin typeface="Calibri"/>
-              </a:rPr>
-              <a:t>Metas separadas por raça e por gênero podem ser cumpridas sem alcançar a mulher negra: entre dirigentes, OR 0,63. A lei de transparência salarial (14.611/2023) coleta raça, mas exige igualdade só entre mulheres e homens.</a:t>
-            </a:r>
-          </a:p>
-        </p:txBody>
-      </p:sp>
-      <p:sp>
-        <p:nvSpPr>
-          <p:cNvPr id="21" name="TextBox 20"/>
-          <p:cNvSpPr txBox="1"/>
-          <p:nvPr/>
-        </p:nvSpPr>
-        <p:spPr>
-          <a:xfrm>
-            <a:off x="274320" y="6172200"/>
-            <a:ext cx="11612880" cy="411480"/>
-          </a:xfrm>
-          <a:prstGeom prst="rect">
-            <a:avLst/>
-          </a:prstGeom>
-          <a:noFill/>
-        </p:spPr>
-        <p:txBody>
-          <a:bodyPr wrap="square">
-            <a:spAutoFit/>
-          </a:bodyPr>
-          <a:lstStyle/>
-          <a:p>
-            <a:pPr algn="ctr"/>
-            <a:r>
-              <a:rPr sz="1200" b="0" i="0">
-                <a:solidFill>
-                  <a:srgbClr val="9E9E9E"/>
-                </a:solidFill>
-                <a:latin typeface="Calibri"/>
-              </a:rPr>
-              <a:t>Associações condicionais, não efeitos causais: os números mostram onde a política não chega, não o efeito de uma política.</a:t>
-            </a:r>
-          </a:p>
-        </p:txBody>
-      </p:sp>
-      <p:sp>
-        <p:nvSpPr>
-          <p:cNvPr id="22" name="Rectangle 21"/>
-          <p:cNvSpPr/>
-          <p:nvPr/>
-        </p:nvSpPr>
-        <p:spPr>
-          <a:xfrm>
-            <a:off x="0" y="6601968"/>
-            <a:ext cx="12188952" cy="256032"/>
-          </a:xfrm>
-          <a:prstGeom prst="rect">
-            <a:avLst/>
-          </a:prstGeom>
-          <a:solidFill>
-            <a:srgbClr val="1F3864"/>
-          </a:solidFill>
-          <a:ln/>
-        </p:spPr>
-        <p:style>
-          <a:lnRef idx="1">
-            <a:schemeClr val="accent1"/>
-          </a:lnRef>
-          <a:fillRef idx="3">
-            <a:schemeClr val="accent1"/>
-          </a:fillRef>
-          <a:effectRef idx="2">
-            <a:schemeClr val="accent1"/>
-          </a:effectRef>
-          <a:fontRef idx="minor">
-            <a:schemeClr val="lt1"/>
-          </a:fontRef>
-        </p:style>
-        <p:txBody>
-          <a:bodyPr rtlCol="0" anchor="ctr"/>
-          <a:lstStyle/>
-          <a:p>
-            <a:pPr algn="ctr"/>
-          </a:p>
-        </p:txBody>
-      </p:sp>
-      <p:sp>
-        <p:nvSpPr>
-          <p:cNvPr id="23" name="TextBox 22"/>
+          <p:cNvPr id="26" name="TextBox 25"/>
           <p:cNvSpPr txBox="1"/>
           <p:nvPr/>
         </p:nvSpPr>
@@ -14412,7 +14598,7 @@
       </p:sp>
       <p:sp>
         <p:nvSpPr>
-          <p:cNvPr id="24" name="TextBox 23"/>
+          <p:cNvPr id="27" name="TextBox 26"/>
           <p:cNvSpPr txBox="1"/>
           <p:nvPr/>
         </p:nvSpPr>
@@ -14440,7 +14626,7 @@
                 </a:solidFill>
                 <a:latin typeface="Calibri"/>
               </a:rPr>
-              <a:t>21/24</a:t>
+              <a:t>21/25</a:t>
             </a:r>
           </a:p>
         </p:txBody>
@@ -14528,13 +14714,13 @@
           <a:p>
             <a:pPr algn="l"/>
             <a:r>
-              <a:rPr sz="1900" b="1" i="0">
+              <a:rPr sz="2200" b="1" i="0">
                 <a:solidFill>
                   <a:srgbClr val="FFFFFF"/>
                 </a:solidFill>
                 <a:latin typeface="Calibri"/>
               </a:rPr>
-              <a:t>20. Cinco propostas para reduzir o racismo estrutural no mercado de trabalho</a:t>
+              <a:t>20. As políticas de diversidade cuidam da entrada, não da subida</a:t>
             </a:r>
           </a:p>
         </p:txBody>
@@ -14569,7 +14755,7 @@
                 </a:solidFill>
                 <a:latin typeface="Calibri"/>
               </a:rPr>
-              <a:t>Sugeridas pelos resultados, não avaliadas por eles</a:t>
+              <a:t>O que os resultados dizem sobre os instrumentos vigentes</a:t>
             </a:r>
           </a:p>
         </p:txBody>
@@ -14582,16 +14768,20 @@
         </p:nvSpPr>
         <p:spPr>
           <a:xfrm>
-            <a:off x="274320" y="1188720"/>
-            <a:ext cx="109728" cy="777240"/>
+            <a:off x="320040" y="1143000"/>
+            <a:ext cx="2811780" cy="4846320"/>
           </a:xfrm>
           <a:prstGeom prst="rect">
             <a:avLst/>
           </a:prstGeom>
           <a:solidFill>
-            <a:srgbClr val="B71C1C"/>
+            <a:srgbClr val="F5F5F5"/>
           </a:solidFill>
-          <a:ln/>
+          <a:ln w="19050">
+            <a:solidFill>
+              <a:srgbClr val="B71C1C"/>
+            </a:solidFill>
+          </a:ln>
         </p:spPr>
         <p:style>
           <a:lnRef idx="1">
@@ -14617,90 +14807,20 @@
       </p:sp>
       <p:sp>
         <p:nvSpPr>
-          <p:cNvPr id="6" name="TextBox 5"/>
-          <p:cNvSpPr txBox="1"/>
-          <p:nvPr/>
-        </p:nvSpPr>
-        <p:spPr>
-          <a:xfrm>
-            <a:off x="548640" y="1188720"/>
-            <a:ext cx="3291840" cy="777240"/>
-          </a:xfrm>
-          <a:prstGeom prst="rect">
-            <a:avLst/>
-          </a:prstGeom>
-          <a:noFill/>
-        </p:spPr>
-        <p:txBody>
-          <a:bodyPr wrap="square">
-            <a:spAutoFit/>
-          </a:bodyPr>
-          <a:lstStyle/>
-          <a:p>
-            <a:pPr algn="l"/>
-            <a:r>
-              <a:rPr sz="1600" b="1" i="0">
-                <a:solidFill>
-                  <a:srgbClr val="B71C1C"/>
-                </a:solidFill>
-                <a:latin typeface="Calibri"/>
-              </a:rPr>
-              <a:t>1. Metas de comando</a:t>
-            </a:r>
-          </a:p>
-        </p:txBody>
-      </p:sp>
-      <p:sp>
-        <p:nvSpPr>
-          <p:cNvPr id="7" name="TextBox 6"/>
-          <p:cNvSpPr txBox="1"/>
-          <p:nvPr/>
-        </p:nvSpPr>
-        <p:spPr>
-          <a:xfrm>
-            <a:off x="3931920" y="1234440"/>
-            <a:ext cx="7955279" cy="777240"/>
-          </a:xfrm>
-          <a:prstGeom prst="rect">
-            <a:avLst/>
-          </a:prstGeom>
-          <a:noFill/>
-        </p:spPr>
-        <p:txBody>
-          <a:bodyPr wrap="square">
-            <a:spAutoFit/>
-          </a:bodyPr>
-          <a:lstStyle/>
-          <a:p>
-            <a:pPr algn="l"/>
-            <a:r>
-              <a:rPr sz="1400" b="0" i="0">
-                <a:solidFill>
-                  <a:srgbClr val="212121"/>
-                </a:solidFill>
-                <a:latin typeface="Calibri"/>
-              </a:rPr>
-              <a:t>Representação em cargos de direção e gerência no setor privado, com recorte interseccional, no relatório que a Lei 14.611 já exige.</a:t>
-            </a:r>
-          </a:p>
-        </p:txBody>
-      </p:sp>
-      <p:sp>
-        <p:nvSpPr>
-          <p:cNvPr id="8" name="Rectangle 7"/>
+          <p:cNvPr id="6" name="Rectangle 5"/>
           <p:cNvSpPr/>
           <p:nvPr/>
         </p:nvSpPr>
         <p:spPr>
           <a:xfrm>
-            <a:off x="274320" y="2148840"/>
-            <a:ext cx="109728" cy="777240"/>
+            <a:off x="320040" y="1143000"/>
+            <a:ext cx="2811780" cy="502920"/>
           </a:xfrm>
           <a:prstGeom prst="rect">
             <a:avLst/>
           </a:prstGeom>
           <a:solidFill>
-            <a:srgbClr val="1565C0"/>
+            <a:srgbClr val="B71C1C"/>
           </a:solidFill>
           <a:ln/>
         </p:spPr>
@@ -14728,14 +14848,14 @@
       </p:sp>
       <p:sp>
         <p:nvSpPr>
-          <p:cNvPr id="9" name="TextBox 8"/>
-          <p:cNvSpPr txBox="1"/>
-          <p:nvPr/>
-        </p:nvSpPr>
-        <p:spPr>
-          <a:xfrm>
-            <a:off x="548640" y="2148840"/>
-            <a:ext cx="3291840" cy="777240"/>
+          <p:cNvPr id="7" name="TextBox 6"/>
+          <p:cNvSpPr txBox="1"/>
+          <p:nvPr/>
+        </p:nvSpPr>
+        <p:spPr>
+          <a:xfrm>
+            <a:off x="411480" y="1188720"/>
+            <a:ext cx="2628900" cy="457200"/>
           </a:xfrm>
           <a:prstGeom prst="rect">
             <a:avLst/>
@@ -14750,27 +14870,27 @@
           <a:p>
             <a:pPr algn="l"/>
             <a:r>
-              <a:rPr sz="1600" b="1" i="0">
-                <a:solidFill>
-                  <a:srgbClr val="1565C0"/>
-                </a:solidFill>
-                <a:latin typeface="Calibri"/>
-              </a:rPr>
-              <a:t>2. Igualdade salarial por raça</a:t>
-            </a:r>
-          </a:p>
-        </p:txBody>
-      </p:sp>
-      <p:sp>
-        <p:nvSpPr>
-          <p:cNvPr id="10" name="TextBox 9"/>
-          <p:cNvSpPr txBox="1"/>
-          <p:nvPr/>
-        </p:nvSpPr>
-        <p:spPr>
-          <a:xfrm>
-            <a:off x="3931920" y="2194560"/>
-            <a:ext cx="7955279" cy="777240"/>
+              <a:rPr sz="1300" b="1" i="0">
+                <a:solidFill>
+                  <a:srgbClr val="FFFFFF"/>
+                </a:solidFill>
+                <a:latin typeface="Calibri"/>
+              </a:rPr>
+              <a:t>Ingresso, não ascensão</a:t>
+            </a:r>
+          </a:p>
+        </p:txBody>
+      </p:sp>
+      <p:sp>
+        <p:nvSpPr>
+          <p:cNvPr id="8" name="TextBox 7"/>
+          <p:cNvSpPr txBox="1"/>
+          <p:nvPr/>
+        </p:nvSpPr>
+        <p:spPr>
+          <a:xfrm>
+            <a:off x="457200" y="1783080"/>
+            <a:ext cx="2537460" cy="4023360"/>
           </a:xfrm>
           <a:prstGeom prst="rect">
             <a:avLst/>
@@ -14785,35 +14905,39 @@
           <a:p>
             <a:pPr algn="l"/>
             <a:r>
-              <a:rPr sz="1400" b="0" i="0">
+              <a:rPr sz="1300" b="0" i="0">
                 <a:solidFill>
                   <a:srgbClr val="212121"/>
                 </a:solidFill>
                 <a:latin typeface="Calibri"/>
               </a:rPr>
-              <a:t>Obrigação, não só dado, com fiscalização dirigida à diferença dentro da mesma ocupação (5,6%).</a:t>
-            </a:r>
-          </a:p>
-        </p:txBody>
-      </p:sp>
-      <p:sp>
-        <p:nvSpPr>
-          <p:cNvPr id="11" name="Rectangle 10"/>
+              <a:t>Cotas no ensino (Lei 12.711/2012, atualizada em 2023) e nos concursos (Lei 15.142/2025) atuam na entrada. A barreira cresce no topo: chances 24% menores no décimo mais rico. A reserva de cargos de confiança (Decreto 11.443/2023) vale só no governo federal.</a:t>
+            </a:r>
+          </a:p>
+        </p:txBody>
+      </p:sp>
+      <p:sp>
+        <p:nvSpPr>
+          <p:cNvPr id="9" name="Rectangle 8"/>
           <p:cNvSpPr/>
           <p:nvPr/>
         </p:nvSpPr>
         <p:spPr>
           <a:xfrm>
-            <a:off x="274320" y="3108960"/>
-            <a:ext cx="109728" cy="777240"/>
+            <a:off x="3223260" y="1143000"/>
+            <a:ext cx="2811780" cy="4846320"/>
           </a:xfrm>
           <a:prstGeom prst="rect">
             <a:avLst/>
           </a:prstGeom>
           <a:solidFill>
-            <a:srgbClr val="2E7D32"/>
+            <a:srgbClr val="F5F5F5"/>
           </a:solidFill>
-          <a:ln/>
+          <a:ln w="19050">
+            <a:solidFill>
+              <a:srgbClr val="1565C0"/>
+            </a:solidFill>
+          </a:ln>
         </p:spPr>
         <p:style>
           <a:lnRef idx="1">
@@ -14839,90 +14963,20 @@
       </p:sp>
       <p:sp>
         <p:nvSpPr>
-          <p:cNvPr id="12" name="TextBox 11"/>
-          <p:cNvSpPr txBox="1"/>
-          <p:nvPr/>
-        </p:nvSpPr>
-        <p:spPr>
-          <a:xfrm>
-            <a:off x="548640" y="3108960"/>
-            <a:ext cx="3291840" cy="777240"/>
-          </a:xfrm>
-          <a:prstGeom prst="rect">
-            <a:avLst/>
-          </a:prstGeom>
-          <a:noFill/>
-        </p:spPr>
-        <p:txBody>
-          <a:bodyPr wrap="square">
-            <a:spAutoFit/>
-          </a:bodyPr>
-          <a:lstStyle/>
-          <a:p>
-            <a:pPr algn="l"/>
-            <a:r>
-              <a:rPr sz="1600" b="1" i="0">
-                <a:solidFill>
-                  <a:srgbClr val="2E7D32"/>
-                </a:solidFill>
-                <a:latin typeface="Calibri"/>
-              </a:rPr>
-              <a:t>3. Território</a:t>
-            </a:r>
-          </a:p>
-        </p:txBody>
-      </p:sp>
-      <p:sp>
-        <p:nvSpPr>
-          <p:cNvPr id="13" name="TextBox 12"/>
-          <p:cNvSpPr txBox="1"/>
-          <p:nvPr/>
-        </p:nvSpPr>
-        <p:spPr>
-          <a:xfrm>
-            <a:off x="3931920" y="3154680"/>
-            <a:ext cx="7955279" cy="777240"/>
-          </a:xfrm>
-          <a:prstGeom prst="rect">
-            <a:avLst/>
-          </a:prstGeom>
-          <a:noFill/>
-        </p:spPr>
-        <p:txBody>
-          <a:bodyPr wrap="square">
-            <a:spAutoFit/>
-          </a:bodyPr>
-          <a:lstStyle/>
-          <a:p>
-            <a:pPr algn="l"/>
-            <a:r>
-              <a:rPr sz="1400" b="0" i="0">
-                <a:solidFill>
-                  <a:srgbClr val="212121"/>
-                </a:solidFill>
-                <a:latin typeface="Calibri"/>
-              </a:rPr>
-              <a:t>Intermediação de emprego, transporte e qualificação priorizados nos bairros de maior proporção de população negra.</a:t>
-            </a:r>
-          </a:p>
-        </p:txBody>
-      </p:sp>
-      <p:sp>
-        <p:nvSpPr>
-          <p:cNvPr id="14" name="Rectangle 13"/>
+          <p:cNvPr id="10" name="Rectangle 9"/>
           <p:cNvSpPr/>
           <p:nvPr/>
         </p:nvSpPr>
         <p:spPr>
           <a:xfrm>
-            <a:off x="274320" y="4069080"/>
-            <a:ext cx="109728" cy="777240"/>
+            <a:off x="3223260" y="1143000"/>
+            <a:ext cx="2811780" cy="502920"/>
           </a:xfrm>
           <a:prstGeom prst="rect">
             <a:avLst/>
           </a:prstGeom>
           <a:solidFill>
-            <a:srgbClr val="FF8F00"/>
+            <a:srgbClr val="1565C0"/>
           </a:solidFill>
           <a:ln/>
         </p:spPr>
@@ -14950,14 +15004,14 @@
       </p:sp>
       <p:sp>
         <p:nvSpPr>
-          <p:cNvPr id="15" name="TextBox 14"/>
-          <p:cNvSpPr txBox="1"/>
-          <p:nvPr/>
-        </p:nvSpPr>
-        <p:spPr>
-          <a:xfrm>
-            <a:off x="548640" y="4069080"/>
-            <a:ext cx="3291840" cy="777240"/>
+          <p:cNvPr id="11" name="TextBox 10"/>
+          <p:cNvSpPr txBox="1"/>
+          <p:nvPr/>
+        </p:nvSpPr>
+        <p:spPr>
+          <a:xfrm>
+            <a:off x="3314700" y="1188720"/>
+            <a:ext cx="2628900" cy="457200"/>
           </a:xfrm>
           <a:prstGeom prst="rect">
             <a:avLst/>
@@ -14972,27 +15026,27 @@
           <a:p>
             <a:pPr algn="l"/>
             <a:r>
-              <a:rPr sz="1600" b="1" i="0">
-                <a:solidFill>
-                  <a:srgbClr val="FF8F00"/>
-                </a:solidFill>
-                <a:latin typeface="Calibri"/>
-              </a:rPr>
-              <a:t>4. Promoção, não só ingresso</a:t>
-            </a:r>
-          </a:p>
-        </p:txBody>
-      </p:sp>
-      <p:sp>
-        <p:nvSpPr>
-          <p:cNvPr id="16" name="TextBox 15"/>
-          <p:cNvSpPr txBox="1"/>
-          <p:nvPr/>
-        </p:nvSpPr>
-        <p:spPr>
-          <a:xfrm>
-            <a:off x="3931920" y="4114800"/>
-            <a:ext cx="7955279" cy="777240"/>
+              <a:rPr sz="1300" b="1" i="0">
+                <a:solidFill>
+                  <a:srgbClr val="FFFFFF"/>
+                </a:solidFill>
+                <a:latin typeface="Calibri"/>
+              </a:rPr>
+              <a:t>Educação iguala o salário, não a porta</a:t>
+            </a:r>
+          </a:p>
+        </p:txBody>
+      </p:sp>
+      <p:sp>
+        <p:nvSpPr>
+          <p:cNvPr id="12" name="TextBox 11"/>
+          <p:cNvSpPr txBox="1"/>
+          <p:nvPr/>
+        </p:nvSpPr>
+        <p:spPr>
+          <a:xfrm>
+            <a:off x="3360420" y="1783080"/>
+            <a:ext cx="2537460" cy="4023360"/>
           </a:xfrm>
           <a:prstGeom prst="rect">
             <a:avLst/>
@@ -15007,35 +15061,39 @@
           <a:p>
             <a:pPr algn="l"/>
             <a:r>
-              <a:rPr sz="1400" b="0" i="0">
+              <a:rPr sz="1300" b="0" i="0">
                 <a:solidFill>
                   <a:srgbClr val="212121"/>
                 </a:solidFill>
                 <a:latin typeface="Calibri"/>
               </a:rPr>
-              <a:t>Estender a reserva de cargos de confiança a estatais e à progressão nas carreiras.</a:t>
-            </a:r>
-          </a:p>
-        </p:txBody>
-      </p:sp>
-      <p:sp>
-        <p:nvSpPr>
-          <p:cNvPr id="17" name="Rectangle 16"/>
+              <a:t>A penalidade cai a 1,1% na pós-graduação, mas as chances de acesso seguem 23% menores. Prouni, Fies e cotas no ensino atacam a barreira que mais cede ao diploma.</a:t>
+            </a:r>
+          </a:p>
+        </p:txBody>
+      </p:sp>
+      <p:sp>
+        <p:nvSpPr>
+          <p:cNvPr id="13" name="Rectangle 12"/>
           <p:cNvSpPr/>
           <p:nvPr/>
         </p:nvSpPr>
         <p:spPr>
           <a:xfrm>
-            <a:off x="274320" y="5029200"/>
-            <a:ext cx="109728" cy="777240"/>
+            <a:off x="6126480" y="1143000"/>
+            <a:ext cx="2811780" cy="4846320"/>
           </a:xfrm>
           <a:prstGeom prst="rect">
             <a:avLst/>
           </a:prstGeom>
           <a:solidFill>
-            <a:srgbClr val="1F3864"/>
+            <a:srgbClr val="F5F5F5"/>
           </a:solidFill>
-          <a:ln/>
+          <a:ln w="19050">
+            <a:solidFill>
+              <a:srgbClr val="2E7D32"/>
+            </a:solidFill>
+          </a:ln>
         </p:spPr>
         <p:style>
           <a:lnRef idx="1">
@@ -15061,14 +15119,55 @@
       </p:sp>
       <p:sp>
         <p:nvSpPr>
-          <p:cNvPr id="18" name="TextBox 17"/>
-          <p:cNvSpPr txBox="1"/>
-          <p:nvPr/>
-        </p:nvSpPr>
-        <p:spPr>
-          <a:xfrm>
-            <a:off x="548640" y="5029200"/>
-            <a:ext cx="3291840" cy="777240"/>
+          <p:cNvPr id="14" name="Rectangle 13"/>
+          <p:cNvSpPr/>
+          <p:nvPr/>
+        </p:nvSpPr>
+        <p:spPr>
+          <a:xfrm>
+            <a:off x="6126480" y="1143000"/>
+            <a:ext cx="2811780" cy="502920"/>
+          </a:xfrm>
+          <a:prstGeom prst="rect">
+            <a:avLst/>
+          </a:prstGeom>
+          <a:solidFill>
+            <a:srgbClr val="2E7D32"/>
+          </a:solidFill>
+          <a:ln/>
+        </p:spPr>
+        <p:style>
+          <a:lnRef idx="1">
+            <a:schemeClr val="accent1"/>
+          </a:lnRef>
+          <a:fillRef idx="3">
+            <a:schemeClr val="accent1"/>
+          </a:fillRef>
+          <a:effectRef idx="2">
+            <a:schemeClr val="accent1"/>
+          </a:effectRef>
+          <a:fontRef idx="minor">
+            <a:schemeClr val="lt1"/>
+          </a:fontRef>
+        </p:style>
+        <p:txBody>
+          <a:bodyPr rtlCol="0" anchor="ctr"/>
+          <a:lstStyle/>
+          <a:p>
+            <a:pPr algn="ctr"/>
+          </a:p>
+        </p:txBody>
+      </p:sp>
+      <p:sp>
+        <p:nvSpPr>
+          <p:cNvPr id="15" name="TextBox 14"/>
+          <p:cNvSpPr txBox="1"/>
+          <p:nvPr/>
+        </p:nvSpPr>
+        <p:spPr>
+          <a:xfrm>
+            <a:off x="6217920" y="1188720"/>
+            <a:ext cx="2628900" cy="457200"/>
           </a:xfrm>
           <a:prstGeom prst="rect">
             <a:avLst/>
@@ -15083,14 +15182,135 @@
           <a:p>
             <a:pPr algn="l"/>
             <a:r>
-              <a:rPr sz="1600" b="1" i="0">
-                <a:solidFill>
-                  <a:srgbClr val="1F3864"/>
-                </a:solidFill>
-                <a:latin typeface="Calibri"/>
-              </a:rPr>
-              <a:t>5. Monitoramento anual</a:t>
-            </a:r>
+              <a:rPr sz="1300" b="1" i="0">
+                <a:solidFill>
+                  <a:srgbClr val="FFFFFF"/>
+                </a:solidFill>
+                <a:latin typeface="Calibri"/>
+              </a:rPr>
+              <a:t>Sem território</a:t>
+            </a:r>
+          </a:p>
+        </p:txBody>
+      </p:sp>
+      <p:sp>
+        <p:nvSpPr>
+          <p:cNvPr id="16" name="TextBox 15"/>
+          <p:cNvSpPr txBox="1"/>
+          <p:nvPr/>
+        </p:nvSpPr>
+        <p:spPr>
+          <a:xfrm>
+            <a:off x="6263640" y="1783080"/>
+            <a:ext cx="2537460" cy="4023360"/>
+          </a:xfrm>
+          <a:prstGeom prst="rect">
+            <a:avLst/>
+          </a:prstGeom>
+          <a:noFill/>
+        </p:spPr>
+        <p:txBody>
+          <a:bodyPr wrap="square">
+            <a:spAutoFit/>
+          </a:bodyPr>
+          <a:lstStyle/>
+          <a:p>
+            <a:pPr algn="l"/>
+            <a:r>
+              <a:rPr sz="1300" b="0" i="0">
+                <a:solidFill>
+                  <a:srgbClr val="212121"/>
+                </a:solidFill>
+                <a:latin typeface="Calibri"/>
+              </a:rPr>
+              <a:t>39,5% do gap passa pelo bairro de moradia, e nenhum instrumento federal de diversidade usa o local de moradia como critério.</a:t>
+            </a:r>
+          </a:p>
+        </p:txBody>
+      </p:sp>
+      <p:sp>
+        <p:nvSpPr>
+          <p:cNvPr id="17" name="Rectangle 16"/>
+          <p:cNvSpPr/>
+          <p:nvPr/>
+        </p:nvSpPr>
+        <p:spPr>
+          <a:xfrm>
+            <a:off x="9029700" y="1143000"/>
+            <a:ext cx="2811780" cy="4846320"/>
+          </a:xfrm>
+          <a:prstGeom prst="rect">
+            <a:avLst/>
+          </a:prstGeom>
+          <a:solidFill>
+            <a:srgbClr val="F5F5F5"/>
+          </a:solidFill>
+          <a:ln w="19050">
+            <a:solidFill>
+              <a:srgbClr val="6A008A"/>
+            </a:solidFill>
+          </a:ln>
+        </p:spPr>
+        <p:style>
+          <a:lnRef idx="1">
+            <a:schemeClr val="accent1"/>
+          </a:lnRef>
+          <a:fillRef idx="3">
+            <a:schemeClr val="accent1"/>
+          </a:fillRef>
+          <a:effectRef idx="2">
+            <a:schemeClr val="accent1"/>
+          </a:effectRef>
+          <a:fontRef idx="minor">
+            <a:schemeClr val="lt1"/>
+          </a:fontRef>
+        </p:style>
+        <p:txBody>
+          <a:bodyPr rtlCol="0" anchor="ctr"/>
+          <a:lstStyle/>
+          <a:p>
+            <a:pPr algn="ctr"/>
+          </a:p>
+        </p:txBody>
+      </p:sp>
+      <p:sp>
+        <p:nvSpPr>
+          <p:cNvPr id="18" name="Rectangle 17"/>
+          <p:cNvSpPr/>
+          <p:nvPr/>
+        </p:nvSpPr>
+        <p:spPr>
+          <a:xfrm>
+            <a:off x="9029700" y="1143000"/>
+            <a:ext cx="2811780" cy="502920"/>
+          </a:xfrm>
+          <a:prstGeom prst="rect">
+            <a:avLst/>
+          </a:prstGeom>
+          <a:solidFill>
+            <a:srgbClr val="6A008A"/>
+          </a:solidFill>
+          <a:ln/>
+        </p:spPr>
+        <p:style>
+          <a:lnRef idx="1">
+            <a:schemeClr val="accent1"/>
+          </a:lnRef>
+          <a:fillRef idx="3">
+            <a:schemeClr val="accent1"/>
+          </a:fillRef>
+          <a:effectRef idx="2">
+            <a:schemeClr val="accent1"/>
+          </a:effectRef>
+          <a:fontRef idx="minor">
+            <a:schemeClr val="lt1"/>
+          </a:fontRef>
+        </p:style>
+        <p:txBody>
+          <a:bodyPr rtlCol="0" anchor="ctr"/>
+          <a:lstStyle/>
+          <a:p>
+            <a:pPr algn="ctr"/>
           </a:p>
         </p:txBody>
       </p:sp>
@@ -15102,8 +15322,8 @@
         </p:nvSpPr>
         <p:spPr>
           <a:xfrm>
-            <a:off x="3931920" y="5074920"/>
-            <a:ext cx="7955279" cy="777240"/>
+            <a:off x="9121140" y="1188720"/>
+            <a:ext cx="2628900" cy="457200"/>
           </a:xfrm>
           <a:prstGeom prst="rect">
             <a:avLst/>
@@ -15118,13 +15338,194 @@
           <a:p>
             <a:pPr algn="l"/>
             <a:r>
-              <a:rPr sz="1400" b="0" i="0">
+              <a:rPr sz="1300" b="1" i="0">
+                <a:solidFill>
+                  <a:srgbClr val="FFFFFF"/>
+                </a:solidFill>
+                <a:latin typeface="Calibri"/>
+              </a:rPr>
+              <a:t>Um eixo de cada vez</a:t>
+            </a:r>
+          </a:p>
+        </p:txBody>
+      </p:sp>
+      <p:sp>
+        <p:nvSpPr>
+          <p:cNvPr id="20" name="TextBox 19"/>
+          <p:cNvSpPr txBox="1"/>
+          <p:nvPr/>
+        </p:nvSpPr>
+        <p:spPr>
+          <a:xfrm>
+            <a:off x="9166860" y="1783080"/>
+            <a:ext cx="2537460" cy="4023360"/>
+          </a:xfrm>
+          <a:prstGeom prst="rect">
+            <a:avLst/>
+          </a:prstGeom>
+          <a:noFill/>
+        </p:spPr>
+        <p:txBody>
+          <a:bodyPr wrap="square">
+            <a:spAutoFit/>
+          </a:bodyPr>
+          <a:lstStyle/>
+          <a:p>
+            <a:pPr algn="l"/>
+            <a:r>
+              <a:rPr sz="1300" b="0" i="0">
                 <a:solidFill>
                   <a:srgbClr val="212121"/>
                 </a:solidFill>
                 <a:latin typeface="Calibri"/>
               </a:rPr>
-              <a:t>Gap líquido, chance de acesso e chance de comando por raça e gênero, reproduzíveis com a PNAD Contínua.</a:t>
+              <a:t>Metas separadas por raça e por gênero podem ser cumpridas sem alcançar a mulher negra: entre dirigentes, OR 0,63. A lei de transparência salarial (14.611/2023) coleta raça, mas exige igualdade só entre mulheres e homens.</a:t>
+            </a:r>
+          </a:p>
+        </p:txBody>
+      </p:sp>
+      <p:sp>
+        <p:nvSpPr>
+          <p:cNvPr id="21" name="TextBox 20"/>
+          <p:cNvSpPr txBox="1"/>
+          <p:nvPr/>
+        </p:nvSpPr>
+        <p:spPr>
+          <a:xfrm>
+            <a:off x="274320" y="6172200"/>
+            <a:ext cx="11612880" cy="411480"/>
+          </a:xfrm>
+          <a:prstGeom prst="rect">
+            <a:avLst/>
+          </a:prstGeom>
+          <a:noFill/>
+        </p:spPr>
+        <p:txBody>
+          <a:bodyPr wrap="square">
+            <a:spAutoFit/>
+          </a:bodyPr>
+          <a:lstStyle/>
+          <a:p>
+            <a:pPr algn="ctr"/>
+            <a:r>
+              <a:rPr sz="1200" b="0" i="0">
+                <a:solidFill>
+                  <a:srgbClr val="9E9E9E"/>
+                </a:solidFill>
+                <a:latin typeface="Calibri"/>
+              </a:rPr>
+              <a:t>Associações condicionais, não efeitos causais: os números mostram onde a política não chega, não o efeito de uma política.</a:t>
+            </a:r>
+          </a:p>
+        </p:txBody>
+      </p:sp>
+      <p:sp>
+        <p:nvSpPr>
+          <p:cNvPr id="22" name="Rectangle 21"/>
+          <p:cNvSpPr/>
+          <p:nvPr/>
+        </p:nvSpPr>
+        <p:spPr>
+          <a:xfrm>
+            <a:off x="0" y="6601968"/>
+            <a:ext cx="12188952" cy="256032"/>
+          </a:xfrm>
+          <a:prstGeom prst="rect">
+            <a:avLst/>
+          </a:prstGeom>
+          <a:solidFill>
+            <a:srgbClr val="1F3864"/>
+          </a:solidFill>
+          <a:ln/>
+        </p:spPr>
+        <p:style>
+          <a:lnRef idx="1">
+            <a:schemeClr val="accent1"/>
+          </a:lnRef>
+          <a:fillRef idx="3">
+            <a:schemeClr val="accent1"/>
+          </a:fillRef>
+          <a:effectRef idx="2">
+            <a:schemeClr val="accent1"/>
+          </a:effectRef>
+          <a:fontRef idx="minor">
+            <a:schemeClr val="lt1"/>
+          </a:fontRef>
+        </p:style>
+        <p:txBody>
+          <a:bodyPr rtlCol="0" anchor="ctr"/>
+          <a:lstStyle/>
+          <a:p>
+            <a:pPr algn="ctr"/>
+          </a:p>
+        </p:txBody>
+      </p:sp>
+      <p:sp>
+        <p:nvSpPr>
+          <p:cNvPr id="23" name="TextBox 22"/>
+          <p:cNvSpPr txBox="1"/>
+          <p:nvPr/>
+        </p:nvSpPr>
+        <p:spPr>
+          <a:xfrm>
+            <a:off x="137160" y="6629400"/>
+            <a:ext cx="10058400" cy="228600"/>
+          </a:xfrm>
+          <a:prstGeom prst="rect">
+            <a:avLst/>
+          </a:prstGeom>
+          <a:noFill/>
+        </p:spPr>
+        <p:txBody>
+          <a:bodyPr wrap="square">
+            <a:spAutoFit/>
+          </a:bodyPr>
+          <a:lstStyle/>
+          <a:p>
+            <a:pPr algn="l"/>
+            <a:r>
+              <a:rPr sz="850" b="0" i="0">
+                <a:solidFill>
+                  <a:srgbClr val="BBDEFB"/>
+                </a:solidFill>
+                <a:latin typeface="Calibri"/>
+              </a:rPr>
+              <a:t>Ricardo Calheiros  |  MBA USP/ESALQ  |  Racismo Estrutural e Mercado de Trabalho</a:t>
+            </a:r>
+          </a:p>
+        </p:txBody>
+      </p:sp>
+      <p:sp>
+        <p:nvSpPr>
+          <p:cNvPr id="24" name="TextBox 23"/>
+          <p:cNvSpPr txBox="1"/>
+          <p:nvPr/>
+        </p:nvSpPr>
+        <p:spPr>
+          <a:xfrm>
+            <a:off x="11521440" y="6629400"/>
+            <a:ext cx="640080" cy="228600"/>
+          </a:xfrm>
+          <a:prstGeom prst="rect">
+            <a:avLst/>
+          </a:prstGeom>
+          <a:noFill/>
+        </p:spPr>
+        <p:txBody>
+          <a:bodyPr wrap="square">
+            <a:spAutoFit/>
+          </a:bodyPr>
+          <a:lstStyle/>
+          <a:p>
+            <a:pPr algn="r"/>
+            <a:r>
+              <a:rPr sz="850" b="0" i="0">
+                <a:solidFill>
+                  <a:srgbClr val="FFFFFF"/>
+                </a:solidFill>
+                <a:latin typeface="Calibri"/>
+              </a:rPr>
+              <a:t>22/25</a:t>
             </a:r>
           </a:p>
         </p:txBody>
@@ -15212,13 +15613,13 @@
           <a:p>
             <a:pPr algn="l"/>
             <a:r>
-              <a:rPr sz="2600" b="1" i="0">
+              <a:rPr sz="1900" b="1" i="0">
                 <a:solidFill>
                   <a:srgbClr val="FFFFFF"/>
                 </a:solidFill>
                 <a:latin typeface="Calibri"/>
               </a:rPr>
-              <a:t>21. O que estes números não dizem</a:t>
+              <a:t>21. Cinco propostas para reduzir o racismo estrutural no mercado de trabalho</a:t>
             </a:r>
           </a:p>
         </p:txBody>
@@ -15253,393 +15654,27 @@
                 </a:solidFill>
                 <a:latin typeface="Calibri"/>
               </a:rPr>
-              <a:t>Honestidade acadêmica: o que este trabalho não faz e por quê</a:t>
-            </a:r>
-          </a:p>
-        </p:txBody>
-      </p:sp>
-      <p:sp>
-        <p:nvSpPr>
-          <p:cNvPr id="5" name="TextBox 4"/>
-          <p:cNvSpPr txBox="1"/>
-          <p:nvPr/>
-        </p:nvSpPr>
-        <p:spPr>
-          <a:xfrm>
-            <a:off x="365760" y="1143000"/>
-            <a:ext cx="5486400" cy="365760"/>
-          </a:xfrm>
-          <a:prstGeom prst="rect">
-            <a:avLst/>
-          </a:prstGeom>
-          <a:noFill/>
-        </p:spPr>
-        <p:txBody>
-          <a:bodyPr wrap="square">
-            <a:spAutoFit/>
-          </a:bodyPr>
-          <a:lstStyle/>
-          <a:p>
-            <a:pPr algn="l"/>
-            <a:r>
-              <a:rPr sz="1600" b="1" i="0">
-                <a:solidFill>
-                  <a:srgbClr val="B71C1C"/>
-                </a:solidFill>
-                <a:latin typeface="Calibri"/>
-              </a:rPr>
-              <a:t>Limitações</a:t>
-            </a:r>
-          </a:p>
-        </p:txBody>
-      </p:sp>
-      <p:sp>
-        <p:nvSpPr>
-          <p:cNvPr id="6" name="TextBox 5"/>
-          <p:cNvSpPr txBox="1"/>
-          <p:nvPr/>
-        </p:nvSpPr>
-        <p:spPr>
-          <a:xfrm>
-            <a:off x="365760" y="1600200"/>
-            <a:ext cx="5669280" cy="3474720"/>
-          </a:xfrm>
-          <a:prstGeom prst="rect">
-            <a:avLst/>
-          </a:prstGeom>
-          <a:noFill/>
-        </p:spPr>
-        <p:txBody>
-          <a:bodyPr wrap="square">
-            <a:spAutoFit/>
-          </a:bodyPr>
-          <a:lstStyle/>
-          <a:p>
-            <a:pPr>
-              <a:spcAft>
-                <a:spcPts val="400"/>
-              </a:spcAft>
-            </a:pPr>
-            <a:r>
-              <a:rPr sz="1300" b="1">
-                <a:solidFill>
-                  <a:srgbClr val="B71C1C"/>
-                </a:solidFill>
-                <a:latin typeface="Calibri"/>
-              </a:rPr>
-              <a:t>▸  </a:t>
-            </a:r>
-            <a:r>
-              <a:rPr sz="1300">
-                <a:solidFill>
-                  <a:srgbClr val="212121"/>
-                </a:solidFill>
-                <a:latin typeface="Calibri"/>
-              </a:rPr>
-              <a:t>PNAD não permite experimentos causais — coeficientes são associações condicionais, não efeitos causais no sentido de Rubin/Pearl</a:t>
-            </a:r>
-          </a:p>
-          <a:p>
-            <a:pPr>
-              <a:spcAft>
-                <a:spcPts val="400"/>
-              </a:spcAft>
-            </a:pPr>
-            <a:r>
-              <a:rPr sz="1300" b="1">
-                <a:solidFill>
-                  <a:srgbClr val="B71C1C"/>
-                </a:solidFill>
-                <a:latin typeface="Calibri"/>
-              </a:rPr>
-              <a:t>▸  </a:t>
-            </a:r>
-            <a:r>
-              <a:rPr sz="1300">
-                <a:solidFill>
-                  <a:srgbClr val="212121"/>
-                </a:solidFill>
-                <a:latin typeface="Calibri"/>
-              </a:rPr>
-              <a:t>UPA como proxy de bairro: unidade de amostragem ≠ bairro administrativo</a:t>
-            </a:r>
-          </a:p>
-          <a:p>
-            <a:pPr>
-              <a:spcAft>
-                <a:spcPts val="400"/>
-              </a:spcAft>
-            </a:pPr>
-            <a:r>
-              <a:rPr sz="1300" b="1">
-                <a:solidFill>
-                  <a:srgbClr val="B71C1C"/>
-                </a:solidFill>
-                <a:latin typeface="Calibri"/>
-              </a:rPr>
-              <a:t>▸  </a:t>
-            </a:r>
-            <a:r>
-              <a:rPr sz="1300">
-                <a:solidFill>
-                  <a:srgbClr val="212121"/>
-                </a:solidFill>
-                <a:latin typeface="Calibri"/>
-              </a:rPr>
-              <a:t>GLMM logístico estimado na PEA completa via lme4::glmer (nAGQ=0, bobyqa, n=7.699.273, 41.454 UPAs), com efeito aleatório de UPA</a:t>
-            </a:r>
-          </a:p>
-          <a:p>
-            <a:pPr>
-              <a:spcAft>
-                <a:spcPts val="400"/>
-              </a:spcAft>
-            </a:pPr>
-            <a:r>
-              <a:rPr sz="1300" b="1">
-                <a:solidFill>
-                  <a:srgbClr val="B71C1C"/>
-                </a:solidFill>
-                <a:latin typeface="Calibri"/>
-              </a:rPr>
-              <a:t>▸  </a:t>
-            </a:r>
-            <a:r>
-              <a:rPr sz="1300">
-                <a:solidFill>
-                  <a:srgbClr val="212121"/>
-                </a:solidFill>
-                <a:latin typeface="Calibri"/>
-              </a:rPr>
-              <a:t>Médias de bairro calculadas sem a própria pessoa (leave-one-out), mas choques comuns ao bairro ainda impedem leitura causal do contexto</a:t>
-            </a:r>
-          </a:p>
-          <a:p>
-            <a:pPr>
-              <a:spcAft>
-                <a:spcPts val="400"/>
-              </a:spcAft>
-            </a:pPr>
-            <a:r>
-              <a:rPr sz="1300" b="1">
-                <a:solidFill>
-                  <a:srgbClr val="B71C1C"/>
-                </a:solidFill>
-                <a:latin typeface="Calibri"/>
-              </a:rPr>
-              <a:t>▸  </a:t>
-            </a:r>
-            <a:r>
-              <a:rPr sz="1300">
-                <a:solidFill>
-                  <a:srgbClr val="212121"/>
-                </a:solidFill>
-                <a:latin typeface="Calibri"/>
-              </a:rPr>
-              <a:t>CBO auto-declarado pode ter viés de classificação por raça (rebaixamento da ocupação declarada)</a:t>
-            </a:r>
-          </a:p>
-        </p:txBody>
-      </p:sp>
-      <p:sp>
-        <p:nvSpPr>
-          <p:cNvPr id="7" name="TextBox 6"/>
-          <p:cNvSpPr txBox="1"/>
-          <p:nvPr/>
-        </p:nvSpPr>
-        <p:spPr>
-          <a:xfrm>
-            <a:off x="6400800" y="1143000"/>
-            <a:ext cx="5486400" cy="365760"/>
-          </a:xfrm>
-          <a:prstGeom prst="rect">
-            <a:avLst/>
-          </a:prstGeom>
-          <a:noFill/>
-        </p:spPr>
-        <p:txBody>
-          <a:bodyPr wrap="square">
-            <a:spAutoFit/>
-          </a:bodyPr>
-          <a:lstStyle/>
-          <a:p>
-            <a:pPr algn="l"/>
-            <a:r>
-              <a:rPr sz="1600" b="1" i="0">
-                <a:solidFill>
-                  <a:srgbClr val="1565C0"/>
-                </a:solidFill>
-                <a:latin typeface="Calibri"/>
-              </a:rPr>
-              <a:t>Agenda Futura</a:t>
-            </a:r>
-          </a:p>
-        </p:txBody>
-      </p:sp>
-      <p:sp>
-        <p:nvSpPr>
-          <p:cNvPr id="8" name="TextBox 7"/>
-          <p:cNvSpPr txBox="1"/>
-          <p:nvPr/>
-        </p:nvSpPr>
-        <p:spPr>
-          <a:xfrm>
-            <a:off x="6400800" y="1600200"/>
-            <a:ext cx="5669280" cy="3474720"/>
-          </a:xfrm>
-          <a:prstGeom prst="rect">
-            <a:avLst/>
-          </a:prstGeom>
-          <a:noFill/>
-        </p:spPr>
-        <p:txBody>
-          <a:bodyPr wrap="square">
-            <a:spAutoFit/>
-          </a:bodyPr>
-          <a:lstStyle/>
-          <a:p>
-            <a:pPr>
-              <a:spcAft>
-                <a:spcPts val="400"/>
-              </a:spcAft>
-            </a:pPr>
-            <a:r>
-              <a:rPr sz="1300" b="1">
-                <a:solidFill>
-                  <a:srgbClr val="1565C0"/>
-                </a:solidFill>
-                <a:latin typeface="Calibri"/>
-              </a:rPr>
-              <a:t>▸  </a:t>
-            </a:r>
-            <a:r>
-              <a:rPr sz="1300">
-                <a:solidFill>
-                  <a:srgbClr val="212121"/>
-                </a:solidFill>
-                <a:latin typeface="Calibri"/>
-              </a:rPr>
-              <a:t>Análise de variáveis instrumentais (IV) para identificação causal — distância à escola técnica como instrumento</a:t>
-            </a:r>
-          </a:p>
-          <a:p>
-            <a:pPr>
-              <a:spcAft>
-                <a:spcPts val="400"/>
-              </a:spcAft>
-            </a:pPr>
-            <a:r>
-              <a:rPr sz="1300" b="1">
-                <a:solidFill>
-                  <a:srgbClr val="1565C0"/>
-                </a:solidFill>
-                <a:latin typeface="Calibri"/>
-              </a:rPr>
-              <a:t>▸  </a:t>
-            </a:r>
-            <a:r>
-              <a:rPr sz="1300">
-                <a:solidFill>
-                  <a:srgbClr val="212121"/>
-                </a:solidFill>
-                <a:latin typeface="Calibri"/>
-              </a:rPr>
-              <a:t>RAIS linkada à PNAD para rastrear trajetórias de mobilidade intraempresa</a:t>
-            </a:r>
-          </a:p>
-          <a:p>
-            <a:pPr>
-              <a:spcAft>
-                <a:spcPts val="400"/>
-              </a:spcAft>
-            </a:pPr>
-            <a:r>
-              <a:rPr sz="1300" b="1">
-                <a:solidFill>
-                  <a:srgbClr val="1565C0"/>
-                </a:solidFill>
-                <a:latin typeface="Calibri"/>
-              </a:rPr>
-              <a:t>▸  </a:t>
-            </a:r>
-            <a:r>
-              <a:rPr sz="1300">
-                <a:solidFill>
-                  <a:srgbClr val="212121"/>
-                </a:solidFill>
-                <a:latin typeface="Calibri"/>
-              </a:rPr>
-              <a:t>Análise de mediação formal (path analysis) raça → ocupação → renda</a:t>
-            </a:r>
-          </a:p>
-          <a:p>
-            <a:pPr>
-              <a:spcAft>
-                <a:spcPts val="400"/>
-              </a:spcAft>
-            </a:pPr>
-            <a:r>
-              <a:rPr sz="1300" b="1">
-                <a:solidFill>
-                  <a:srgbClr val="1565C0"/>
-                </a:solidFill>
-                <a:latin typeface="Calibri"/>
-              </a:rPr>
-              <a:t>▸  </a:t>
-            </a:r>
-            <a:r>
-              <a:rPr sz="1300">
-                <a:solidFill>
-                  <a:srgbClr val="212121"/>
-                </a:solidFill>
-                <a:latin typeface="Calibri"/>
-              </a:rPr>
-              <a:t>Extensão ao setor público por UF — heterogeneidade do teto de vidro entre estados</a:t>
-            </a:r>
-          </a:p>
-          <a:p>
-            <a:pPr>
-              <a:spcAft>
-                <a:spcPts val="400"/>
-              </a:spcAft>
-            </a:pPr>
-            <a:r>
-              <a:rPr sz="1300" b="1">
-                <a:solidFill>
-                  <a:srgbClr val="1565C0"/>
-                </a:solidFill>
-                <a:latin typeface="Calibri"/>
-              </a:rPr>
-              <a:t>▸  </a:t>
-            </a:r>
-            <a:r>
-              <a:rPr sz="1300">
-                <a:solidFill>
-                  <a:srgbClr val="212121"/>
-                </a:solidFill>
-                <a:latin typeface="Calibri"/>
-              </a:rPr>
-              <a:t>Modelo longitudinal com painéis rotativos da PNAD (2T seguidos) para efeitos fixos de indivíduo</a:t>
-            </a:r>
-          </a:p>
-        </p:txBody>
-      </p:sp>
-      <p:sp>
-        <p:nvSpPr>
-          <p:cNvPr id="9" name="Rectangle 8"/>
+              <a:t>Sugeridas pelos resultados, não avaliadas por eles</a:t>
+            </a:r>
+          </a:p>
+        </p:txBody>
+      </p:sp>
+      <p:sp>
+        <p:nvSpPr>
+          <p:cNvPr id="5" name="Rectangle 4"/>
           <p:cNvSpPr/>
           <p:nvPr/>
         </p:nvSpPr>
         <p:spPr>
           <a:xfrm>
-            <a:off x="0" y="6601968"/>
-            <a:ext cx="12188952" cy="256032"/>
+            <a:off x="274320" y="1188720"/>
+            <a:ext cx="109728" cy="777240"/>
           </a:xfrm>
           <a:prstGeom prst="rect">
             <a:avLst/>
           </a:prstGeom>
           <a:solidFill>
-            <a:srgbClr val="1F3864"/>
+            <a:srgbClr val="B71C1C"/>
           </a:solidFill>
           <a:ln/>
         </p:spPr>
@@ -15667,14 +15702,160 @@
       </p:sp>
       <p:sp>
         <p:nvSpPr>
+          <p:cNvPr id="6" name="TextBox 5"/>
+          <p:cNvSpPr txBox="1"/>
+          <p:nvPr/>
+        </p:nvSpPr>
+        <p:spPr>
+          <a:xfrm>
+            <a:off x="548640" y="1188720"/>
+            <a:ext cx="3291840" cy="777240"/>
+          </a:xfrm>
+          <a:prstGeom prst="rect">
+            <a:avLst/>
+          </a:prstGeom>
+          <a:noFill/>
+        </p:spPr>
+        <p:txBody>
+          <a:bodyPr wrap="square">
+            <a:spAutoFit/>
+          </a:bodyPr>
+          <a:lstStyle/>
+          <a:p>
+            <a:pPr algn="l"/>
+            <a:r>
+              <a:rPr sz="1600" b="1" i="0">
+                <a:solidFill>
+                  <a:srgbClr val="B71C1C"/>
+                </a:solidFill>
+                <a:latin typeface="Calibri"/>
+              </a:rPr>
+              <a:t>1. Metas de comando</a:t>
+            </a:r>
+          </a:p>
+        </p:txBody>
+      </p:sp>
+      <p:sp>
+        <p:nvSpPr>
+          <p:cNvPr id="7" name="TextBox 6"/>
+          <p:cNvSpPr txBox="1"/>
+          <p:nvPr/>
+        </p:nvSpPr>
+        <p:spPr>
+          <a:xfrm>
+            <a:off x="3931920" y="1234440"/>
+            <a:ext cx="7955279" cy="777240"/>
+          </a:xfrm>
+          <a:prstGeom prst="rect">
+            <a:avLst/>
+          </a:prstGeom>
+          <a:noFill/>
+        </p:spPr>
+        <p:txBody>
+          <a:bodyPr wrap="square">
+            <a:spAutoFit/>
+          </a:bodyPr>
+          <a:lstStyle/>
+          <a:p>
+            <a:pPr algn="l"/>
+            <a:r>
+              <a:rPr sz="1400" b="0" i="0">
+                <a:solidFill>
+                  <a:srgbClr val="212121"/>
+                </a:solidFill>
+                <a:latin typeface="Calibri"/>
+              </a:rPr>
+              <a:t>Representação em cargos de direção e gerência no setor privado, com recorte interseccional, no relatório que a Lei 14.611 já exige.</a:t>
+            </a:r>
+          </a:p>
+        </p:txBody>
+      </p:sp>
+      <p:sp>
+        <p:nvSpPr>
+          <p:cNvPr id="8" name="Rectangle 7"/>
+          <p:cNvSpPr/>
+          <p:nvPr/>
+        </p:nvSpPr>
+        <p:spPr>
+          <a:xfrm>
+            <a:off x="274320" y="2148840"/>
+            <a:ext cx="109728" cy="777240"/>
+          </a:xfrm>
+          <a:prstGeom prst="rect">
+            <a:avLst/>
+          </a:prstGeom>
+          <a:solidFill>
+            <a:srgbClr val="1565C0"/>
+          </a:solidFill>
+          <a:ln/>
+        </p:spPr>
+        <p:style>
+          <a:lnRef idx="1">
+            <a:schemeClr val="accent1"/>
+          </a:lnRef>
+          <a:fillRef idx="3">
+            <a:schemeClr val="accent1"/>
+          </a:fillRef>
+          <a:effectRef idx="2">
+            <a:schemeClr val="accent1"/>
+          </a:effectRef>
+          <a:fontRef idx="minor">
+            <a:schemeClr val="lt1"/>
+          </a:fontRef>
+        </p:style>
+        <p:txBody>
+          <a:bodyPr rtlCol="0" anchor="ctr"/>
+          <a:lstStyle/>
+          <a:p>
+            <a:pPr algn="ctr"/>
+          </a:p>
+        </p:txBody>
+      </p:sp>
+      <p:sp>
+        <p:nvSpPr>
+          <p:cNvPr id="9" name="TextBox 8"/>
+          <p:cNvSpPr txBox="1"/>
+          <p:nvPr/>
+        </p:nvSpPr>
+        <p:spPr>
+          <a:xfrm>
+            <a:off x="548640" y="2148840"/>
+            <a:ext cx="3291840" cy="777240"/>
+          </a:xfrm>
+          <a:prstGeom prst="rect">
+            <a:avLst/>
+          </a:prstGeom>
+          <a:noFill/>
+        </p:spPr>
+        <p:txBody>
+          <a:bodyPr wrap="square">
+            <a:spAutoFit/>
+          </a:bodyPr>
+          <a:lstStyle/>
+          <a:p>
+            <a:pPr algn="l"/>
+            <a:r>
+              <a:rPr sz="1600" b="1" i="0">
+                <a:solidFill>
+                  <a:srgbClr val="1565C0"/>
+                </a:solidFill>
+                <a:latin typeface="Calibri"/>
+              </a:rPr>
+              <a:t>2. Igualdade salarial por raça</a:t>
+            </a:r>
+          </a:p>
+        </p:txBody>
+      </p:sp>
+      <p:sp>
+        <p:nvSpPr>
           <p:cNvPr id="10" name="TextBox 9"/>
           <p:cNvSpPr txBox="1"/>
           <p:nvPr/>
         </p:nvSpPr>
         <p:spPr>
           <a:xfrm>
-            <a:off x="137160" y="6629400"/>
-            <a:ext cx="10058400" cy="228600"/>
+            <a:off x="3931920" y="2194560"/>
+            <a:ext cx="7955279" cy="777240"/>
           </a:xfrm>
           <a:prstGeom prst="rect">
             <a:avLst/>
@@ -15689,48 +15870,346 @@
           <a:p>
             <a:pPr algn="l"/>
             <a:r>
-              <a:rPr sz="850" b="0" i="0">
-                <a:solidFill>
-                  <a:srgbClr val="BBDEFB"/>
-                </a:solidFill>
-                <a:latin typeface="Calibri"/>
-              </a:rPr>
-              <a:t>Ricardo Calheiros  |  MBA USP/ESALQ  |  Racismo Estrutural e Mercado de Trabalho</a:t>
-            </a:r>
-          </a:p>
-        </p:txBody>
-      </p:sp>
-      <p:sp>
-        <p:nvSpPr>
-          <p:cNvPr id="11" name="TextBox 10"/>
-          <p:cNvSpPr txBox="1"/>
-          <p:nvPr/>
-        </p:nvSpPr>
-        <p:spPr>
-          <a:xfrm>
-            <a:off x="11521440" y="6629400"/>
-            <a:ext cx="640080" cy="228600"/>
-          </a:xfrm>
-          <a:prstGeom prst="rect">
-            <a:avLst/>
-          </a:prstGeom>
-          <a:noFill/>
-        </p:spPr>
-        <p:txBody>
-          <a:bodyPr wrap="square">
-            <a:spAutoFit/>
-          </a:bodyPr>
-          <a:lstStyle/>
-          <a:p>
-            <a:pPr algn="r"/>
-            <a:r>
-              <a:rPr sz="850" b="0" i="0">
-                <a:solidFill>
-                  <a:srgbClr val="FFFFFF"/>
-                </a:solidFill>
-                <a:latin typeface="Calibri"/>
-              </a:rPr>
-              <a:t>23/24</a:t>
+              <a:rPr sz="1400" b="0" i="0">
+                <a:solidFill>
+                  <a:srgbClr val="212121"/>
+                </a:solidFill>
+                <a:latin typeface="Calibri"/>
+              </a:rPr>
+              <a:t>Obrigação, não só dado, com fiscalização dirigida à diferença dentro da mesma ocupação (5,6%).</a:t>
+            </a:r>
+          </a:p>
+        </p:txBody>
+      </p:sp>
+      <p:sp>
+        <p:nvSpPr>
+          <p:cNvPr id="11" name="Rectangle 10"/>
+          <p:cNvSpPr/>
+          <p:nvPr/>
+        </p:nvSpPr>
+        <p:spPr>
+          <a:xfrm>
+            <a:off x="274320" y="3108960"/>
+            <a:ext cx="109728" cy="777240"/>
+          </a:xfrm>
+          <a:prstGeom prst="rect">
+            <a:avLst/>
+          </a:prstGeom>
+          <a:solidFill>
+            <a:srgbClr val="2E7D32"/>
+          </a:solidFill>
+          <a:ln/>
+        </p:spPr>
+        <p:style>
+          <a:lnRef idx="1">
+            <a:schemeClr val="accent1"/>
+          </a:lnRef>
+          <a:fillRef idx="3">
+            <a:schemeClr val="accent1"/>
+          </a:fillRef>
+          <a:effectRef idx="2">
+            <a:schemeClr val="accent1"/>
+          </a:effectRef>
+          <a:fontRef idx="minor">
+            <a:schemeClr val="lt1"/>
+          </a:fontRef>
+        </p:style>
+        <p:txBody>
+          <a:bodyPr rtlCol="0" anchor="ctr"/>
+          <a:lstStyle/>
+          <a:p>
+            <a:pPr algn="ctr"/>
+          </a:p>
+        </p:txBody>
+      </p:sp>
+      <p:sp>
+        <p:nvSpPr>
+          <p:cNvPr id="12" name="TextBox 11"/>
+          <p:cNvSpPr txBox="1"/>
+          <p:nvPr/>
+        </p:nvSpPr>
+        <p:spPr>
+          <a:xfrm>
+            <a:off x="548640" y="3108960"/>
+            <a:ext cx="3291840" cy="777240"/>
+          </a:xfrm>
+          <a:prstGeom prst="rect">
+            <a:avLst/>
+          </a:prstGeom>
+          <a:noFill/>
+        </p:spPr>
+        <p:txBody>
+          <a:bodyPr wrap="square">
+            <a:spAutoFit/>
+          </a:bodyPr>
+          <a:lstStyle/>
+          <a:p>
+            <a:pPr algn="l"/>
+            <a:r>
+              <a:rPr sz="1600" b="1" i="0">
+                <a:solidFill>
+                  <a:srgbClr val="2E7D32"/>
+                </a:solidFill>
+                <a:latin typeface="Calibri"/>
+              </a:rPr>
+              <a:t>3. Território</a:t>
+            </a:r>
+          </a:p>
+        </p:txBody>
+      </p:sp>
+      <p:sp>
+        <p:nvSpPr>
+          <p:cNvPr id="13" name="TextBox 12"/>
+          <p:cNvSpPr txBox="1"/>
+          <p:nvPr/>
+        </p:nvSpPr>
+        <p:spPr>
+          <a:xfrm>
+            <a:off x="3931920" y="3154680"/>
+            <a:ext cx="7955279" cy="777240"/>
+          </a:xfrm>
+          <a:prstGeom prst="rect">
+            <a:avLst/>
+          </a:prstGeom>
+          <a:noFill/>
+        </p:spPr>
+        <p:txBody>
+          <a:bodyPr wrap="square">
+            <a:spAutoFit/>
+          </a:bodyPr>
+          <a:lstStyle/>
+          <a:p>
+            <a:pPr algn="l"/>
+            <a:r>
+              <a:rPr sz="1400" b="0" i="0">
+                <a:solidFill>
+                  <a:srgbClr val="212121"/>
+                </a:solidFill>
+                <a:latin typeface="Calibri"/>
+              </a:rPr>
+              <a:t>Intermediação de emprego, transporte e qualificação priorizados nos bairros de maior proporção de população negra.</a:t>
+            </a:r>
+          </a:p>
+        </p:txBody>
+      </p:sp>
+      <p:sp>
+        <p:nvSpPr>
+          <p:cNvPr id="14" name="Rectangle 13"/>
+          <p:cNvSpPr/>
+          <p:nvPr/>
+        </p:nvSpPr>
+        <p:spPr>
+          <a:xfrm>
+            <a:off x="274320" y="4069080"/>
+            <a:ext cx="109728" cy="777240"/>
+          </a:xfrm>
+          <a:prstGeom prst="rect">
+            <a:avLst/>
+          </a:prstGeom>
+          <a:solidFill>
+            <a:srgbClr val="FF8F00"/>
+          </a:solidFill>
+          <a:ln/>
+        </p:spPr>
+        <p:style>
+          <a:lnRef idx="1">
+            <a:schemeClr val="accent1"/>
+          </a:lnRef>
+          <a:fillRef idx="3">
+            <a:schemeClr val="accent1"/>
+          </a:fillRef>
+          <a:effectRef idx="2">
+            <a:schemeClr val="accent1"/>
+          </a:effectRef>
+          <a:fontRef idx="minor">
+            <a:schemeClr val="lt1"/>
+          </a:fontRef>
+        </p:style>
+        <p:txBody>
+          <a:bodyPr rtlCol="0" anchor="ctr"/>
+          <a:lstStyle/>
+          <a:p>
+            <a:pPr algn="ctr"/>
+          </a:p>
+        </p:txBody>
+      </p:sp>
+      <p:sp>
+        <p:nvSpPr>
+          <p:cNvPr id="15" name="TextBox 14"/>
+          <p:cNvSpPr txBox="1"/>
+          <p:nvPr/>
+        </p:nvSpPr>
+        <p:spPr>
+          <a:xfrm>
+            <a:off x="548640" y="4069080"/>
+            <a:ext cx="3291840" cy="777240"/>
+          </a:xfrm>
+          <a:prstGeom prst="rect">
+            <a:avLst/>
+          </a:prstGeom>
+          <a:noFill/>
+        </p:spPr>
+        <p:txBody>
+          <a:bodyPr wrap="square">
+            <a:spAutoFit/>
+          </a:bodyPr>
+          <a:lstStyle/>
+          <a:p>
+            <a:pPr algn="l"/>
+            <a:r>
+              <a:rPr sz="1600" b="1" i="0">
+                <a:solidFill>
+                  <a:srgbClr val="FF8F00"/>
+                </a:solidFill>
+                <a:latin typeface="Calibri"/>
+              </a:rPr>
+              <a:t>4. Promoção, não só ingresso</a:t>
+            </a:r>
+          </a:p>
+        </p:txBody>
+      </p:sp>
+      <p:sp>
+        <p:nvSpPr>
+          <p:cNvPr id="16" name="TextBox 15"/>
+          <p:cNvSpPr txBox="1"/>
+          <p:nvPr/>
+        </p:nvSpPr>
+        <p:spPr>
+          <a:xfrm>
+            <a:off x="3931920" y="4114800"/>
+            <a:ext cx="7955279" cy="777240"/>
+          </a:xfrm>
+          <a:prstGeom prst="rect">
+            <a:avLst/>
+          </a:prstGeom>
+          <a:noFill/>
+        </p:spPr>
+        <p:txBody>
+          <a:bodyPr wrap="square">
+            <a:spAutoFit/>
+          </a:bodyPr>
+          <a:lstStyle/>
+          <a:p>
+            <a:pPr algn="l"/>
+            <a:r>
+              <a:rPr sz="1400" b="0" i="0">
+                <a:solidFill>
+                  <a:srgbClr val="212121"/>
+                </a:solidFill>
+                <a:latin typeface="Calibri"/>
+              </a:rPr>
+              <a:t>Estender a reserva de cargos de confiança a estatais e à progressão nas carreiras.</a:t>
+            </a:r>
+          </a:p>
+        </p:txBody>
+      </p:sp>
+      <p:sp>
+        <p:nvSpPr>
+          <p:cNvPr id="17" name="Rectangle 16"/>
+          <p:cNvSpPr/>
+          <p:nvPr/>
+        </p:nvSpPr>
+        <p:spPr>
+          <a:xfrm>
+            <a:off x="274320" y="5029200"/>
+            <a:ext cx="109728" cy="777240"/>
+          </a:xfrm>
+          <a:prstGeom prst="rect">
+            <a:avLst/>
+          </a:prstGeom>
+          <a:solidFill>
+            <a:srgbClr val="1F3864"/>
+          </a:solidFill>
+          <a:ln/>
+        </p:spPr>
+        <p:style>
+          <a:lnRef idx="1">
+            <a:schemeClr val="accent1"/>
+          </a:lnRef>
+          <a:fillRef idx="3">
+            <a:schemeClr val="accent1"/>
+          </a:fillRef>
+          <a:effectRef idx="2">
+            <a:schemeClr val="accent1"/>
+          </a:effectRef>
+          <a:fontRef idx="minor">
+            <a:schemeClr val="lt1"/>
+          </a:fontRef>
+        </p:style>
+        <p:txBody>
+          <a:bodyPr rtlCol="0" anchor="ctr"/>
+          <a:lstStyle/>
+          <a:p>
+            <a:pPr algn="ctr"/>
+          </a:p>
+        </p:txBody>
+      </p:sp>
+      <p:sp>
+        <p:nvSpPr>
+          <p:cNvPr id="18" name="TextBox 17"/>
+          <p:cNvSpPr txBox="1"/>
+          <p:nvPr/>
+        </p:nvSpPr>
+        <p:spPr>
+          <a:xfrm>
+            <a:off x="548640" y="5029200"/>
+            <a:ext cx="3291840" cy="777240"/>
+          </a:xfrm>
+          <a:prstGeom prst="rect">
+            <a:avLst/>
+          </a:prstGeom>
+          <a:noFill/>
+        </p:spPr>
+        <p:txBody>
+          <a:bodyPr wrap="square">
+            <a:spAutoFit/>
+          </a:bodyPr>
+          <a:lstStyle/>
+          <a:p>
+            <a:pPr algn="l"/>
+            <a:r>
+              <a:rPr sz="1600" b="1" i="0">
+                <a:solidFill>
+                  <a:srgbClr val="1F3864"/>
+                </a:solidFill>
+                <a:latin typeface="Calibri"/>
+              </a:rPr>
+              <a:t>5. Monitoramento anual</a:t>
+            </a:r>
+          </a:p>
+        </p:txBody>
+      </p:sp>
+      <p:sp>
+        <p:nvSpPr>
+          <p:cNvPr id="19" name="TextBox 18"/>
+          <p:cNvSpPr txBox="1"/>
+          <p:nvPr/>
+        </p:nvSpPr>
+        <p:spPr>
+          <a:xfrm>
+            <a:off x="3931920" y="5074920"/>
+            <a:ext cx="7955279" cy="777240"/>
+          </a:xfrm>
+          <a:prstGeom prst="rect">
+            <a:avLst/>
+          </a:prstGeom>
+          <a:noFill/>
+        </p:spPr>
+        <p:txBody>
+          <a:bodyPr wrap="square">
+            <a:spAutoFit/>
+          </a:bodyPr>
+          <a:lstStyle/>
+          <a:p>
+            <a:pPr algn="l"/>
+            <a:r>
+              <a:rPr sz="1400" b="0" i="0">
+                <a:solidFill>
+                  <a:srgbClr val="212121"/>
+                </a:solidFill>
+                <a:latin typeface="Calibri"/>
+              </a:rPr>
+              <a:t>Gap líquido, chance de acesso e chance de comando por raça e gênero, reproduzíveis com a PNAD Contínua.</a:t>
             </a:r>
           </a:p>
         </p:txBody>
@@ -15762,6 +16241,612 @@
         <p:spPr>
           <a:xfrm>
             <a:off x="0" y="0"/>
+            <a:ext cx="12188952" cy="1005840"/>
+          </a:xfrm>
+          <a:prstGeom prst="rect">
+            <a:avLst/>
+          </a:prstGeom>
+          <a:solidFill>
+            <a:srgbClr val="1F3864"/>
+          </a:solidFill>
+          <a:ln/>
+        </p:spPr>
+        <p:style>
+          <a:lnRef idx="1">
+            <a:schemeClr val="accent1"/>
+          </a:lnRef>
+          <a:fillRef idx="3">
+            <a:schemeClr val="accent1"/>
+          </a:fillRef>
+          <a:effectRef idx="2">
+            <a:schemeClr val="accent1"/>
+          </a:effectRef>
+          <a:fontRef idx="minor">
+            <a:schemeClr val="lt1"/>
+          </a:fontRef>
+        </p:style>
+        <p:txBody>
+          <a:bodyPr rtlCol="0" anchor="ctr"/>
+          <a:lstStyle/>
+          <a:p>
+            <a:pPr algn="ctr"/>
+          </a:p>
+        </p:txBody>
+      </p:sp>
+      <p:sp>
+        <p:nvSpPr>
+          <p:cNvPr id="3" name="TextBox 2"/>
+          <p:cNvSpPr txBox="1"/>
+          <p:nvPr/>
+        </p:nvSpPr>
+        <p:spPr>
+          <a:xfrm>
+            <a:off x="274320" y="73152"/>
+            <a:ext cx="11612880" cy="502920"/>
+          </a:xfrm>
+          <a:prstGeom prst="rect">
+            <a:avLst/>
+          </a:prstGeom>
+          <a:noFill/>
+        </p:spPr>
+        <p:txBody>
+          <a:bodyPr wrap="square">
+            <a:spAutoFit/>
+          </a:bodyPr>
+          <a:lstStyle/>
+          <a:p>
+            <a:pPr algn="l"/>
+            <a:r>
+              <a:rPr sz="2600" b="1" i="0">
+                <a:solidFill>
+                  <a:srgbClr val="FFFFFF"/>
+                </a:solidFill>
+                <a:latin typeface="Calibri"/>
+              </a:rPr>
+              <a:t>22. O que estes números não dizem</a:t>
+            </a:r>
+          </a:p>
+        </p:txBody>
+      </p:sp>
+      <p:sp>
+        <p:nvSpPr>
+          <p:cNvPr id="4" name="TextBox 3"/>
+          <p:cNvSpPr txBox="1"/>
+          <p:nvPr/>
+        </p:nvSpPr>
+        <p:spPr>
+          <a:xfrm>
+            <a:off x="274320" y="594360"/>
+            <a:ext cx="10972800" cy="347472"/>
+          </a:xfrm>
+          <a:prstGeom prst="rect">
+            <a:avLst/>
+          </a:prstGeom>
+          <a:noFill/>
+        </p:spPr>
+        <p:txBody>
+          <a:bodyPr wrap="square">
+            <a:spAutoFit/>
+          </a:bodyPr>
+          <a:lstStyle/>
+          <a:p>
+            <a:pPr algn="l"/>
+            <a:r>
+              <a:rPr sz="1400" b="0" i="0">
+                <a:solidFill>
+                  <a:srgbClr val="BBDEFB"/>
+                </a:solidFill>
+                <a:latin typeface="Calibri"/>
+              </a:rPr>
+              <a:t>Honestidade acadêmica: o que este trabalho não faz e por quê</a:t>
+            </a:r>
+          </a:p>
+        </p:txBody>
+      </p:sp>
+      <p:sp>
+        <p:nvSpPr>
+          <p:cNvPr id="5" name="TextBox 4"/>
+          <p:cNvSpPr txBox="1"/>
+          <p:nvPr/>
+        </p:nvSpPr>
+        <p:spPr>
+          <a:xfrm>
+            <a:off x="365760" y="1143000"/>
+            <a:ext cx="5486400" cy="365760"/>
+          </a:xfrm>
+          <a:prstGeom prst="rect">
+            <a:avLst/>
+          </a:prstGeom>
+          <a:noFill/>
+        </p:spPr>
+        <p:txBody>
+          <a:bodyPr wrap="square">
+            <a:spAutoFit/>
+          </a:bodyPr>
+          <a:lstStyle/>
+          <a:p>
+            <a:pPr algn="l"/>
+            <a:r>
+              <a:rPr sz="1600" b="1" i="0">
+                <a:solidFill>
+                  <a:srgbClr val="B71C1C"/>
+                </a:solidFill>
+                <a:latin typeface="Calibri"/>
+              </a:rPr>
+              <a:t>Limitações</a:t>
+            </a:r>
+          </a:p>
+        </p:txBody>
+      </p:sp>
+      <p:sp>
+        <p:nvSpPr>
+          <p:cNvPr id="6" name="TextBox 5"/>
+          <p:cNvSpPr txBox="1"/>
+          <p:nvPr/>
+        </p:nvSpPr>
+        <p:spPr>
+          <a:xfrm>
+            <a:off x="365760" y="1600200"/>
+            <a:ext cx="5669280" cy="3474720"/>
+          </a:xfrm>
+          <a:prstGeom prst="rect">
+            <a:avLst/>
+          </a:prstGeom>
+          <a:noFill/>
+        </p:spPr>
+        <p:txBody>
+          <a:bodyPr wrap="square">
+            <a:spAutoFit/>
+          </a:bodyPr>
+          <a:lstStyle/>
+          <a:p>
+            <a:pPr>
+              <a:spcAft>
+                <a:spcPts val="400"/>
+              </a:spcAft>
+            </a:pPr>
+            <a:r>
+              <a:rPr sz="1300" b="1">
+                <a:solidFill>
+                  <a:srgbClr val="B71C1C"/>
+                </a:solidFill>
+                <a:latin typeface="Calibri"/>
+              </a:rPr>
+              <a:t>▸  </a:t>
+            </a:r>
+            <a:r>
+              <a:rPr sz="1300">
+                <a:solidFill>
+                  <a:srgbClr val="212121"/>
+                </a:solidFill>
+                <a:latin typeface="Calibri"/>
+              </a:rPr>
+              <a:t>PNAD não permite experimentos causais — coeficientes são associações condicionais, não efeitos causais no sentido de Rubin/Pearl</a:t>
+            </a:r>
+          </a:p>
+          <a:p>
+            <a:pPr>
+              <a:spcAft>
+                <a:spcPts val="400"/>
+              </a:spcAft>
+            </a:pPr>
+            <a:r>
+              <a:rPr sz="1300" b="1">
+                <a:solidFill>
+                  <a:srgbClr val="B71C1C"/>
+                </a:solidFill>
+                <a:latin typeface="Calibri"/>
+              </a:rPr>
+              <a:t>▸  </a:t>
+            </a:r>
+            <a:r>
+              <a:rPr sz="1300">
+                <a:solidFill>
+                  <a:srgbClr val="212121"/>
+                </a:solidFill>
+                <a:latin typeface="Calibri"/>
+              </a:rPr>
+              <a:t>UPA como proxy de bairro: unidade de amostragem ≠ bairro administrativo</a:t>
+            </a:r>
+          </a:p>
+          <a:p>
+            <a:pPr>
+              <a:spcAft>
+                <a:spcPts val="400"/>
+              </a:spcAft>
+            </a:pPr>
+            <a:r>
+              <a:rPr sz="1300" b="1">
+                <a:solidFill>
+                  <a:srgbClr val="B71C1C"/>
+                </a:solidFill>
+                <a:latin typeface="Calibri"/>
+              </a:rPr>
+              <a:t>▸  </a:t>
+            </a:r>
+            <a:r>
+              <a:rPr sz="1300">
+                <a:solidFill>
+                  <a:srgbClr val="212121"/>
+                </a:solidFill>
+                <a:latin typeface="Calibri"/>
+              </a:rPr>
+              <a:t>GLMM logístico estimado na PEA completa via lme4::glmer (nAGQ=0, bobyqa, n=7.699.273, 41.454 UPAs), com efeito aleatório de UPA</a:t>
+            </a:r>
+          </a:p>
+          <a:p>
+            <a:pPr>
+              <a:spcAft>
+                <a:spcPts val="400"/>
+              </a:spcAft>
+            </a:pPr>
+            <a:r>
+              <a:rPr sz="1300" b="1">
+                <a:solidFill>
+                  <a:srgbClr val="B71C1C"/>
+                </a:solidFill>
+                <a:latin typeface="Calibri"/>
+              </a:rPr>
+              <a:t>▸  </a:t>
+            </a:r>
+            <a:r>
+              <a:rPr sz="1300">
+                <a:solidFill>
+                  <a:srgbClr val="212121"/>
+                </a:solidFill>
+                <a:latin typeface="Calibri"/>
+              </a:rPr>
+              <a:t>Médias de bairro calculadas sem a própria pessoa (leave-one-out), mas choques comuns ao bairro ainda impedem leitura causal do contexto</a:t>
+            </a:r>
+          </a:p>
+          <a:p>
+            <a:pPr>
+              <a:spcAft>
+                <a:spcPts val="400"/>
+              </a:spcAft>
+            </a:pPr>
+            <a:r>
+              <a:rPr sz="1300" b="1">
+                <a:solidFill>
+                  <a:srgbClr val="B71C1C"/>
+                </a:solidFill>
+                <a:latin typeface="Calibri"/>
+              </a:rPr>
+              <a:t>▸  </a:t>
+            </a:r>
+            <a:r>
+              <a:rPr sz="1300">
+                <a:solidFill>
+                  <a:srgbClr val="212121"/>
+                </a:solidFill>
+                <a:latin typeface="Calibri"/>
+              </a:rPr>
+              <a:t>CBO auto-declarado pode ter viés de classificação por raça (rebaixamento da ocupação declarada)</a:t>
+            </a:r>
+          </a:p>
+        </p:txBody>
+      </p:sp>
+      <p:sp>
+        <p:nvSpPr>
+          <p:cNvPr id="7" name="TextBox 6"/>
+          <p:cNvSpPr txBox="1"/>
+          <p:nvPr/>
+        </p:nvSpPr>
+        <p:spPr>
+          <a:xfrm>
+            <a:off x="6400800" y="1143000"/>
+            <a:ext cx="5486400" cy="365760"/>
+          </a:xfrm>
+          <a:prstGeom prst="rect">
+            <a:avLst/>
+          </a:prstGeom>
+          <a:noFill/>
+        </p:spPr>
+        <p:txBody>
+          <a:bodyPr wrap="square">
+            <a:spAutoFit/>
+          </a:bodyPr>
+          <a:lstStyle/>
+          <a:p>
+            <a:pPr algn="l"/>
+            <a:r>
+              <a:rPr sz="1600" b="1" i="0">
+                <a:solidFill>
+                  <a:srgbClr val="1565C0"/>
+                </a:solidFill>
+                <a:latin typeface="Calibri"/>
+              </a:rPr>
+              <a:t>Agenda Futura</a:t>
+            </a:r>
+          </a:p>
+        </p:txBody>
+      </p:sp>
+      <p:sp>
+        <p:nvSpPr>
+          <p:cNvPr id="8" name="TextBox 7"/>
+          <p:cNvSpPr txBox="1"/>
+          <p:nvPr/>
+        </p:nvSpPr>
+        <p:spPr>
+          <a:xfrm>
+            <a:off x="6400800" y="1600200"/>
+            <a:ext cx="5669280" cy="3474720"/>
+          </a:xfrm>
+          <a:prstGeom prst="rect">
+            <a:avLst/>
+          </a:prstGeom>
+          <a:noFill/>
+        </p:spPr>
+        <p:txBody>
+          <a:bodyPr wrap="square">
+            <a:spAutoFit/>
+          </a:bodyPr>
+          <a:lstStyle/>
+          <a:p>
+            <a:pPr>
+              <a:spcAft>
+                <a:spcPts val="400"/>
+              </a:spcAft>
+            </a:pPr>
+            <a:r>
+              <a:rPr sz="1300" b="1">
+                <a:solidFill>
+                  <a:srgbClr val="1565C0"/>
+                </a:solidFill>
+                <a:latin typeface="Calibri"/>
+              </a:rPr>
+              <a:t>▸  </a:t>
+            </a:r>
+            <a:r>
+              <a:rPr sz="1300">
+                <a:solidFill>
+                  <a:srgbClr val="212121"/>
+                </a:solidFill>
+                <a:latin typeface="Calibri"/>
+              </a:rPr>
+              <a:t>Análise de variáveis instrumentais (IV) para identificação causal — distância à escola técnica como instrumento</a:t>
+            </a:r>
+          </a:p>
+          <a:p>
+            <a:pPr>
+              <a:spcAft>
+                <a:spcPts val="400"/>
+              </a:spcAft>
+            </a:pPr>
+            <a:r>
+              <a:rPr sz="1300" b="1">
+                <a:solidFill>
+                  <a:srgbClr val="1565C0"/>
+                </a:solidFill>
+                <a:latin typeface="Calibri"/>
+              </a:rPr>
+              <a:t>▸  </a:t>
+            </a:r>
+            <a:r>
+              <a:rPr sz="1300">
+                <a:solidFill>
+                  <a:srgbClr val="212121"/>
+                </a:solidFill>
+                <a:latin typeface="Calibri"/>
+              </a:rPr>
+              <a:t>RAIS linkada à PNAD para rastrear trajetórias de mobilidade intraempresa</a:t>
+            </a:r>
+          </a:p>
+          <a:p>
+            <a:pPr>
+              <a:spcAft>
+                <a:spcPts val="400"/>
+              </a:spcAft>
+            </a:pPr>
+            <a:r>
+              <a:rPr sz="1300" b="1">
+                <a:solidFill>
+                  <a:srgbClr val="1565C0"/>
+                </a:solidFill>
+                <a:latin typeface="Calibri"/>
+              </a:rPr>
+              <a:t>▸  </a:t>
+            </a:r>
+            <a:r>
+              <a:rPr sz="1300">
+                <a:solidFill>
+                  <a:srgbClr val="212121"/>
+                </a:solidFill>
+                <a:latin typeface="Calibri"/>
+              </a:rPr>
+              <a:t>Análise de mediação formal (path analysis) raça → ocupação → renda</a:t>
+            </a:r>
+          </a:p>
+          <a:p>
+            <a:pPr>
+              <a:spcAft>
+                <a:spcPts val="400"/>
+              </a:spcAft>
+            </a:pPr>
+            <a:r>
+              <a:rPr sz="1300" b="1">
+                <a:solidFill>
+                  <a:srgbClr val="1565C0"/>
+                </a:solidFill>
+                <a:latin typeface="Calibri"/>
+              </a:rPr>
+              <a:t>▸  </a:t>
+            </a:r>
+            <a:r>
+              <a:rPr sz="1300">
+                <a:solidFill>
+                  <a:srgbClr val="212121"/>
+                </a:solidFill>
+                <a:latin typeface="Calibri"/>
+              </a:rPr>
+              <a:t>Extensão ao setor público por UF — heterogeneidade do teto de vidro entre estados</a:t>
+            </a:r>
+          </a:p>
+          <a:p>
+            <a:pPr>
+              <a:spcAft>
+                <a:spcPts val="400"/>
+              </a:spcAft>
+            </a:pPr>
+            <a:r>
+              <a:rPr sz="1300" b="1">
+                <a:solidFill>
+                  <a:srgbClr val="1565C0"/>
+                </a:solidFill>
+                <a:latin typeface="Calibri"/>
+              </a:rPr>
+              <a:t>▸  </a:t>
+            </a:r>
+            <a:r>
+              <a:rPr sz="1300">
+                <a:solidFill>
+                  <a:srgbClr val="212121"/>
+                </a:solidFill>
+                <a:latin typeface="Calibri"/>
+              </a:rPr>
+              <a:t>Modelo longitudinal com painéis rotativos da PNAD (2T seguidos) para efeitos fixos de indivíduo</a:t>
+            </a:r>
+          </a:p>
+        </p:txBody>
+      </p:sp>
+      <p:sp>
+        <p:nvSpPr>
+          <p:cNvPr id="9" name="Rectangle 8"/>
+          <p:cNvSpPr/>
+          <p:nvPr/>
+        </p:nvSpPr>
+        <p:spPr>
+          <a:xfrm>
+            <a:off x="0" y="6601968"/>
+            <a:ext cx="12188952" cy="256032"/>
+          </a:xfrm>
+          <a:prstGeom prst="rect">
+            <a:avLst/>
+          </a:prstGeom>
+          <a:solidFill>
+            <a:srgbClr val="1F3864"/>
+          </a:solidFill>
+          <a:ln/>
+        </p:spPr>
+        <p:style>
+          <a:lnRef idx="1">
+            <a:schemeClr val="accent1"/>
+          </a:lnRef>
+          <a:fillRef idx="3">
+            <a:schemeClr val="accent1"/>
+          </a:fillRef>
+          <a:effectRef idx="2">
+            <a:schemeClr val="accent1"/>
+          </a:effectRef>
+          <a:fontRef idx="minor">
+            <a:schemeClr val="lt1"/>
+          </a:fontRef>
+        </p:style>
+        <p:txBody>
+          <a:bodyPr rtlCol="0" anchor="ctr"/>
+          <a:lstStyle/>
+          <a:p>
+            <a:pPr algn="ctr"/>
+          </a:p>
+        </p:txBody>
+      </p:sp>
+      <p:sp>
+        <p:nvSpPr>
+          <p:cNvPr id="10" name="TextBox 9"/>
+          <p:cNvSpPr txBox="1"/>
+          <p:nvPr/>
+        </p:nvSpPr>
+        <p:spPr>
+          <a:xfrm>
+            <a:off x="137160" y="6629400"/>
+            <a:ext cx="10058400" cy="228600"/>
+          </a:xfrm>
+          <a:prstGeom prst="rect">
+            <a:avLst/>
+          </a:prstGeom>
+          <a:noFill/>
+        </p:spPr>
+        <p:txBody>
+          <a:bodyPr wrap="square">
+            <a:spAutoFit/>
+          </a:bodyPr>
+          <a:lstStyle/>
+          <a:p>
+            <a:pPr algn="l"/>
+            <a:r>
+              <a:rPr sz="850" b="0" i="0">
+                <a:solidFill>
+                  <a:srgbClr val="BBDEFB"/>
+                </a:solidFill>
+                <a:latin typeface="Calibri"/>
+              </a:rPr>
+              <a:t>Ricardo Calheiros  |  MBA USP/ESALQ  |  Racismo Estrutural e Mercado de Trabalho</a:t>
+            </a:r>
+          </a:p>
+        </p:txBody>
+      </p:sp>
+      <p:sp>
+        <p:nvSpPr>
+          <p:cNvPr id="11" name="TextBox 10"/>
+          <p:cNvSpPr txBox="1"/>
+          <p:nvPr/>
+        </p:nvSpPr>
+        <p:spPr>
+          <a:xfrm>
+            <a:off x="11521440" y="6629400"/>
+            <a:ext cx="640080" cy="228600"/>
+          </a:xfrm>
+          <a:prstGeom prst="rect">
+            <a:avLst/>
+          </a:prstGeom>
+          <a:noFill/>
+        </p:spPr>
+        <p:txBody>
+          <a:bodyPr wrap="square">
+            <a:spAutoFit/>
+          </a:bodyPr>
+          <a:lstStyle/>
+          <a:p>
+            <a:pPr algn="r"/>
+            <a:r>
+              <a:rPr sz="850" b="0" i="0">
+                <a:solidFill>
+                  <a:srgbClr val="FFFFFF"/>
+                </a:solidFill>
+                <a:latin typeface="Calibri"/>
+              </a:rPr>
+              <a:t>24/25</a:t>
+            </a:r>
+          </a:p>
+        </p:txBody>
+      </p:sp>
+    </p:spTree>
+  </p:cSld>
+  <p:clrMapOvr>
+    <a:masterClrMapping/>
+  </p:clrMapOvr>
+</p:sld>
+</file>
+
+<file path=ppt/slides/slide25.xml><?xml version="1.0" encoding="utf-8"?>
+<p:sld xmlns:a="http://schemas.openxmlformats.org/drawingml/2006/main" xmlns:p="http://schemas.openxmlformats.org/presentationml/2006/main" xmlns:r="http://schemas.openxmlformats.org/officeDocument/2006/relationships">
+  <p:cSld>
+    <p:spTree>
+      <p:nvGrpSpPr>
+        <p:cNvPr id="1" name=""/>
+        <p:cNvGrpSpPr/>
+        <p:nvPr/>
+      </p:nvGrpSpPr>
+      <p:grpSpPr/>
+      <p:sp>
+        <p:nvSpPr>
+          <p:cNvPr id="2" name="Rectangle 1"/>
+          <p:cNvSpPr/>
+          <p:nvPr/>
+        </p:nvSpPr>
+        <p:spPr>
+          <a:xfrm>
+            <a:off x="0" y="0"/>
             <a:ext cx="12188952" cy="6858000"/>
           </a:xfrm>
           <a:prstGeom prst="rect">
@@ -16840,7 +17925,7 @@
                 </a:solidFill>
                 <a:latin typeface="Calibri"/>
               </a:rPr>
-              <a:t>24/24</a:t>
+              <a:t>25/25</a:t>
             </a:r>
           </a:p>
         </p:txBody>
@@ -17493,7 +18578,7 @@
                 </a:solidFill>
                 <a:latin typeface="Calibri"/>
               </a:rPr>
-              <a:t>3/24</a:t>
+              <a:t>3/25</a:t>
             </a:r>
           </a:p>
         </p:txBody>
@@ -18832,7 +19917,7 @@
                 </a:solidFill>
                 <a:latin typeface="Calibri"/>
               </a:rPr>
-              <a:t>4/24</a:t>
+              <a:t>4/25</a:t>
             </a:r>
           </a:p>
         </p:txBody>
@@ -19962,7 +21047,7 @@
                 </a:solidFill>
                 <a:latin typeface="Calibri"/>
               </a:rPr>
-              <a:t>5/24</a:t>
+              <a:t>5/25</a:t>
             </a:r>
           </a:p>
         </p:txBody>
@@ -22007,7 +23092,7 @@
                 </a:solidFill>
                 <a:latin typeface="Calibri"/>
               </a:rPr>
-              <a:t>6/24</a:t>
+              <a:t>6/25</a:t>
             </a:r>
           </a:p>
         </p:txBody>
@@ -22819,7 +23904,7 @@
                 </a:solidFill>
                 <a:latin typeface="Calibri"/>
               </a:rPr>
-              <a:t>7/24</a:t>
+              <a:t>7/25</a:t>
             </a:r>
           </a:p>
         </p:txBody>
@@ -23163,7 +24248,7 @@
                 </a:solidFill>
                 <a:latin typeface="Calibri"/>
               </a:rPr>
-              <a:t>8/24</a:t>
+              <a:t>8/25</a:t>
             </a:r>
           </a:p>
         </p:txBody>
@@ -24073,7 +25158,7 @@
                 </a:solidFill>
                 <a:latin typeface="Calibri"/>
               </a:rPr>
-              <a:t>9/24</a:t>
+              <a:t>9/25</a:t>
             </a:r>
           </a:p>
         </p:txBody>

--- a/entregaveis/TCC_Ricardo_Calheiros_Defesa.pptx
+++ b/entregaveis/TCC_Ricardo_Calheiros_Defesa.pptx
@@ -7899,7 +7899,7 @@
                 </a:solidFill>
                 <a:latin typeface="Calibri"/>
               </a:rPr>
-              <a:t>À esquerda, o acesso (GLMM por grupo); à direita, o salário (Oaxaca-Blinder vs. homem branco) | em log-pontos, gap dela 0,592 &lt; soma 0,629: as desvantagens se acumulam</a:t>
+              <a:t>Esquerda: acesso (GLMM); direita: salário (Oaxaca vs. homem branco) | gap dela 0,592 &lt; soma 0,629 log-pontos: desvantagens se acumulam</a:t>
             </a:r>
           </a:p>
         </p:txBody>
@@ -9486,7 +9486,7 @@
                 </a:solidFill>
                 <a:latin typeface="Calibri"/>
               </a:rPr>
-              <a:t>Pretos: penalidade maior em tudo — salário 7,4% contra 5,8% dos pardos; no topo, a distância cresce (q95: 11,6% × 9,5%)</a:t>
+              <a:t>Pretos: penalidade maior em todas as medidas — salário 7,4% contra 5,8% dos pardos; no 9º decil da renda, a distância cresce (10,0% × 8,0%)</a:t>
             </a:r>
           </a:p>
           <a:p>
@@ -9536,7 +9536,7 @@
                 </a:solidFill>
                 <a:latin typeface="Calibri"/>
               </a:rPr>
-              <a:t>Idade: de 1,7% a 14,7% — coorte ou carreira</a:t>
+              <a:t>Idade: de 1,7% a 14,7% — carreira ou geração (o dado não separa)</a:t>
             </a:r>
           </a:p>
           <a:p>
@@ -9561,7 +9561,7 @@
                 </a:solidFill>
                 <a:latin typeface="Calibri"/>
               </a:rPr>
-              <a:t>Teto de vidro dentro de cada UF: OR 0,762 (não é efeito da geografia)</a:t>
+              <a:t>Teto de vidro dentro de cada UF: OR 0,762 (não decorre da geografia dos salários)</a:t>
             </a:r>
           </a:p>
         </p:txBody>
@@ -9596,14 +9596,49 @@
                 </a:solidFill>
                 <a:latin typeface="Calibri"/>
               </a:rPr>
-              <a:t>"Negro" segue como a categoria da política: pretos e pardos estão abaixo dos brancos em tudo.</a:t>
-            </a:r>
-          </a:p>
-        </p:txBody>
-      </p:sp>
-      <p:sp>
-        <p:nvSpPr>
-          <p:cNvPr id="8" name="Rectangle 7"/>
+              <a:t>"Negro" segue como a categoria da política: pretos e pardos estão abaixo dos brancos em todas as medidas.</a:t>
+            </a:r>
+          </a:p>
+        </p:txBody>
+      </p:sp>
+      <p:sp>
+        <p:nvSpPr>
+          <p:cNvPr id="8" name="TextBox 7"/>
+          <p:cNvSpPr txBox="1"/>
+          <p:nvPr/>
+        </p:nvSpPr>
+        <p:spPr>
+          <a:xfrm>
+            <a:off x="274320" y="6355080"/>
+            <a:ext cx="11612880" cy="274320"/>
+          </a:xfrm>
+          <a:prstGeom prst="rect">
+            <a:avLst/>
+          </a:prstGeom>
+          <a:noFill/>
+        </p:spPr>
+        <p:txBody>
+          <a:bodyPr wrap="square">
+            <a:spAutoFit/>
+          </a:bodyPr>
+          <a:lstStyle/>
+          <a:p>
+            <a:pPr algn="ctr"/>
+            <a:r>
+              <a:rPr sz="1000" b="0" i="0">
+                <a:solidFill>
+                  <a:srgbClr val="1F3864"/>
+                </a:solidFill>
+                <a:latin typeface="Calibri"/>
+              </a:rPr>
+              <a:t>OR &lt; 1 = menor chance que um branco de mesmo perfil e bairro. Fonte: PNAD Contínua 2016–2025, população completa.</a:t>
+            </a:r>
+          </a:p>
+        </p:txBody>
+      </p:sp>
+      <p:sp>
+        <p:nvSpPr>
+          <p:cNvPr id="9" name="Rectangle 8"/>
           <p:cNvSpPr/>
           <p:nvPr/>
         </p:nvSpPr>
@@ -9644,7 +9679,7 @@
       </p:sp>
       <p:sp>
         <p:nvSpPr>
-          <p:cNvPr id="9" name="TextBox 8"/>
+          <p:cNvPr id="10" name="TextBox 9"/>
           <p:cNvSpPr txBox="1"/>
           <p:nvPr/>
         </p:nvSpPr>
@@ -9679,7 +9714,7 @@
       </p:sp>
       <p:sp>
         <p:nvSpPr>
-          <p:cNvPr id="10" name="TextBox 9"/>
+          <p:cNvPr id="11" name="TextBox 10"/>
           <p:cNvSpPr txBox="1"/>
           <p:nvPr/>
         </p:nvSpPr>

--- a/entregaveis/TCC_Ricardo_Calheiros_Defesa.pptx
+++ b/entregaveis/TCC_Ricardo_Calheiros_Defesa.pptx
@@ -17529,7 +17529,7 @@
                 </a:solidFill>
                 <a:latin typeface="Calibri"/>
               </a:rPr>
-              <a:t>1. A desigualdade racial no mercado de trabalho brasileiro é estrutural e multicausal: o gap recua, mas devagar demais para fechar sozinho.</a:t>
+              <a:t>1. A desigualdade racial no mercado de trabalho brasileiro é estrutural e multicausal: o gap recuou num degrau em 2020, sem ritmo para fechar sozinho.</a:t>
             </a:r>
           </a:p>
         </p:txBody>

--- a/entregaveis/TCC_Ricardo_Calheiros_Defesa.pptx
+++ b/entregaveis/TCC_Ricardo_Calheiros_Defesa.pptx
@@ -4365,7 +4365,7 @@
         <p:spPr>
           <a:xfrm>
             <a:off x="274320" y="1188720"/>
-            <a:ext cx="7772400" cy="3123177"/>
+            <a:ext cx="7772400" cy="2436266"/>
           </a:xfrm>
           <a:prstGeom prst="rect">
             <a:avLst/>
@@ -4879,7 +4879,7 @@
         <p:spPr>
           <a:xfrm>
             <a:off x="274320" y="1097280"/>
-            <a:ext cx="6400800" cy="2970187"/>
+            <a:ext cx="6400800" cy="2334194"/>
           </a:xfrm>
           <a:prstGeom prst="rect">
             <a:avLst/>
@@ -5722,7 +5722,7 @@
         <p:spPr>
           <a:xfrm>
             <a:off x="274320" y="1097280"/>
-            <a:ext cx="6949440" cy="4877520"/>
+            <a:ext cx="6949440" cy="4073404"/>
           </a:xfrm>
           <a:prstGeom prst="rect">
             <a:avLst/>
@@ -6471,7 +6471,7 @@
         <p:spPr>
           <a:xfrm>
             <a:off x="274320" y="1097280"/>
-            <a:ext cx="11612880" cy="4198242"/>
+            <a:ext cx="11612880" cy="3363590"/>
           </a:xfrm>
           <a:prstGeom prst="rect">
             <a:avLst/>
@@ -23278,7 +23278,7 @@
         <p:spPr>
           <a:xfrm>
             <a:off x="502920" y="1097280"/>
-            <a:ext cx="7052567" cy="3154680"/>
+            <a:ext cx="7187674" cy="3154680"/>
           </a:xfrm>
           <a:prstGeom prst="rect">
             <a:avLst/>

--- a/entregaveis/TCC_Ricardo_Calheiros_Defesa.pptx
+++ b/entregaveis/TCC_Ricardo_Calheiros_Defesa.pptx
@@ -3222,13 +3222,13 @@
           <a:p>
             <a:pPr algn="ctr"/>
             <a:r>
-              <a:rPr sz="3200" b="1" i="0">
+              <a:rPr sz="3000" b="1" i="0">
                 <a:solidFill>
                   <a:srgbClr val="FFFFFF"/>
                 </a:solidFill>
                 <a:latin typeface="Calibri"/>
               </a:rPr>
-              <a:t>Racismo Estrutural e Mercado de Trabalho no Brasil</a:t>
+              <a:t>Bairro, porta e topo: o racismo estrutural no mercado de trabalho brasileiro</a:t>
             </a:r>
           </a:p>
         </p:txBody>
